--- a/docs/Maqsat_VentureHack2026_Final.pptx
+++ b/docs/Maqsat_VentureHack2026_Final.pptx
@@ -5359,7 +5359,7 @@
                 </a:solidFill>
                 <a:latin typeface="Arial Black"/>
               </a:rPr>
-              <a:t>27 автотестов: база, условия, план, календарь</a:t>
+              <a:t>33 автотеста: база, условия, план, календарь</a:t>
             </a:r>
           </a:p>
         </p:txBody>
@@ -8460,7 +8460,7 @@
                 </a:solidFill>
                 <a:latin typeface="Arial Black"/>
               </a:rPr>
-              <a:t>Мы сами проверили 13 возможностей для школьников Казахстана на официальных сайтах 26.09.2026.</a:t>
+              <a:t>Мы сами собрали 13 возможностей для школьников Казахстана по официальным сайтам и открытым источникам 26.09.2026.</a:t>
             </a:r>
           </a:p>
         </p:txBody>

--- a/docs/Maqsat_VentureHack2026_Final.pptx
+++ b/docs/Maqsat_VentureHack2026_Final.pptx
@@ -16,6 +16,7 @@
     <p:sldId id="264" r:id="rId16"/>
     <p:sldId id="265" r:id="rId17"/>
     <p:sldId id="266" r:id="rId18"/>
+    <p:sldId id="267" r:id="rId19"/>
   </p:sldIdLst>
   <p:sldSz cx="12191695" cy="6858000" type="screen4x3"/>
   <p:notesSz cx="6858000" cy="9144000"/>
@@ -652,7 +653,7 @@
           <a:lstStyle/>
           <a:p>
             <a:r>
-              <a:t>Первая цифра — наш собственный сбор данных, её можно проверить на экране «Откуда данные». Нижняя строка — только реальные ответы опроса; если опрос не успели, удалите её.</a:t>
+              <a:t>Верхние цифры — наш собственный сбор данных (экран «Откуда данные»). Нижние — опрос учеников: 24 ответа, 2 исключены (бессмысленные), выборка смещена к 12 классу и студентам — так и говорите.</a:t>
             </a:r>
           </a:p>
         </p:txBody>
@@ -722,7 +723,7 @@
           <a:lstStyle/>
           <a:p>
             <a:r>
-              <a:t>Ключевое отличие от каналов с объявлениями: мы не просто показываем возможность, а говорим, подходит ли она именно тебе и чего не хватает.</a:t>
+              <a:t>Интервью: школьный профориентатор, завуч, учитель английского, ученик, подававший на FLEX, родитель. Полные ответы — docs/research-plan.md. Подчеркните: изменения сделаны в ту же ночь.</a:t>
             </a:r>
           </a:p>
         </p:txBody>
@@ -792,7 +793,7 @@
           <a:lstStyle/>
           <a:p>
             <a:r>
-              <a:t>Живое демо: главная → «Посмотреть на примере». Показать карточку ML School (дедлайн 8 октября), Yale (почти: английский), НУ (позже, 2028).</a:t>
+              <a:t>Ключевое отличие от каналов с объявлениями: мы не просто показываем возможность, а говорим, подходит ли она именно тебе и чего не хватает.</a:t>
             </a:r>
           </a:p>
         </p:txBody>
@@ -862,7 +863,7 @@
           <a:lstStyle/>
           <a:p>
             <a:r>
-              <a:t>Живое демо: добавить 2–3 возможности → «Мой план» → показать предупреждение о двух дедлайнах → нажать «Добавить в календарь». Запасной путь: #demo-plan.</a:t>
+              <a:t>Живое демо: главная → «Посмотреть на примере». Показать карточку ML School (дедлайн 8 октября), Yale (почти: английский), НУ (позже, 2028).</a:t>
             </a:r>
           </a:p>
         </p:txBody>
@@ -932,7 +933,7 @@
           <a:lstStyle/>
           <a:p>
             <a:r>
-              <a:t>Это прямой ответ на принцип кейса «Evidence over assumptions»: мы показываем пользователю, насколько можно доверять каждому факту.</a:t>
+              <a:t>Живое демо: добавить 2–3 возможности → «Мой план» → показать предупреждение о двух дедлайнах → нажать «Добавить в календарь». Запасной путь: #demo-plan.</a:t>
             </a:r>
           </a:p>
         </p:txBody>
@@ -958,6 +959,76 @@
 </file>
 
 <file path=ppt/notesSlides/notesSlide8.xml><?xml version="1.0" encoding="utf-8"?>
+<p:notes xmlns:a="http://schemas.openxmlformats.org/drawingml/2006/main" xmlns:p="http://schemas.openxmlformats.org/presentationml/2006/main" xmlns:r="http://schemas.openxmlformats.org/officeDocument/2006/relationships">
+  <p:cSld>
+    <p:spTree>
+      <p:nvGrpSpPr>
+        <p:cNvPr id="1" name=""/>
+        <p:cNvGrpSpPr/>
+        <p:nvPr/>
+      </p:nvGrpSpPr>
+      <p:grpSpPr>
+        <a:xfrm>
+          <a:off x="0" y="0"/>
+          <a:ext cx="0" cy="0"/>
+          <a:chOff x="0" y="0"/>
+          <a:chExt cx="0" cy="0"/>
+        </a:xfrm>
+      </p:grpSpPr>
+      <p:sp>
+        <p:nvSpPr>
+          <p:cNvPr id="2" name="Slide Image Placeholder 1"/>
+          <p:cNvSpPr>
+            <a:spLocks noGrp="1"/>
+          </p:cNvSpPr>
+          <p:nvPr>
+            <p:ph type="sldImg" idx="2"/>
+          </p:nvPr>
+        </p:nvSpPr>
+        <p:spPr/>
+      </p:sp>
+      <p:sp>
+        <p:nvSpPr>
+          <p:cNvPr id="3" name="Notes Placeholder 2"/>
+          <p:cNvSpPr>
+            <a:spLocks noGrp="1"/>
+          </p:cNvSpPr>
+          <p:nvPr>
+            <p:ph type="body" idx="3" sz="quarter"/>
+          </p:nvPr>
+        </p:nvSpPr>
+        <p:spPr/>
+        <p:txBody>
+          <a:bodyPr/>
+          <a:lstStyle/>
+          <a:p>
+            <a:r>
+              <a:t>Это прямой ответ на принцип кейса «Evidence over assumptions»: мы показываем пользователю, насколько можно доверять каждому факту.</a:t>
+            </a:r>
+          </a:p>
+        </p:txBody>
+      </p:sp>
+      <p:sp>
+        <p:nvSpPr>
+          <p:cNvPr id="4" name="Slide Number Placeholder 3"/>
+          <p:cNvSpPr>
+            <a:spLocks noGrp="1"/>
+          </p:cNvSpPr>
+          <p:nvPr>
+            <p:ph type="sldNum" idx="5" sz="quarter"/>
+          </p:nvPr>
+        </p:nvSpPr>
+        <p:spPr/>
+      </p:sp>
+    </p:spTree>
+  </p:cSld>
+  <p:clrMapOvr>
+    <a:masterClrMapping/>
+  </p:clrMapOvr>
+</p:notes>
+</file>
+
+<file path=ppt/notesSlides/notesSlide9.xml><?xml version="1.0" encoding="utf-8"?>
 <p:notes xmlns:a="http://schemas.openxmlformats.org/drawingml/2006/main" xmlns:p="http://schemas.openxmlformats.org/presentationml/2006/main" xmlns:r="http://schemas.openxmlformats.org/officeDocument/2006/relationships">
   <p:cSld>
     <p:spTree>
@@ -4913,6 +4984,821 @@
     <p:bg>
       <p:bgPr>
         <a:solidFill>
+          <a:srgbClr val="FFFFFF"/>
+        </a:solidFill>
+        <a:effectLst/>
+      </p:bgPr>
+    </p:bg>
+    <p:spTree>
+      <p:nvGrpSpPr>
+        <p:cNvPr id="1" name=""/>
+        <p:cNvGrpSpPr/>
+        <p:nvPr/>
+      </p:nvGrpSpPr>
+      <p:grpSpPr/>
+      <p:sp>
+        <p:nvSpPr>
+          <p:cNvPr id="2" name="Oval 1"/>
+          <p:cNvSpPr/>
+          <p:nvPr/>
+        </p:nvSpPr>
+        <p:spPr>
+          <a:xfrm>
+            <a:off x="10408615" y="384048"/>
+            <a:ext cx="384048" cy="384048"/>
+          </a:xfrm>
+          <a:prstGeom prst="ellipse">
+            <a:avLst/>
+          </a:prstGeom>
+          <a:noFill/>
+          <a:ln w="25400">
+            <a:solidFill>
+              <a:srgbClr val="2F3FBF"/>
+            </a:solidFill>
+          </a:ln>
+          <a:effectLst/>
+        </p:spPr>
+        <p:style>
+          <a:lnRef idx="1">
+            <a:schemeClr val="accent1"/>
+          </a:lnRef>
+          <a:fillRef idx="3">
+            <a:schemeClr val="accent1"/>
+          </a:fillRef>
+          <a:effectRef idx="2">
+            <a:schemeClr val="accent1"/>
+          </a:effectRef>
+          <a:fontRef idx="minor">
+            <a:schemeClr val="lt1"/>
+          </a:fontRef>
+        </p:style>
+        <p:txBody>
+          <a:bodyPr rtlCol="0" anchor="ctr" lIns="54864" rIns="54864" tIns="18288" bIns="18288"/>
+          <a:lstStyle/>
+          <a:p>
+            <a:pPr algn="ctr"/>
+          </a:p>
+        </p:txBody>
+      </p:sp>
+      <p:sp>
+        <p:nvSpPr>
+          <p:cNvPr id="3" name="Oval 2"/>
+          <p:cNvSpPr/>
+          <p:nvPr/>
+        </p:nvSpPr>
+        <p:spPr>
+          <a:xfrm>
+            <a:off x="10489265" y="464698"/>
+            <a:ext cx="222747" cy="222747"/>
+          </a:xfrm>
+          <a:prstGeom prst="ellipse">
+            <a:avLst/>
+          </a:prstGeom>
+          <a:noFill/>
+          <a:ln w="25400">
+            <a:solidFill>
+              <a:srgbClr val="2F3FBF"/>
+            </a:solidFill>
+          </a:ln>
+          <a:effectLst/>
+        </p:spPr>
+        <p:style>
+          <a:lnRef idx="1">
+            <a:schemeClr val="accent1"/>
+          </a:lnRef>
+          <a:fillRef idx="3">
+            <a:schemeClr val="accent1"/>
+          </a:fillRef>
+          <a:effectRef idx="2">
+            <a:schemeClr val="accent1"/>
+          </a:effectRef>
+          <a:fontRef idx="minor">
+            <a:schemeClr val="lt1"/>
+          </a:fontRef>
+        </p:style>
+        <p:txBody>
+          <a:bodyPr rtlCol="0" anchor="ctr" lIns="54864" rIns="54864" tIns="18288" bIns="18288"/>
+          <a:lstStyle/>
+          <a:p>
+            <a:pPr algn="ctr"/>
+          </a:p>
+        </p:txBody>
+      </p:sp>
+      <p:sp>
+        <p:nvSpPr>
+          <p:cNvPr id="4" name="Oval 3"/>
+          <p:cNvSpPr/>
+          <p:nvPr/>
+        </p:nvSpPr>
+        <p:spPr>
+          <a:xfrm>
+            <a:off x="10562234" y="537667"/>
+            <a:ext cx="76809" cy="76809"/>
+          </a:xfrm>
+          <a:prstGeom prst="ellipse">
+            <a:avLst/>
+          </a:prstGeom>
+          <a:solidFill>
+            <a:srgbClr val="F2A900"/>
+          </a:solidFill>
+          <a:ln>
+            <a:noFill/>
+          </a:ln>
+          <a:effectLst/>
+        </p:spPr>
+        <p:style>
+          <a:lnRef idx="1">
+            <a:schemeClr val="accent1"/>
+          </a:lnRef>
+          <a:fillRef idx="3">
+            <a:schemeClr val="accent1"/>
+          </a:fillRef>
+          <a:effectRef idx="2">
+            <a:schemeClr val="accent1"/>
+          </a:effectRef>
+          <a:fontRef idx="minor">
+            <a:schemeClr val="lt1"/>
+          </a:fontRef>
+        </p:style>
+        <p:txBody>
+          <a:bodyPr rtlCol="0" anchor="ctr" lIns="54864" rIns="54864" tIns="18288" bIns="18288"/>
+          <a:lstStyle/>
+          <a:p>
+            <a:pPr algn="ctr"/>
+          </a:p>
+        </p:txBody>
+      </p:sp>
+      <p:sp>
+        <p:nvSpPr>
+          <p:cNvPr id="5" name="TextBox 4"/>
+          <p:cNvSpPr txBox="1"/>
+          <p:nvPr/>
+        </p:nvSpPr>
+        <p:spPr>
+          <a:xfrm>
+            <a:off x="10884103" y="402336"/>
+            <a:ext cx="1371600" cy="365760"/>
+          </a:xfrm>
+          <a:prstGeom prst="rect">
+            <a:avLst/>
+          </a:prstGeom>
+          <a:noFill/>
+        </p:spPr>
+        <p:txBody>
+          <a:bodyPr wrap="square" lIns="0" rIns="0" tIns="0" bIns="0" anchor="ctr">
+            <a:spAutoFit/>
+          </a:bodyPr>
+          <a:lstStyle/>
+          <a:p>
+            <a:pPr algn="l"/>
+            <a:r>
+              <a:rPr sz="1400" b="0" i="0">
+                <a:solidFill>
+                  <a:srgbClr val="2F3FBF"/>
+                </a:solidFill>
+                <a:latin typeface="Arial Black"/>
+              </a:rPr>
+              <a:t>Maqsat</a:t>
+            </a:r>
+          </a:p>
+        </p:txBody>
+      </p:sp>
+      <p:sp>
+        <p:nvSpPr>
+          <p:cNvPr id="6" name="TextBox 5"/>
+          <p:cNvSpPr txBox="1"/>
+          <p:nvPr/>
+        </p:nvSpPr>
+        <p:spPr>
+          <a:xfrm>
+            <a:off x="640080" y="868680"/>
+            <a:ext cx="10881360" cy="777240"/>
+          </a:xfrm>
+          <a:prstGeom prst="rect">
+            <a:avLst/>
+          </a:prstGeom>
+          <a:noFill/>
+        </p:spPr>
+        <p:txBody>
+          <a:bodyPr wrap="square" lIns="0" rIns="0" tIns="0" bIns="0" anchor="t">
+            <a:spAutoFit/>
+          </a:bodyPr>
+          <a:lstStyle/>
+          <a:p>
+            <a:pPr algn="l"/>
+            <a:r>
+              <a:rPr sz="4400" b="0" i="0">
+                <a:solidFill>
+                  <a:srgbClr val="2F3FBF"/>
+                </a:solidFill>
+                <a:latin typeface="Arial Black"/>
+              </a:rPr>
+              <a:t>КОНКУРЕНТЫ</a:t>
+            </a:r>
+          </a:p>
+        </p:txBody>
+      </p:sp>
+      <p:sp>
+        <p:nvSpPr>
+          <p:cNvPr id="7" name="TextBox 6"/>
+          <p:cNvSpPr txBox="1"/>
+          <p:nvPr/>
+        </p:nvSpPr>
+        <p:spPr>
+          <a:xfrm>
+            <a:off x="640080" y="1618488"/>
+            <a:ext cx="10881360" cy="822960"/>
+          </a:xfrm>
+          <a:prstGeom prst="rect">
+            <a:avLst/>
+          </a:prstGeom>
+          <a:noFill/>
+        </p:spPr>
+        <p:txBody>
+          <a:bodyPr wrap="square" lIns="0" rIns="0" tIns="0" bIns="0" anchor="t">
+            <a:spAutoFit/>
+          </a:bodyPr>
+          <a:lstStyle/>
+          <a:p>
+            <a:pPr algn="l"/>
+            <a:r>
+              <a:rPr sz="2200" b="0" i="0">
+                <a:solidFill>
+                  <a:srgbClr val="111424"/>
+                </a:solidFill>
+                <a:latin typeface="Arial Black"/>
+              </a:rPr>
+              <a:t>ЧЕМ МЫ ОТЛИЧАЕМСЯ</a:t>
+            </a:r>
+          </a:p>
+        </p:txBody>
+      </p:sp>
+      <p:sp>
+        <p:nvSpPr>
+          <p:cNvPr id="8" name="TextBox 7"/>
+          <p:cNvSpPr txBox="1"/>
+          <p:nvPr/>
+        </p:nvSpPr>
+        <p:spPr>
+          <a:xfrm>
+            <a:off x="4892040" y="2194560"/>
+            <a:ext cx="6583680" cy="274320"/>
+          </a:xfrm>
+          <a:prstGeom prst="rect">
+            <a:avLst/>
+          </a:prstGeom>
+          <a:noFill/>
+        </p:spPr>
+        <p:txBody>
+          <a:bodyPr wrap="square" lIns="0" rIns="0" tIns="0" bIns="0" anchor="t">
+            <a:spAutoFit/>
+          </a:bodyPr>
+          <a:lstStyle/>
+          <a:p>
+            <a:pPr algn="l"/>
+            <a:r>
+              <a:rPr sz="1000" b="0" i="0">
+                <a:solidFill>
+                  <a:srgbClr val="7A8094"/>
+                </a:solidFill>
+                <a:latin typeface="Arial Black"/>
+              </a:rPr>
+              <a:t>ЧТО ЕСТЬ СЕЙЧАС</a:t>
+            </a:r>
+          </a:p>
+        </p:txBody>
+      </p:sp>
+      <p:sp>
+        <p:nvSpPr>
+          <p:cNvPr id="9" name="Rectangle 8"/>
+          <p:cNvSpPr/>
+          <p:nvPr/>
+        </p:nvSpPr>
+        <p:spPr>
+          <a:xfrm>
+            <a:off x="640080" y="2514600"/>
+            <a:ext cx="10881360" cy="621792"/>
+          </a:xfrm>
+          <a:prstGeom prst="rect">
+            <a:avLst/>
+          </a:prstGeom>
+          <a:solidFill>
+            <a:srgbClr val="F6F7FB"/>
+          </a:solidFill>
+          <a:ln w="12700">
+            <a:solidFill>
+              <a:srgbClr val="DADEEC"/>
+            </a:solidFill>
+          </a:ln>
+          <a:effectLst/>
+        </p:spPr>
+        <p:style>
+          <a:lnRef idx="1">
+            <a:schemeClr val="accent1"/>
+          </a:lnRef>
+          <a:fillRef idx="3">
+            <a:schemeClr val="accent1"/>
+          </a:fillRef>
+          <a:effectRef idx="2">
+            <a:schemeClr val="accent1"/>
+          </a:effectRef>
+          <a:fontRef idx="minor">
+            <a:schemeClr val="lt1"/>
+          </a:fontRef>
+        </p:style>
+        <p:txBody>
+          <a:bodyPr rtlCol="0" anchor="ctr" lIns="54864" rIns="54864" tIns="18288" bIns="18288"/>
+          <a:lstStyle/>
+          <a:p>
+            <a:pPr algn="ctr"/>
+          </a:p>
+        </p:txBody>
+      </p:sp>
+      <p:sp>
+        <p:nvSpPr>
+          <p:cNvPr id="10" name="TextBox 9"/>
+          <p:cNvSpPr txBox="1"/>
+          <p:nvPr/>
+        </p:nvSpPr>
+        <p:spPr>
+          <a:xfrm>
+            <a:off x="868680" y="2587752"/>
+            <a:ext cx="3840480" cy="502920"/>
+          </a:xfrm>
+          <a:prstGeom prst="rect">
+            <a:avLst/>
+          </a:prstGeom>
+          <a:noFill/>
+        </p:spPr>
+        <p:txBody>
+          <a:bodyPr wrap="square" lIns="0" rIns="0" tIns="0" bIns="0" anchor="ctr">
+            <a:spAutoFit/>
+          </a:bodyPr>
+          <a:lstStyle/>
+          <a:p>
+            <a:pPr algn="l"/>
+            <a:r>
+              <a:rPr sz="1200" b="0" i="0">
+                <a:solidFill>
+                  <a:srgbClr val="111424"/>
+                </a:solidFill>
+                <a:latin typeface="Arial Black"/>
+              </a:rPr>
+              <a:t>Telegram-каналы с объявлениями</a:t>
+            </a:r>
+          </a:p>
+        </p:txBody>
+      </p:sp>
+      <p:sp>
+        <p:nvSpPr>
+          <p:cNvPr id="11" name="TextBox 10"/>
+          <p:cNvSpPr txBox="1"/>
+          <p:nvPr/>
+        </p:nvSpPr>
+        <p:spPr>
+          <a:xfrm>
+            <a:off x="4892040" y="2569464"/>
+            <a:ext cx="6492240" cy="530352"/>
+          </a:xfrm>
+          <a:prstGeom prst="rect">
+            <a:avLst/>
+          </a:prstGeom>
+          <a:noFill/>
+        </p:spPr>
+        <p:txBody>
+          <a:bodyPr wrap="square" lIns="0" rIns="0" tIns="0" bIns="0" anchor="ctr">
+            <a:spAutoFit/>
+          </a:bodyPr>
+          <a:lstStyle/>
+          <a:p>
+            <a:pPr algn="l"/>
+            <a:r>
+              <a:rPr sz="1100" b="0" i="0">
+                <a:solidFill>
+                  <a:srgbClr val="4A4F62"/>
+                </a:solidFill>
+                <a:latin typeface="Arial Black"/>
+              </a:rPr>
+              <a:t>Лента постов: быстро, но без проверки условий и без плана; старое уходит вниз.</a:t>
+            </a:r>
+          </a:p>
+        </p:txBody>
+      </p:sp>
+      <p:sp>
+        <p:nvSpPr>
+          <p:cNvPr id="12" name="Rectangle 11"/>
+          <p:cNvSpPr/>
+          <p:nvPr/>
+        </p:nvSpPr>
+        <p:spPr>
+          <a:xfrm>
+            <a:off x="640080" y="3227832"/>
+            <a:ext cx="10881360" cy="621792"/>
+          </a:xfrm>
+          <a:prstGeom prst="rect">
+            <a:avLst/>
+          </a:prstGeom>
+          <a:solidFill>
+            <a:srgbClr val="F6F7FB"/>
+          </a:solidFill>
+          <a:ln w="12700">
+            <a:solidFill>
+              <a:srgbClr val="DADEEC"/>
+            </a:solidFill>
+          </a:ln>
+          <a:effectLst/>
+        </p:spPr>
+        <p:style>
+          <a:lnRef idx="1">
+            <a:schemeClr val="accent1"/>
+          </a:lnRef>
+          <a:fillRef idx="3">
+            <a:schemeClr val="accent1"/>
+          </a:fillRef>
+          <a:effectRef idx="2">
+            <a:schemeClr val="accent1"/>
+          </a:effectRef>
+          <a:fontRef idx="minor">
+            <a:schemeClr val="lt1"/>
+          </a:fontRef>
+        </p:style>
+        <p:txBody>
+          <a:bodyPr rtlCol="0" anchor="ctr" lIns="54864" rIns="54864" tIns="18288" bIns="18288"/>
+          <a:lstStyle/>
+          <a:p>
+            <a:pPr algn="ctr"/>
+          </a:p>
+        </p:txBody>
+      </p:sp>
+      <p:sp>
+        <p:nvSpPr>
+          <p:cNvPr id="13" name="TextBox 12"/>
+          <p:cNvSpPr txBox="1"/>
+          <p:nvPr/>
+        </p:nvSpPr>
+        <p:spPr>
+          <a:xfrm>
+            <a:off x="868680" y="3300984"/>
+            <a:ext cx="3840480" cy="502920"/>
+          </a:xfrm>
+          <a:prstGeom prst="rect">
+            <a:avLst/>
+          </a:prstGeom>
+          <a:noFill/>
+        </p:spPr>
+        <p:txBody>
+          <a:bodyPr wrap="square" lIns="0" rIns="0" tIns="0" bIns="0" anchor="ctr">
+            <a:spAutoFit/>
+          </a:bodyPr>
+          <a:lstStyle/>
+          <a:p>
+            <a:pPr algn="l"/>
+            <a:r>
+              <a:rPr sz="1200" b="0" i="0">
+                <a:solidFill>
+                  <a:srgbClr val="111424"/>
+                </a:solidFill>
+                <a:latin typeface="Arial Black"/>
+              </a:rPr>
+              <a:t>Сайты-агрегаторы возможностей</a:t>
+            </a:r>
+          </a:p>
+        </p:txBody>
+      </p:sp>
+      <p:sp>
+        <p:nvSpPr>
+          <p:cNvPr id="14" name="TextBox 13"/>
+          <p:cNvSpPr txBox="1"/>
+          <p:nvPr/>
+        </p:nvSpPr>
+        <p:spPr>
+          <a:xfrm>
+            <a:off x="4892040" y="3282696"/>
+            <a:ext cx="6492240" cy="530352"/>
+          </a:xfrm>
+          <a:prstGeom prst="rect">
+            <a:avLst/>
+          </a:prstGeom>
+          <a:noFill/>
+        </p:spPr>
+        <p:txBody>
+          <a:bodyPr wrap="square" lIns="0" rIns="0" tIns="0" bIns="0" anchor="ctr">
+            <a:spAutoFit/>
+          </a:bodyPr>
+          <a:lstStyle/>
+          <a:p>
+            <a:pPr algn="l"/>
+            <a:r>
+              <a:rPr sz="1100" b="0" i="0">
+                <a:solidFill>
+                  <a:srgbClr val="4A4F62"/>
+                </a:solidFill>
+                <a:latin typeface="Arial Black"/>
+              </a:rPr>
+              <a:t>Большие каталоги на английском; фильтры по стране и типу, но не по твоему профилю.</a:t>
+            </a:r>
+          </a:p>
+        </p:txBody>
+      </p:sp>
+      <p:sp>
+        <p:nvSpPr>
+          <p:cNvPr id="15" name="Rectangle 14"/>
+          <p:cNvSpPr/>
+          <p:nvPr/>
+        </p:nvSpPr>
+        <p:spPr>
+          <a:xfrm>
+            <a:off x="640080" y="3941064"/>
+            <a:ext cx="10881360" cy="621792"/>
+          </a:xfrm>
+          <a:prstGeom prst="rect">
+            <a:avLst/>
+          </a:prstGeom>
+          <a:solidFill>
+            <a:srgbClr val="F6F7FB"/>
+          </a:solidFill>
+          <a:ln w="12700">
+            <a:solidFill>
+              <a:srgbClr val="DADEEC"/>
+            </a:solidFill>
+          </a:ln>
+          <a:effectLst/>
+        </p:spPr>
+        <p:style>
+          <a:lnRef idx="1">
+            <a:schemeClr val="accent1"/>
+          </a:lnRef>
+          <a:fillRef idx="3">
+            <a:schemeClr val="accent1"/>
+          </a:fillRef>
+          <a:effectRef idx="2">
+            <a:schemeClr val="accent1"/>
+          </a:effectRef>
+          <a:fontRef idx="minor">
+            <a:schemeClr val="lt1"/>
+          </a:fontRef>
+        </p:style>
+        <p:txBody>
+          <a:bodyPr rtlCol="0" anchor="ctr" lIns="54864" rIns="54864" tIns="18288" bIns="18288"/>
+          <a:lstStyle/>
+          <a:p>
+            <a:pPr algn="ctr"/>
+          </a:p>
+        </p:txBody>
+      </p:sp>
+      <p:sp>
+        <p:nvSpPr>
+          <p:cNvPr id="16" name="TextBox 15"/>
+          <p:cNvSpPr txBox="1"/>
+          <p:nvPr/>
+        </p:nvSpPr>
+        <p:spPr>
+          <a:xfrm>
+            <a:off x="868680" y="4014216"/>
+            <a:ext cx="3840480" cy="502920"/>
+          </a:xfrm>
+          <a:prstGeom prst="rect">
+            <a:avLst/>
+          </a:prstGeom>
+          <a:noFill/>
+        </p:spPr>
+        <p:txBody>
+          <a:bodyPr wrap="square" lIns="0" rIns="0" tIns="0" bIns="0" anchor="ctr">
+            <a:spAutoFit/>
+          </a:bodyPr>
+          <a:lstStyle/>
+          <a:p>
+            <a:pPr algn="l"/>
+            <a:r>
+              <a:rPr sz="1200" b="0" i="0">
+                <a:solidFill>
+                  <a:srgbClr val="111424"/>
+                </a:solidFill>
+                <a:latin typeface="Arial Black"/>
+              </a:rPr>
+              <a:t>Официальные сайты программ</a:t>
+            </a:r>
+          </a:p>
+        </p:txBody>
+      </p:sp>
+      <p:sp>
+        <p:nvSpPr>
+          <p:cNvPr id="17" name="TextBox 16"/>
+          <p:cNvSpPr txBox="1"/>
+          <p:nvPr/>
+        </p:nvSpPr>
+        <p:spPr>
+          <a:xfrm>
+            <a:off x="4892040" y="3995928"/>
+            <a:ext cx="6492240" cy="530352"/>
+          </a:xfrm>
+          <a:prstGeom prst="rect">
+            <a:avLst/>
+          </a:prstGeom>
+          <a:noFill/>
+        </p:spPr>
+        <p:txBody>
+          <a:bodyPr wrap="square" lIns="0" rIns="0" tIns="0" bIns="0" anchor="ctr">
+            <a:spAutoFit/>
+          </a:bodyPr>
+          <a:lstStyle/>
+          <a:p>
+            <a:pPr algn="l"/>
+            <a:r>
+              <a:rPr sz="1100" b="0" i="0">
+                <a:solidFill>
+                  <a:srgbClr val="4A4F62"/>
+                </a:solidFill>
+                <a:latin typeface="Arial Black"/>
+              </a:rPr>
+              <a:t>Точные условия, но у каждой программы свой сайт, свой язык и свой календарь.</a:t>
+            </a:r>
+          </a:p>
+        </p:txBody>
+      </p:sp>
+      <p:sp>
+        <p:nvSpPr>
+          <p:cNvPr id="18" name="Rectangle 17"/>
+          <p:cNvSpPr/>
+          <p:nvPr/>
+        </p:nvSpPr>
+        <p:spPr>
+          <a:xfrm>
+            <a:off x="640080" y="4654296"/>
+            <a:ext cx="10881360" cy="621792"/>
+          </a:xfrm>
+          <a:prstGeom prst="rect">
+            <a:avLst/>
+          </a:prstGeom>
+          <a:solidFill>
+            <a:srgbClr val="F6F7FB"/>
+          </a:solidFill>
+          <a:ln w="12700">
+            <a:solidFill>
+              <a:srgbClr val="DADEEC"/>
+            </a:solidFill>
+          </a:ln>
+          <a:effectLst/>
+        </p:spPr>
+        <p:style>
+          <a:lnRef idx="1">
+            <a:schemeClr val="accent1"/>
+          </a:lnRef>
+          <a:fillRef idx="3">
+            <a:schemeClr val="accent1"/>
+          </a:fillRef>
+          <a:effectRef idx="2">
+            <a:schemeClr val="accent1"/>
+          </a:effectRef>
+          <a:fontRef idx="minor">
+            <a:schemeClr val="lt1"/>
+          </a:fontRef>
+        </p:style>
+        <p:txBody>
+          <a:bodyPr rtlCol="0" anchor="ctr" lIns="54864" rIns="54864" tIns="18288" bIns="18288"/>
+          <a:lstStyle/>
+          <a:p>
+            <a:pPr algn="ctr"/>
+          </a:p>
+        </p:txBody>
+      </p:sp>
+      <p:sp>
+        <p:nvSpPr>
+          <p:cNvPr id="19" name="TextBox 18"/>
+          <p:cNvSpPr txBox="1"/>
+          <p:nvPr/>
+        </p:nvSpPr>
+        <p:spPr>
+          <a:xfrm>
+            <a:off x="868680" y="4727448"/>
+            <a:ext cx="3840480" cy="502920"/>
+          </a:xfrm>
+          <a:prstGeom prst="rect">
+            <a:avLst/>
+          </a:prstGeom>
+          <a:noFill/>
+        </p:spPr>
+        <p:txBody>
+          <a:bodyPr wrap="square" lIns="0" rIns="0" tIns="0" bIns="0" anchor="ctr">
+            <a:spAutoFit/>
+          </a:bodyPr>
+          <a:lstStyle/>
+          <a:p>
+            <a:pPr algn="l"/>
+            <a:r>
+              <a:rPr sz="1200" b="0" i="0">
+                <a:solidFill>
+                  <a:srgbClr val="111424"/>
+                </a:solidFill>
+                <a:latin typeface="Arial Black"/>
+              </a:rPr>
+              <a:t>Школьный учитель / профориентатор</a:t>
+            </a:r>
+          </a:p>
+        </p:txBody>
+      </p:sp>
+      <p:sp>
+        <p:nvSpPr>
+          <p:cNvPr id="20" name="TextBox 19"/>
+          <p:cNvSpPr txBox="1"/>
+          <p:nvPr/>
+        </p:nvSpPr>
+        <p:spPr>
+          <a:xfrm>
+            <a:off x="4892040" y="4709159"/>
+            <a:ext cx="6492240" cy="530352"/>
+          </a:xfrm>
+          <a:prstGeom prst="rect">
+            <a:avLst/>
+          </a:prstGeom>
+          <a:noFill/>
+        </p:spPr>
+        <p:txBody>
+          <a:bodyPr wrap="square" lIns="0" rIns="0" tIns="0" bIns="0" anchor="ctr">
+            <a:spAutoFit/>
+          </a:bodyPr>
+          <a:lstStyle/>
+          <a:p>
+            <a:pPr algn="l"/>
+            <a:r>
+              <a:rPr sz="1100" b="0" i="0">
+                <a:solidFill>
+                  <a:srgbClr val="4A4F62"/>
+                </a:solidFill>
+                <a:latin typeface="Arial Black"/>
+              </a:rPr>
+              <a:t>Знает учеников, но не успевает следить за десятками программ и сроков.</a:t>
+            </a:r>
+          </a:p>
+        </p:txBody>
+      </p:sp>
+      <p:sp>
+        <p:nvSpPr>
+          <p:cNvPr id="21" name="Rectangle 20"/>
+          <p:cNvSpPr/>
+          <p:nvPr/>
+        </p:nvSpPr>
+        <p:spPr>
+          <a:xfrm>
+            <a:off x="640080" y="5486400"/>
+            <a:ext cx="10881360" cy="548640"/>
+          </a:xfrm>
+          <a:prstGeom prst="rect">
+            <a:avLst/>
+          </a:prstGeom>
+          <a:solidFill>
+            <a:srgbClr val="2F3FBF"/>
+          </a:solidFill>
+          <a:ln>
+            <a:noFill/>
+          </a:ln>
+          <a:effectLst/>
+        </p:spPr>
+        <p:style>
+          <a:lnRef idx="1">
+            <a:schemeClr val="accent1"/>
+          </a:lnRef>
+          <a:fillRef idx="3">
+            <a:schemeClr val="accent1"/>
+          </a:fillRef>
+          <a:effectRef idx="2">
+            <a:schemeClr val="accent1"/>
+          </a:effectRef>
+          <a:fontRef idx="minor">
+            <a:schemeClr val="lt1"/>
+          </a:fontRef>
+        </p:style>
+        <p:txBody>
+          <a:bodyPr rtlCol="0" anchor="ctr" lIns="54864" rIns="54864" tIns="18288" bIns="18288" wrap="square"/>
+          <a:lstStyle/>
+          <a:p>
+            <a:pPr algn="ctr"/>
+            <a:r>
+              <a:rPr sz="1200">
+                <a:solidFill>
+                  <a:srgbClr val="FFFFFF"/>
+                </a:solidFill>
+                <a:latin typeface="Arial Black"/>
+              </a:rPr>
+              <a:t>Maqsat: проверка условий под твой профиль + план назад от дедлайна + календарь + честные данные</a:t>
+            </a:r>
+          </a:p>
+        </p:txBody>
+      </p:sp>
+    </p:spTree>
+  </p:cSld>
+  <p:clrMapOvr>
+    <a:masterClrMapping/>
+  </p:clrMapOvr>
+</p:sld>
+</file>
+
+<file path=ppt/slides/slide11.xml><?xml version="1.0" encoding="utf-8"?>
+<p:sld xmlns:a="http://schemas.openxmlformats.org/drawingml/2006/main" xmlns:p="http://schemas.openxmlformats.org/presentationml/2006/main" xmlns:r="http://schemas.openxmlformats.org/officeDocument/2006/relationships">
+  <p:cSld>
+    <p:bg>
+      <p:bgPr>
+        <a:solidFill>
           <a:srgbClr val="F6F7FB"/>
         </a:solidFill>
         <a:effectLst/>
@@ -5359,7 +6245,7 @@
                 </a:solidFill>
                 <a:latin typeface="Arial Black"/>
               </a:rPr>
-              <a:t>33 автотеста: база, условия, план, календарь</a:t>
+              <a:t>37 автотестов: база, условия, план, календарь</a:t>
             </a:r>
           </a:p>
         </p:txBody>
@@ -5579,7 +6465,7 @@
 </p:sld>
 </file>
 
-<file path=ppt/slides/slide11.xml><?xml version="1.0" encoding="utf-8"?>
+<file path=ppt/slides/slide12.xml><?xml version="1.0" encoding="utf-8"?>
 <p:sld xmlns:a="http://schemas.openxmlformats.org/drawingml/2006/main" xmlns:p="http://schemas.openxmlformats.org/presentationml/2006/main" xmlns:r="http://schemas.openxmlformats.org/officeDocument/2006/relationships">
   <p:cSld>
     <p:spTree>
@@ -8061,7 +8947,7 @@
                 </a:solidFill>
                 <a:latin typeface="Arial Black"/>
               </a:rPr>
-              <a:t>СРОКИ ПОЧТИ НИКОГДА НЕ ИЗВЕСТНЫ ЗАРАНЕЕ</a:t>
+              <a:t>«НЕ ЗНАЛ ВОВРЕМЯ» — БАРЬЕР №1</a:t>
             </a:r>
           </a:p>
         </p:txBody>
@@ -8438,7 +9324,7 @@
         </p:nvSpPr>
         <p:spPr>
           <a:xfrm>
-            <a:off x="640080" y="5120640"/>
+            <a:off x="640080" y="5029200"/>
             <a:ext cx="10881360" cy="365760"/>
           </a:xfrm>
           <a:prstGeom prst="rect">
@@ -8473,8 +9359,8 @@
         </p:nvSpPr>
         <p:spPr>
           <a:xfrm>
-            <a:off x="640080" y="5577840"/>
-            <a:ext cx="10881360" cy="777240"/>
+            <a:off x="640080" y="5440680"/>
+            <a:ext cx="10881360" cy="1051560"/>
           </a:xfrm>
           <a:prstGeom prst="rect">
             <a:avLst/>
@@ -8486,7 +9372,6 @@
             <a:solidFill>
               <a:srgbClr val="2F3FBF"/>
             </a:solidFill>
-            <a:prstDash val="dash"/>
           </a:ln>
           <a:effectLst/>
         </p:spPr>
@@ -8520,8 +9405,8 @@
         </p:nvSpPr>
         <p:spPr>
           <a:xfrm>
-            <a:off x="868680" y="5669280"/>
-            <a:ext cx="10424160" cy="640080"/>
+            <a:off x="868680" y="5577840"/>
+            <a:ext cx="1920240" cy="777240"/>
           </a:xfrm>
           <a:prstGeom prst="rect">
             <a:avLst/>
@@ -8536,22 +9421,309 @@
           <a:p>
             <a:pPr algn="l"/>
             <a:r>
-              <a:rPr sz="1100" b="0" i="0">
+              <a:rPr sz="1200" b="0" i="0">
                 <a:solidFill>
                   <a:srgbClr val="2F3FBF"/>
                 </a:solidFill>
                 <a:latin typeface="Arial Black"/>
               </a:rPr>
-              <a:t>Опрос и интервью — заполните реальными данными: </a:t>
-            </a:r>
-            <a:r>
-              <a:rPr sz="1100" b="0" i="0">
-                <a:solidFill>
-                  <a:srgbClr val="111424"/>
-                </a:solidFill>
-                <a:latin typeface="Arial Black"/>
-              </a:rPr>
-              <a:t>__% учеников узнавали о возможности после дедлайна (n = __); главный барьер — __. Вопросы: docs/research-plan.md</a:t>
+              <a:t>Опрос учеников</a:t>
+            </a:r>
+          </a:p>
+          <a:p>
+            <a:pPr algn="l"/>
+            <a:r>
+              <a:rPr sz="1000" b="0" i="0">
+                <a:solidFill>
+                  <a:srgbClr val="7A8094"/>
+                </a:solidFill>
+                <a:latin typeface="Arial Black"/>
+              </a:rPr>
+              <a:t>n = 22, 26.09.2026</a:t>
+            </a:r>
+          </a:p>
+        </p:txBody>
+      </p:sp>
+      <p:sp>
+        <p:nvSpPr>
+          <p:cNvPr id="19" name="TextBox 18"/>
+          <p:cNvSpPr txBox="1"/>
+          <p:nvPr/>
+        </p:nvSpPr>
+        <p:spPr>
+          <a:xfrm>
+            <a:off x="2788920" y="5486400"/>
+            <a:ext cx="2057400" cy="411480"/>
+          </a:xfrm>
+          <a:prstGeom prst="rect">
+            <a:avLst/>
+          </a:prstGeom>
+          <a:noFill/>
+        </p:spPr>
+        <p:txBody>
+          <a:bodyPr wrap="square" lIns="0" rIns="0" tIns="0" bIns="0" anchor="t">
+            <a:spAutoFit/>
+          </a:bodyPr>
+          <a:lstStyle/>
+          <a:p>
+            <a:pPr algn="l"/>
+            <a:r>
+              <a:rPr sz="2400" b="0" i="0">
+                <a:solidFill>
+                  <a:srgbClr val="2F3FBF"/>
+                </a:solidFill>
+                <a:latin typeface="Arial Black"/>
+              </a:rPr>
+              <a:t>59%</a:t>
+            </a:r>
+          </a:p>
+        </p:txBody>
+      </p:sp>
+      <p:sp>
+        <p:nvSpPr>
+          <p:cNvPr id="20" name="TextBox 19"/>
+          <p:cNvSpPr txBox="1"/>
+          <p:nvPr/>
+        </p:nvSpPr>
+        <p:spPr>
+          <a:xfrm>
+            <a:off x="2788920" y="5943600"/>
+            <a:ext cx="2057400" cy="502920"/>
+          </a:xfrm>
+          <a:prstGeom prst="rect">
+            <a:avLst/>
+          </a:prstGeom>
+          <a:noFill/>
+        </p:spPr>
+        <p:txBody>
+          <a:bodyPr wrap="square" lIns="0" rIns="0" tIns="0" bIns="0" anchor="t">
+            <a:spAutoFit/>
+          </a:bodyPr>
+          <a:lstStyle/>
+          <a:p>
+            <a:pPr algn="l"/>
+            <a:r>
+              <a:rPr sz="1000" b="0" i="0">
+                <a:solidFill>
+                  <a:srgbClr val="4A4F62"/>
+                </a:solidFill>
+                <a:latin typeface="Arial Black"/>
+              </a:rPr>
+              <a:t>главный барьер —
+«не знал вовремя»</a:t>
+            </a:r>
+          </a:p>
+        </p:txBody>
+      </p:sp>
+      <p:sp>
+        <p:nvSpPr>
+          <p:cNvPr id="21" name="TextBox 20"/>
+          <p:cNvSpPr txBox="1"/>
+          <p:nvPr/>
+        </p:nvSpPr>
+        <p:spPr>
+          <a:xfrm>
+            <a:off x="4965192" y="5486400"/>
+            <a:ext cx="2057400" cy="411480"/>
+          </a:xfrm>
+          <a:prstGeom prst="rect">
+            <a:avLst/>
+          </a:prstGeom>
+          <a:noFill/>
+        </p:spPr>
+        <p:txBody>
+          <a:bodyPr wrap="square" lIns="0" rIns="0" tIns="0" bIns="0" anchor="t">
+            <a:spAutoFit/>
+          </a:bodyPr>
+          <a:lstStyle/>
+          <a:p>
+            <a:pPr algn="l"/>
+            <a:r>
+              <a:rPr sz="2400" b="0" i="0">
+                <a:solidFill>
+                  <a:srgbClr val="2F3FBF"/>
+                </a:solidFill>
+                <a:latin typeface="Arial Black"/>
+              </a:rPr>
+              <a:t>5%</a:t>
+            </a:r>
+          </a:p>
+        </p:txBody>
+      </p:sp>
+      <p:sp>
+        <p:nvSpPr>
+          <p:cNvPr id="22" name="TextBox 21"/>
+          <p:cNvSpPr txBox="1"/>
+          <p:nvPr/>
+        </p:nvSpPr>
+        <p:spPr>
+          <a:xfrm>
+            <a:off x="4965192" y="5943600"/>
+            <a:ext cx="2057400" cy="502920"/>
+          </a:xfrm>
+          <a:prstGeom prst="rect">
+            <a:avLst/>
+          </a:prstGeom>
+          <a:noFill/>
+        </p:spPr>
+        <p:txBody>
+          <a:bodyPr wrap="square" lIns="0" rIns="0" tIns="0" bIns="0" anchor="t">
+            <a:spAutoFit/>
+          </a:bodyPr>
+          <a:lstStyle/>
+          <a:p>
+            <a:pPr algn="l"/>
+            <a:r>
+              <a:rPr sz="1000" b="0" i="0">
+                <a:solidFill>
+                  <a:srgbClr val="4A4F62"/>
+                </a:solidFill>
+                <a:latin typeface="Arial Black"/>
+              </a:rPr>
+              <a:t>узнают на сайтах
+организаторов</a:t>
+            </a:r>
+          </a:p>
+        </p:txBody>
+      </p:sp>
+      <p:sp>
+        <p:nvSpPr>
+          <p:cNvPr id="23" name="TextBox 22"/>
+          <p:cNvSpPr txBox="1"/>
+          <p:nvPr/>
+        </p:nvSpPr>
+        <p:spPr>
+          <a:xfrm>
+            <a:off x="7141464" y="5486400"/>
+            <a:ext cx="2057400" cy="411480"/>
+          </a:xfrm>
+          <a:prstGeom prst="rect">
+            <a:avLst/>
+          </a:prstGeom>
+          <a:noFill/>
+        </p:spPr>
+        <p:txBody>
+          <a:bodyPr wrap="square" lIns="0" rIns="0" tIns="0" bIns="0" anchor="t">
+            <a:spAutoFit/>
+          </a:bodyPr>
+          <a:lstStyle/>
+          <a:p>
+            <a:pPr algn="l"/>
+            <a:r>
+              <a:rPr sz="2400" b="0" i="0">
+                <a:solidFill>
+                  <a:srgbClr val="2F3FBF"/>
+                </a:solidFill>
+                <a:latin typeface="Arial Black"/>
+              </a:rPr>
+              <a:t>41%</a:t>
+            </a:r>
+          </a:p>
+        </p:txBody>
+      </p:sp>
+      <p:sp>
+        <p:nvSpPr>
+          <p:cNvPr id="24" name="TextBox 23"/>
+          <p:cNvSpPr txBox="1"/>
+          <p:nvPr/>
+        </p:nvSpPr>
+        <p:spPr>
+          <a:xfrm>
+            <a:off x="7141464" y="5943600"/>
+            <a:ext cx="2057400" cy="502920"/>
+          </a:xfrm>
+          <a:prstGeom prst="rect">
+            <a:avLst/>
+          </a:prstGeom>
+          <a:noFill/>
+        </p:spPr>
+        <p:txBody>
+          <a:bodyPr wrap="square" lIns="0" rIns="0" tIns="0" bIns="0" anchor="t">
+            <a:spAutoFit/>
+          </a:bodyPr>
+          <a:lstStyle/>
+          <a:p>
+            <a:pPr algn="l"/>
+            <a:r>
+              <a:rPr sz="1000" b="0" i="0">
+                <a:solidFill>
+                  <a:srgbClr val="4A4F62"/>
+                </a:solidFill>
+                <a:latin typeface="Arial Black"/>
+              </a:rPr>
+              <a:t>не всегда понимают,
+подходят ли</a:t>
+            </a:r>
+          </a:p>
+        </p:txBody>
+      </p:sp>
+      <p:sp>
+        <p:nvSpPr>
+          <p:cNvPr id="25" name="TextBox 24"/>
+          <p:cNvSpPr txBox="1"/>
+          <p:nvPr/>
+        </p:nvSpPr>
+        <p:spPr>
+          <a:xfrm>
+            <a:off x="9317736" y="5486400"/>
+            <a:ext cx="2057400" cy="411480"/>
+          </a:xfrm>
+          <a:prstGeom prst="rect">
+            <a:avLst/>
+          </a:prstGeom>
+          <a:noFill/>
+        </p:spPr>
+        <p:txBody>
+          <a:bodyPr wrap="square" lIns="0" rIns="0" tIns="0" bIns="0" anchor="t">
+            <a:spAutoFit/>
+          </a:bodyPr>
+          <a:lstStyle/>
+          <a:p>
+            <a:pPr algn="l"/>
+            <a:r>
+              <a:rPr sz="2400" b="0" i="0">
+                <a:solidFill>
+                  <a:srgbClr val="2F3FBF"/>
+                </a:solidFill>
+                <a:latin typeface="Arial Black"/>
+              </a:rPr>
+              <a:t>73%</a:t>
+            </a:r>
+          </a:p>
+        </p:txBody>
+      </p:sp>
+      <p:sp>
+        <p:nvSpPr>
+          <p:cNvPr id="26" name="TextBox 25"/>
+          <p:cNvSpPr txBox="1"/>
+          <p:nvPr/>
+        </p:nvSpPr>
+        <p:spPr>
+          <a:xfrm>
+            <a:off x="9317736" y="5943600"/>
+            <a:ext cx="2057400" cy="502920"/>
+          </a:xfrm>
+          <a:prstGeom prst="rect">
+            <a:avLst/>
+          </a:prstGeom>
+          <a:noFill/>
+        </p:spPr>
+        <p:txBody>
+          <a:bodyPr wrap="square" lIns="0" rIns="0" tIns="0" bIns="0" anchor="t">
+            <a:spAutoFit/>
+          </a:bodyPr>
+          <a:lstStyle/>
+          <a:p>
+            <a:pPr algn="l"/>
+            <a:r>
+              <a:rPr sz="1000" b="0" i="0">
+                <a:solidFill>
+                  <a:srgbClr val="4A4F62"/>
+                </a:solidFill>
+                <a:latin typeface="Arial Black"/>
+              </a:rPr>
+              <a:t>воспользовались бы
+(да + возможно)</a:t>
             </a:r>
           </a:p>
         </p:txBody>
@@ -8779,6 +9951,1489 @@
                 </a:solidFill>
                 <a:latin typeface="Arial Black"/>
               </a:rPr>
+              <a:t>ИНТЕРВЬЮ</a:t>
+            </a:r>
+          </a:p>
+        </p:txBody>
+      </p:sp>
+      <p:sp>
+        <p:nvSpPr>
+          <p:cNvPr id="7" name="TextBox 6"/>
+          <p:cNvSpPr txBox="1"/>
+          <p:nvPr/>
+        </p:nvSpPr>
+        <p:spPr>
+          <a:xfrm>
+            <a:off x="640080" y="1618488"/>
+            <a:ext cx="10881360" cy="822960"/>
+          </a:xfrm>
+          <a:prstGeom prst="rect">
+            <a:avLst/>
+          </a:prstGeom>
+          <a:noFill/>
+        </p:spPr>
+        <p:txBody>
+          <a:bodyPr wrap="square" lIns="0" rIns="0" tIns="0" bIns="0" anchor="t">
+            <a:spAutoFit/>
+          </a:bodyPr>
+          <a:lstStyle/>
+          <a:p>
+            <a:pPr algn="l"/>
+            <a:r>
+              <a:rPr sz="2200" b="0" i="0">
+                <a:solidFill>
+                  <a:srgbClr val="111424"/>
+                </a:solidFill>
+                <a:latin typeface="Arial Black"/>
+              </a:rPr>
+              <a:t>5 ЧЕЛОВЕК — И ЧТО МЫ ИЗМЕНИЛИ ЗА НОЧЬ</a:t>
+            </a:r>
+          </a:p>
+        </p:txBody>
+      </p:sp>
+      <p:sp>
+        <p:nvSpPr>
+          <p:cNvPr id="8" name="Rectangle 7"/>
+          <p:cNvSpPr/>
+          <p:nvPr/>
+        </p:nvSpPr>
+        <p:spPr>
+          <a:xfrm>
+            <a:off x="640080" y="2331720"/>
+            <a:ext cx="5760720" cy="1051560"/>
+          </a:xfrm>
+          <a:prstGeom prst="rect">
+            <a:avLst/>
+          </a:prstGeom>
+          <a:solidFill>
+            <a:srgbClr val="F6F7FB"/>
+          </a:solidFill>
+          <a:ln>
+            <a:noFill/>
+          </a:ln>
+          <a:effectLst/>
+        </p:spPr>
+        <p:style>
+          <a:lnRef idx="1">
+            <a:schemeClr val="accent1"/>
+          </a:lnRef>
+          <a:fillRef idx="3">
+            <a:schemeClr val="accent1"/>
+          </a:fillRef>
+          <a:effectRef idx="2">
+            <a:schemeClr val="accent1"/>
+          </a:effectRef>
+          <a:fontRef idx="minor">
+            <a:schemeClr val="lt1"/>
+          </a:fontRef>
+        </p:style>
+        <p:txBody>
+          <a:bodyPr rtlCol="0" anchor="ctr" lIns="54864" rIns="54864" tIns="18288" bIns="18288"/>
+          <a:lstStyle/>
+          <a:p>
+            <a:pPr algn="ctr"/>
+          </a:p>
+        </p:txBody>
+      </p:sp>
+      <p:sp>
+        <p:nvSpPr>
+          <p:cNvPr id="9" name="TextBox 8"/>
+          <p:cNvSpPr txBox="1"/>
+          <p:nvPr/>
+        </p:nvSpPr>
+        <p:spPr>
+          <a:xfrm>
+            <a:off x="868680" y="2441448"/>
+            <a:ext cx="5394960" cy="640080"/>
+          </a:xfrm>
+          <a:prstGeom prst="rect">
+            <a:avLst/>
+          </a:prstGeom>
+          <a:noFill/>
+        </p:spPr>
+        <p:txBody>
+          <a:bodyPr wrap="square" lIns="0" rIns="0" tIns="0" bIns="0" anchor="t">
+            <a:spAutoFit/>
+          </a:bodyPr>
+          <a:lstStyle/>
+          <a:p>
+            <a:pPr algn="l"/>
+            <a:r>
+              <a:rPr sz="1100" b="0" i="1">
+                <a:solidFill>
+                  <a:srgbClr val="111424"/>
+                </a:solidFill>
+                <a:latin typeface="Arial Black"/>
+              </a:rPr>
+              <a:t>«Иногда ученик узнаёт о программе за несколько дней до дедлайна и не успевает получить рекомендацию»</a:t>
+            </a:r>
+          </a:p>
+        </p:txBody>
+      </p:sp>
+      <p:sp>
+        <p:nvSpPr>
+          <p:cNvPr id="10" name="TextBox 9"/>
+          <p:cNvSpPr txBox="1"/>
+          <p:nvPr/>
+        </p:nvSpPr>
+        <p:spPr>
+          <a:xfrm>
+            <a:off x="868680" y="3081527"/>
+            <a:ext cx="5394960" cy="274320"/>
+          </a:xfrm>
+          <a:prstGeom prst="rect">
+            <a:avLst/>
+          </a:prstGeom>
+          <a:noFill/>
+        </p:spPr>
+        <p:txBody>
+          <a:bodyPr wrap="square" lIns="0" rIns="0" tIns="0" bIns="0" anchor="t">
+            <a:spAutoFit/>
+          </a:bodyPr>
+          <a:lstStyle/>
+          <a:p>
+            <a:pPr algn="l"/>
+            <a:r>
+              <a:rPr sz="1000" b="0" i="0">
+                <a:solidFill>
+                  <a:srgbClr val="2F3FBF"/>
+                </a:solidFill>
+                <a:latin typeface="Arial Black"/>
+              </a:rPr>
+              <a:t>— школьный профориентатор</a:t>
+            </a:r>
+          </a:p>
+        </p:txBody>
+      </p:sp>
+      <p:sp>
+        <p:nvSpPr>
+          <p:cNvPr id="11" name="Rectangle 10"/>
+          <p:cNvSpPr/>
+          <p:nvPr/>
+        </p:nvSpPr>
+        <p:spPr>
+          <a:xfrm>
+            <a:off x="640080" y="3520439"/>
+            <a:ext cx="5760720" cy="1051560"/>
+          </a:xfrm>
+          <a:prstGeom prst="rect">
+            <a:avLst/>
+          </a:prstGeom>
+          <a:solidFill>
+            <a:srgbClr val="F6F7FB"/>
+          </a:solidFill>
+          <a:ln>
+            <a:noFill/>
+          </a:ln>
+          <a:effectLst/>
+        </p:spPr>
+        <p:style>
+          <a:lnRef idx="1">
+            <a:schemeClr val="accent1"/>
+          </a:lnRef>
+          <a:fillRef idx="3">
+            <a:schemeClr val="accent1"/>
+          </a:fillRef>
+          <a:effectRef idx="2">
+            <a:schemeClr val="accent1"/>
+          </a:effectRef>
+          <a:fontRef idx="minor">
+            <a:schemeClr val="lt1"/>
+          </a:fontRef>
+        </p:style>
+        <p:txBody>
+          <a:bodyPr rtlCol="0" anchor="ctr" lIns="54864" rIns="54864" tIns="18288" bIns="18288"/>
+          <a:lstStyle/>
+          <a:p>
+            <a:pPr algn="ctr"/>
+          </a:p>
+        </p:txBody>
+      </p:sp>
+      <p:sp>
+        <p:nvSpPr>
+          <p:cNvPr id="12" name="TextBox 11"/>
+          <p:cNvSpPr txBox="1"/>
+          <p:nvPr/>
+        </p:nvSpPr>
+        <p:spPr>
+          <a:xfrm>
+            <a:off x="868680" y="3630168"/>
+            <a:ext cx="5394960" cy="640080"/>
+          </a:xfrm>
+          <a:prstGeom prst="rect">
+            <a:avLst/>
+          </a:prstGeom>
+          <a:noFill/>
+        </p:spPr>
+        <p:txBody>
+          <a:bodyPr wrap="square" lIns="0" rIns="0" tIns="0" bIns="0" anchor="t">
+            <a:spAutoFit/>
+          </a:bodyPr>
+          <a:lstStyle/>
+          <a:p>
+            <a:pPr algn="l"/>
+            <a:r>
+              <a:rPr sz="1100" b="0" i="1">
+                <a:solidFill>
+                  <a:srgbClr val="111424"/>
+                </a:solidFill>
+                <a:latin typeface="Arial Black"/>
+              </a:rPr>
+              <a:t>«Рекомендации и документы требуют участия школы — их нельзя подготовить в последний день»</a:t>
+            </a:r>
+          </a:p>
+        </p:txBody>
+      </p:sp>
+      <p:sp>
+        <p:nvSpPr>
+          <p:cNvPr id="13" name="TextBox 12"/>
+          <p:cNvSpPr txBox="1"/>
+          <p:nvPr/>
+        </p:nvSpPr>
+        <p:spPr>
+          <a:xfrm>
+            <a:off x="868680" y="4270248"/>
+            <a:ext cx="5394960" cy="274320"/>
+          </a:xfrm>
+          <a:prstGeom prst="rect">
+            <a:avLst/>
+          </a:prstGeom>
+          <a:noFill/>
+        </p:spPr>
+        <p:txBody>
+          <a:bodyPr wrap="square" lIns="0" rIns="0" tIns="0" bIns="0" anchor="t">
+            <a:spAutoFit/>
+          </a:bodyPr>
+          <a:lstStyle/>
+          <a:p>
+            <a:pPr algn="l"/>
+            <a:r>
+              <a:rPr sz="1000" b="0" i="0">
+                <a:solidFill>
+                  <a:srgbClr val="2F3FBF"/>
+                </a:solidFill>
+                <a:latin typeface="Arial Black"/>
+              </a:rPr>
+              <a:t>— заместитель директора</a:t>
+            </a:r>
+          </a:p>
+        </p:txBody>
+      </p:sp>
+      <p:sp>
+        <p:nvSpPr>
+          <p:cNvPr id="14" name="Rectangle 13"/>
+          <p:cNvSpPr/>
+          <p:nvPr/>
+        </p:nvSpPr>
+        <p:spPr>
+          <a:xfrm>
+            <a:off x="640080" y="4709160"/>
+            <a:ext cx="5760720" cy="1051560"/>
+          </a:xfrm>
+          <a:prstGeom prst="rect">
+            <a:avLst/>
+          </a:prstGeom>
+          <a:solidFill>
+            <a:srgbClr val="F6F7FB"/>
+          </a:solidFill>
+          <a:ln>
+            <a:noFill/>
+          </a:ln>
+          <a:effectLst/>
+        </p:spPr>
+        <p:style>
+          <a:lnRef idx="1">
+            <a:schemeClr val="accent1"/>
+          </a:lnRef>
+          <a:fillRef idx="3">
+            <a:schemeClr val="accent1"/>
+          </a:fillRef>
+          <a:effectRef idx="2">
+            <a:schemeClr val="accent1"/>
+          </a:effectRef>
+          <a:fontRef idx="minor">
+            <a:schemeClr val="lt1"/>
+          </a:fontRef>
+        </p:style>
+        <p:txBody>
+          <a:bodyPr rtlCol="0" anchor="ctr" lIns="54864" rIns="54864" tIns="18288" bIns="18288"/>
+          <a:lstStyle/>
+          <a:p>
+            <a:pPr algn="ctr"/>
+          </a:p>
+        </p:txBody>
+      </p:sp>
+      <p:sp>
+        <p:nvSpPr>
+          <p:cNvPr id="15" name="TextBox 14"/>
+          <p:cNvSpPr txBox="1"/>
+          <p:nvPr/>
+        </p:nvSpPr>
+        <p:spPr>
+          <a:xfrm>
+            <a:off x="868680" y="4818888"/>
+            <a:ext cx="5394960" cy="640080"/>
+          </a:xfrm>
+          <a:prstGeom prst="rect">
+            <a:avLst/>
+          </a:prstGeom>
+          <a:noFill/>
+        </p:spPr>
+        <p:txBody>
+          <a:bodyPr wrap="square" lIns="0" rIns="0" tIns="0" bIns="0" anchor="t">
+            <a:spAutoFit/>
+          </a:bodyPr>
+          <a:lstStyle/>
+          <a:p>
+            <a:pPr algn="l"/>
+            <a:r>
+              <a:rPr sz="1100" b="0" i="1">
+                <a:solidFill>
+                  <a:srgbClr val="111424"/>
+                </a:solidFill>
+                <a:latin typeface="Arial Black"/>
+              </a:rPr>
+              <a:t>«Не доверяю формулировке «полная стипендия» без ссылки на условия»</a:t>
+            </a:r>
+          </a:p>
+        </p:txBody>
+      </p:sp>
+      <p:sp>
+        <p:nvSpPr>
+          <p:cNvPr id="16" name="TextBox 15"/>
+          <p:cNvSpPr txBox="1"/>
+          <p:nvPr/>
+        </p:nvSpPr>
+        <p:spPr>
+          <a:xfrm>
+            <a:off x="868680" y="5458968"/>
+            <a:ext cx="5394960" cy="274320"/>
+          </a:xfrm>
+          <a:prstGeom prst="rect">
+            <a:avLst/>
+          </a:prstGeom>
+          <a:noFill/>
+        </p:spPr>
+        <p:txBody>
+          <a:bodyPr wrap="square" lIns="0" rIns="0" tIns="0" bIns="0" anchor="t">
+            <a:spAutoFit/>
+          </a:bodyPr>
+          <a:lstStyle/>
+          <a:p>
+            <a:pPr algn="l"/>
+            <a:r>
+              <a:rPr sz="1000" b="0" i="0">
+                <a:solidFill>
+                  <a:srgbClr val="2F3FBF"/>
+                </a:solidFill>
+                <a:latin typeface="Arial Black"/>
+              </a:rPr>
+              <a:t>— родитель</a:t>
+            </a:r>
+          </a:p>
+        </p:txBody>
+      </p:sp>
+      <p:sp>
+        <p:nvSpPr>
+          <p:cNvPr id="17" name="TextBox 16"/>
+          <p:cNvSpPr txBox="1"/>
+          <p:nvPr/>
+        </p:nvSpPr>
+        <p:spPr>
+          <a:xfrm>
+            <a:off x="6766560" y="2240280"/>
+            <a:ext cx="4754880" cy="365760"/>
+          </a:xfrm>
+          <a:prstGeom prst="rect">
+            <a:avLst/>
+          </a:prstGeom>
+          <a:noFill/>
+        </p:spPr>
+        <p:txBody>
+          <a:bodyPr wrap="square" lIns="0" rIns="0" tIns="0" bIns="0" anchor="t">
+            <a:spAutoFit/>
+          </a:bodyPr>
+          <a:lstStyle/>
+          <a:p>
+            <a:pPr algn="l"/>
+            <a:r>
+              <a:rPr sz="1100" b="0" i="0">
+                <a:solidFill>
+                  <a:srgbClr val="7A8094"/>
+                </a:solidFill>
+                <a:latin typeface="Arial Black"/>
+              </a:rPr>
+              <a:t>ДОБАВИЛИ ПО ПРОСЬБАМ</a:t>
+            </a:r>
+          </a:p>
+        </p:txBody>
+      </p:sp>
+      <p:sp>
+        <p:nvSpPr>
+          <p:cNvPr id="18" name="Oval 17"/>
+          <p:cNvSpPr/>
+          <p:nvPr/>
+        </p:nvSpPr>
+        <p:spPr>
+          <a:xfrm>
+            <a:off x="6757416" y="2642616"/>
+            <a:ext cx="292608" cy="292608"/>
+          </a:xfrm>
+          <a:prstGeom prst="ellipse">
+            <a:avLst/>
+          </a:prstGeom>
+          <a:noFill/>
+          <a:ln w="25400">
+            <a:solidFill>
+              <a:srgbClr val="2F3FBF"/>
+            </a:solidFill>
+          </a:ln>
+          <a:effectLst/>
+        </p:spPr>
+        <p:style>
+          <a:lnRef idx="1">
+            <a:schemeClr val="accent1"/>
+          </a:lnRef>
+          <a:fillRef idx="3">
+            <a:schemeClr val="accent1"/>
+          </a:fillRef>
+          <a:effectRef idx="2">
+            <a:schemeClr val="accent1"/>
+          </a:effectRef>
+          <a:fontRef idx="minor">
+            <a:schemeClr val="lt1"/>
+          </a:fontRef>
+        </p:style>
+        <p:txBody>
+          <a:bodyPr rtlCol="0" anchor="ctr" lIns="54864" rIns="54864" tIns="18288" bIns="18288"/>
+          <a:lstStyle/>
+          <a:p>
+            <a:pPr algn="ctr"/>
+          </a:p>
+        </p:txBody>
+      </p:sp>
+      <p:sp>
+        <p:nvSpPr>
+          <p:cNvPr id="19" name="Oval 18"/>
+          <p:cNvSpPr/>
+          <p:nvPr/>
+        </p:nvSpPr>
+        <p:spPr>
+          <a:xfrm>
+            <a:off x="6818863" y="2704063"/>
+            <a:ext cx="169712" cy="169712"/>
+          </a:xfrm>
+          <a:prstGeom prst="ellipse">
+            <a:avLst/>
+          </a:prstGeom>
+          <a:noFill/>
+          <a:ln w="25400">
+            <a:solidFill>
+              <a:srgbClr val="2F3FBF"/>
+            </a:solidFill>
+          </a:ln>
+          <a:effectLst/>
+        </p:spPr>
+        <p:style>
+          <a:lnRef idx="1">
+            <a:schemeClr val="accent1"/>
+          </a:lnRef>
+          <a:fillRef idx="3">
+            <a:schemeClr val="accent1"/>
+          </a:fillRef>
+          <a:effectRef idx="2">
+            <a:schemeClr val="accent1"/>
+          </a:effectRef>
+          <a:fontRef idx="minor">
+            <a:schemeClr val="lt1"/>
+          </a:fontRef>
+        </p:style>
+        <p:txBody>
+          <a:bodyPr rtlCol="0" anchor="ctr" lIns="54864" rIns="54864" tIns="18288" bIns="18288"/>
+          <a:lstStyle/>
+          <a:p>
+            <a:pPr algn="ctr"/>
+          </a:p>
+        </p:txBody>
+      </p:sp>
+      <p:sp>
+        <p:nvSpPr>
+          <p:cNvPr id="20" name="Oval 19"/>
+          <p:cNvSpPr/>
+          <p:nvPr/>
+        </p:nvSpPr>
+        <p:spPr>
+          <a:xfrm>
+            <a:off x="6874459" y="2759659"/>
+            <a:ext cx="58521" cy="58521"/>
+          </a:xfrm>
+          <a:prstGeom prst="ellipse">
+            <a:avLst/>
+          </a:prstGeom>
+          <a:solidFill>
+            <a:srgbClr val="F2A900"/>
+          </a:solidFill>
+          <a:ln>
+            <a:noFill/>
+          </a:ln>
+          <a:effectLst/>
+        </p:spPr>
+        <p:style>
+          <a:lnRef idx="1">
+            <a:schemeClr val="accent1"/>
+          </a:lnRef>
+          <a:fillRef idx="3">
+            <a:schemeClr val="accent1"/>
+          </a:fillRef>
+          <a:effectRef idx="2">
+            <a:schemeClr val="accent1"/>
+          </a:effectRef>
+          <a:fontRef idx="minor">
+            <a:schemeClr val="lt1"/>
+          </a:fontRef>
+        </p:style>
+        <p:txBody>
+          <a:bodyPr rtlCol="0" anchor="ctr" lIns="54864" rIns="54864" tIns="18288" bIns="18288"/>
+          <a:lstStyle/>
+          <a:p>
+            <a:pPr algn="ctr"/>
+          </a:p>
+        </p:txBody>
+      </p:sp>
+      <p:sp>
+        <p:nvSpPr>
+          <p:cNvPr id="21" name="TextBox 20"/>
+          <p:cNvSpPr txBox="1"/>
+          <p:nvPr/>
+        </p:nvSpPr>
+        <p:spPr>
+          <a:xfrm>
+            <a:off x="7223760" y="2606040"/>
+            <a:ext cx="4297680" cy="365760"/>
+          </a:xfrm>
+          <a:prstGeom prst="rect">
+            <a:avLst/>
+          </a:prstGeom>
+          <a:noFill/>
+        </p:spPr>
+        <p:txBody>
+          <a:bodyPr wrap="square" lIns="0" rIns="0" tIns="0" bIns="0" anchor="t">
+            <a:spAutoFit/>
+          </a:bodyPr>
+          <a:lstStyle/>
+          <a:p>
+            <a:pPr algn="l"/>
+            <a:r>
+              <a:rPr sz="1400" b="0" i="0">
+                <a:solidFill>
+                  <a:srgbClr val="2F3FBF"/>
+                </a:solidFill>
+                <a:latin typeface="Arial Black"/>
+              </a:rPr>
+              <a:t>🏫 через школу</a:t>
+            </a:r>
+          </a:p>
+        </p:txBody>
+      </p:sp>
+      <p:sp>
+        <p:nvSpPr>
+          <p:cNvPr id="22" name="TextBox 21"/>
+          <p:cNvSpPr txBox="1"/>
+          <p:nvPr/>
+        </p:nvSpPr>
+        <p:spPr>
+          <a:xfrm>
+            <a:off x="7223760" y="2953512"/>
+            <a:ext cx="4297680" cy="457200"/>
+          </a:xfrm>
+          <a:prstGeom prst="rect">
+            <a:avLst/>
+          </a:prstGeom>
+          <a:noFill/>
+        </p:spPr>
+        <p:txBody>
+          <a:bodyPr wrap="square" lIns="0" rIns="0" tIns="0" bIns="0" anchor="t">
+            <a:spAutoFit/>
+          </a:bodyPr>
+          <a:lstStyle/>
+          <a:p>
+            <a:pPr algn="l"/>
+            <a:r>
+              <a:rPr sz="1100" b="0" i="0">
+                <a:solidFill>
+                  <a:srgbClr val="4A4F62"/>
+                </a:solidFill>
+                <a:latin typeface="Arial Black"/>
+              </a:rPr>
+              <a:t>шаги с рекомендациями и документами отмечены в плане</a:t>
+            </a:r>
+          </a:p>
+        </p:txBody>
+      </p:sp>
+      <p:sp>
+        <p:nvSpPr>
+          <p:cNvPr id="23" name="Oval 22"/>
+          <p:cNvSpPr/>
+          <p:nvPr/>
+        </p:nvSpPr>
+        <p:spPr>
+          <a:xfrm>
+            <a:off x="6757416" y="3465576"/>
+            <a:ext cx="292608" cy="292608"/>
+          </a:xfrm>
+          <a:prstGeom prst="ellipse">
+            <a:avLst/>
+          </a:prstGeom>
+          <a:noFill/>
+          <a:ln w="25400">
+            <a:solidFill>
+              <a:srgbClr val="2F3FBF"/>
+            </a:solidFill>
+          </a:ln>
+          <a:effectLst/>
+        </p:spPr>
+        <p:style>
+          <a:lnRef idx="1">
+            <a:schemeClr val="accent1"/>
+          </a:lnRef>
+          <a:fillRef idx="3">
+            <a:schemeClr val="accent1"/>
+          </a:fillRef>
+          <a:effectRef idx="2">
+            <a:schemeClr val="accent1"/>
+          </a:effectRef>
+          <a:fontRef idx="minor">
+            <a:schemeClr val="lt1"/>
+          </a:fontRef>
+        </p:style>
+        <p:txBody>
+          <a:bodyPr rtlCol="0" anchor="ctr" lIns="54864" rIns="54864" tIns="18288" bIns="18288"/>
+          <a:lstStyle/>
+          <a:p>
+            <a:pPr algn="ctr"/>
+          </a:p>
+        </p:txBody>
+      </p:sp>
+      <p:sp>
+        <p:nvSpPr>
+          <p:cNvPr id="24" name="Oval 23"/>
+          <p:cNvSpPr/>
+          <p:nvPr/>
+        </p:nvSpPr>
+        <p:spPr>
+          <a:xfrm>
+            <a:off x="6818863" y="3527023"/>
+            <a:ext cx="169712" cy="169712"/>
+          </a:xfrm>
+          <a:prstGeom prst="ellipse">
+            <a:avLst/>
+          </a:prstGeom>
+          <a:noFill/>
+          <a:ln w="25400">
+            <a:solidFill>
+              <a:srgbClr val="2F3FBF"/>
+            </a:solidFill>
+          </a:ln>
+          <a:effectLst/>
+        </p:spPr>
+        <p:style>
+          <a:lnRef idx="1">
+            <a:schemeClr val="accent1"/>
+          </a:lnRef>
+          <a:fillRef idx="3">
+            <a:schemeClr val="accent1"/>
+          </a:fillRef>
+          <a:effectRef idx="2">
+            <a:schemeClr val="accent1"/>
+          </a:effectRef>
+          <a:fontRef idx="minor">
+            <a:schemeClr val="lt1"/>
+          </a:fontRef>
+        </p:style>
+        <p:txBody>
+          <a:bodyPr rtlCol="0" anchor="ctr" lIns="54864" rIns="54864" tIns="18288" bIns="18288"/>
+          <a:lstStyle/>
+          <a:p>
+            <a:pPr algn="ctr"/>
+          </a:p>
+        </p:txBody>
+      </p:sp>
+      <p:sp>
+        <p:nvSpPr>
+          <p:cNvPr id="25" name="Oval 24"/>
+          <p:cNvSpPr/>
+          <p:nvPr/>
+        </p:nvSpPr>
+        <p:spPr>
+          <a:xfrm>
+            <a:off x="6874459" y="3582619"/>
+            <a:ext cx="58521" cy="58521"/>
+          </a:xfrm>
+          <a:prstGeom prst="ellipse">
+            <a:avLst/>
+          </a:prstGeom>
+          <a:solidFill>
+            <a:srgbClr val="F2A900"/>
+          </a:solidFill>
+          <a:ln>
+            <a:noFill/>
+          </a:ln>
+          <a:effectLst/>
+        </p:spPr>
+        <p:style>
+          <a:lnRef idx="1">
+            <a:schemeClr val="accent1"/>
+          </a:lnRef>
+          <a:fillRef idx="3">
+            <a:schemeClr val="accent1"/>
+          </a:fillRef>
+          <a:effectRef idx="2">
+            <a:schemeClr val="accent1"/>
+          </a:effectRef>
+          <a:fontRef idx="minor">
+            <a:schemeClr val="lt1"/>
+          </a:fontRef>
+        </p:style>
+        <p:txBody>
+          <a:bodyPr rtlCol="0" anchor="ctr" lIns="54864" rIns="54864" tIns="18288" bIns="18288"/>
+          <a:lstStyle/>
+          <a:p>
+            <a:pPr algn="ctr"/>
+          </a:p>
+        </p:txBody>
+      </p:sp>
+      <p:sp>
+        <p:nvSpPr>
+          <p:cNvPr id="26" name="TextBox 25"/>
+          <p:cNvSpPr txBox="1"/>
+          <p:nvPr/>
+        </p:nvSpPr>
+        <p:spPr>
+          <a:xfrm>
+            <a:off x="7223760" y="3429000"/>
+            <a:ext cx="4297680" cy="365760"/>
+          </a:xfrm>
+          <a:prstGeom prst="rect">
+            <a:avLst/>
+          </a:prstGeom>
+          <a:noFill/>
+        </p:spPr>
+        <p:txBody>
+          <a:bodyPr wrap="square" lIns="0" rIns="0" tIns="0" bIns="0" anchor="t">
+            <a:spAutoFit/>
+          </a:bodyPr>
+          <a:lstStyle/>
+          <a:p>
+            <a:pPr algn="l"/>
+            <a:r>
+              <a:rPr sz="1400" b="0" i="0">
+                <a:solidFill>
+                  <a:srgbClr val="2F3FBF"/>
+                </a:solidFill>
+                <a:latin typeface="Arial Black"/>
+              </a:rPr>
+              <a:t>Заявка отправлена</a:t>
+            </a:r>
+          </a:p>
+        </p:txBody>
+      </p:sp>
+      <p:sp>
+        <p:nvSpPr>
+          <p:cNvPr id="27" name="TextBox 26"/>
+          <p:cNvSpPr txBox="1"/>
+          <p:nvPr/>
+        </p:nvSpPr>
+        <p:spPr>
+          <a:xfrm>
+            <a:off x="7223760" y="3776472"/>
+            <a:ext cx="4297680" cy="457200"/>
+          </a:xfrm>
+          <a:prstGeom prst="rect">
+            <a:avLst/>
+          </a:prstGeom>
+          <a:noFill/>
+        </p:spPr>
+        <p:txBody>
+          <a:bodyPr wrap="square" lIns="0" rIns="0" tIns="0" bIns="0" anchor="t">
+            <a:spAutoFit/>
+          </a:bodyPr>
+          <a:lstStyle/>
+          <a:p>
+            <a:pPr algn="l"/>
+            <a:r>
+              <a:rPr sz="1100" b="0" i="0">
+                <a:solidFill>
+                  <a:srgbClr val="4A4F62"/>
+                </a:solidFill>
+                <a:latin typeface="Arial Black"/>
+              </a:rPr>
+              <a:t>закрывает подготовку, этап отбора остаётся</a:t>
+            </a:r>
+          </a:p>
+        </p:txBody>
+      </p:sp>
+      <p:sp>
+        <p:nvSpPr>
+          <p:cNvPr id="28" name="Oval 27"/>
+          <p:cNvSpPr/>
+          <p:nvPr/>
+        </p:nvSpPr>
+        <p:spPr>
+          <a:xfrm>
+            <a:off x="6757416" y="4288536"/>
+            <a:ext cx="292608" cy="292608"/>
+          </a:xfrm>
+          <a:prstGeom prst="ellipse">
+            <a:avLst/>
+          </a:prstGeom>
+          <a:noFill/>
+          <a:ln w="25400">
+            <a:solidFill>
+              <a:srgbClr val="2F3FBF"/>
+            </a:solidFill>
+          </a:ln>
+          <a:effectLst/>
+        </p:spPr>
+        <p:style>
+          <a:lnRef idx="1">
+            <a:schemeClr val="accent1"/>
+          </a:lnRef>
+          <a:fillRef idx="3">
+            <a:schemeClr val="accent1"/>
+          </a:fillRef>
+          <a:effectRef idx="2">
+            <a:schemeClr val="accent1"/>
+          </a:effectRef>
+          <a:fontRef idx="minor">
+            <a:schemeClr val="lt1"/>
+          </a:fontRef>
+        </p:style>
+        <p:txBody>
+          <a:bodyPr rtlCol="0" anchor="ctr" lIns="54864" rIns="54864" tIns="18288" bIns="18288"/>
+          <a:lstStyle/>
+          <a:p>
+            <a:pPr algn="ctr"/>
+          </a:p>
+        </p:txBody>
+      </p:sp>
+      <p:sp>
+        <p:nvSpPr>
+          <p:cNvPr id="29" name="Oval 28"/>
+          <p:cNvSpPr/>
+          <p:nvPr/>
+        </p:nvSpPr>
+        <p:spPr>
+          <a:xfrm>
+            <a:off x="6818863" y="4349983"/>
+            <a:ext cx="169712" cy="169712"/>
+          </a:xfrm>
+          <a:prstGeom prst="ellipse">
+            <a:avLst/>
+          </a:prstGeom>
+          <a:noFill/>
+          <a:ln w="25400">
+            <a:solidFill>
+              <a:srgbClr val="2F3FBF"/>
+            </a:solidFill>
+          </a:ln>
+          <a:effectLst/>
+        </p:spPr>
+        <p:style>
+          <a:lnRef idx="1">
+            <a:schemeClr val="accent1"/>
+          </a:lnRef>
+          <a:fillRef idx="3">
+            <a:schemeClr val="accent1"/>
+          </a:fillRef>
+          <a:effectRef idx="2">
+            <a:schemeClr val="accent1"/>
+          </a:effectRef>
+          <a:fontRef idx="minor">
+            <a:schemeClr val="lt1"/>
+          </a:fontRef>
+        </p:style>
+        <p:txBody>
+          <a:bodyPr rtlCol="0" anchor="ctr" lIns="54864" rIns="54864" tIns="18288" bIns="18288"/>
+          <a:lstStyle/>
+          <a:p>
+            <a:pPr algn="ctr"/>
+          </a:p>
+        </p:txBody>
+      </p:sp>
+      <p:sp>
+        <p:nvSpPr>
+          <p:cNvPr id="30" name="Oval 29"/>
+          <p:cNvSpPr/>
+          <p:nvPr/>
+        </p:nvSpPr>
+        <p:spPr>
+          <a:xfrm>
+            <a:off x="6874459" y="4405579"/>
+            <a:ext cx="58521" cy="58521"/>
+          </a:xfrm>
+          <a:prstGeom prst="ellipse">
+            <a:avLst/>
+          </a:prstGeom>
+          <a:solidFill>
+            <a:srgbClr val="F2A900"/>
+          </a:solidFill>
+          <a:ln>
+            <a:noFill/>
+          </a:ln>
+          <a:effectLst/>
+        </p:spPr>
+        <p:style>
+          <a:lnRef idx="1">
+            <a:schemeClr val="accent1"/>
+          </a:lnRef>
+          <a:fillRef idx="3">
+            <a:schemeClr val="accent1"/>
+          </a:fillRef>
+          <a:effectRef idx="2">
+            <a:schemeClr val="accent1"/>
+          </a:effectRef>
+          <a:fontRef idx="minor">
+            <a:schemeClr val="lt1"/>
+          </a:fontRef>
+        </p:style>
+        <p:txBody>
+          <a:bodyPr rtlCol="0" anchor="ctr" lIns="54864" rIns="54864" tIns="18288" bIns="18288"/>
+          <a:lstStyle/>
+          <a:p>
+            <a:pPr algn="ctr"/>
+          </a:p>
+        </p:txBody>
+      </p:sp>
+      <p:sp>
+        <p:nvSpPr>
+          <p:cNvPr id="31" name="TextBox 30"/>
+          <p:cNvSpPr txBox="1"/>
+          <p:nvPr/>
+        </p:nvSpPr>
+        <p:spPr>
+          <a:xfrm>
+            <a:off x="7223760" y="4251960"/>
+            <a:ext cx="4297680" cy="365760"/>
+          </a:xfrm>
+          <a:prstGeom prst="rect">
+            <a:avLst/>
+          </a:prstGeom>
+          <a:noFill/>
+        </p:spPr>
+        <p:txBody>
+          <a:bodyPr wrap="square" lIns="0" rIns="0" tIns="0" bIns="0" anchor="t">
+            <a:spAutoFit/>
+          </a:bodyPr>
+          <a:lstStyle/>
+          <a:p>
+            <a:pPr algn="l"/>
+            <a:r>
+              <a:rPr sz="1400" b="0" i="0">
+                <a:solidFill>
+                  <a:srgbClr val="2F3FBF"/>
+                </a:solidFill>
+                <a:latin typeface="Arial Black"/>
+              </a:rPr>
+              <a:t>Свои задачи</a:t>
+            </a:r>
+          </a:p>
+        </p:txBody>
+      </p:sp>
+      <p:sp>
+        <p:nvSpPr>
+          <p:cNvPr id="32" name="TextBox 31"/>
+          <p:cNvSpPr txBox="1"/>
+          <p:nvPr/>
+        </p:nvSpPr>
+        <p:spPr>
+          <a:xfrm>
+            <a:off x="7223760" y="4599432"/>
+            <a:ext cx="4297680" cy="457200"/>
+          </a:xfrm>
+          <a:prstGeom prst="rect">
+            <a:avLst/>
+          </a:prstGeom>
+          <a:noFill/>
+        </p:spPr>
+        <p:txBody>
+          <a:bodyPr wrap="square" lIns="0" rIns="0" tIns="0" bIns="0" anchor="t">
+            <a:spAutoFit/>
+          </a:bodyPr>
+          <a:lstStyle/>
+          <a:p>
+            <a:pPr algn="l"/>
+            <a:r>
+              <a:rPr sz="1100" b="0" i="0">
+                <a:solidFill>
+                  <a:srgbClr val="4A4F62"/>
+                </a:solidFill>
+                <a:latin typeface="Arial Black"/>
+              </a:rPr>
+              <a:t>в плане и календаре, даже без дедлайна</a:t>
+            </a:r>
+          </a:p>
+        </p:txBody>
+      </p:sp>
+      <p:sp>
+        <p:nvSpPr>
+          <p:cNvPr id="33" name="Oval 32"/>
+          <p:cNvSpPr/>
+          <p:nvPr/>
+        </p:nvSpPr>
+        <p:spPr>
+          <a:xfrm>
+            <a:off x="6757416" y="5111496"/>
+            <a:ext cx="292608" cy="292608"/>
+          </a:xfrm>
+          <a:prstGeom prst="ellipse">
+            <a:avLst/>
+          </a:prstGeom>
+          <a:noFill/>
+          <a:ln w="25400">
+            <a:solidFill>
+              <a:srgbClr val="2F3FBF"/>
+            </a:solidFill>
+          </a:ln>
+          <a:effectLst/>
+        </p:spPr>
+        <p:style>
+          <a:lnRef idx="1">
+            <a:schemeClr val="accent1"/>
+          </a:lnRef>
+          <a:fillRef idx="3">
+            <a:schemeClr val="accent1"/>
+          </a:fillRef>
+          <a:effectRef idx="2">
+            <a:schemeClr val="accent1"/>
+          </a:effectRef>
+          <a:fontRef idx="minor">
+            <a:schemeClr val="lt1"/>
+          </a:fontRef>
+        </p:style>
+        <p:txBody>
+          <a:bodyPr rtlCol="0" anchor="ctr" lIns="54864" rIns="54864" tIns="18288" bIns="18288"/>
+          <a:lstStyle/>
+          <a:p>
+            <a:pPr algn="ctr"/>
+          </a:p>
+        </p:txBody>
+      </p:sp>
+      <p:sp>
+        <p:nvSpPr>
+          <p:cNvPr id="34" name="Oval 33"/>
+          <p:cNvSpPr/>
+          <p:nvPr/>
+        </p:nvSpPr>
+        <p:spPr>
+          <a:xfrm>
+            <a:off x="6818863" y="5172943"/>
+            <a:ext cx="169712" cy="169712"/>
+          </a:xfrm>
+          <a:prstGeom prst="ellipse">
+            <a:avLst/>
+          </a:prstGeom>
+          <a:noFill/>
+          <a:ln w="25400">
+            <a:solidFill>
+              <a:srgbClr val="2F3FBF"/>
+            </a:solidFill>
+          </a:ln>
+          <a:effectLst/>
+        </p:spPr>
+        <p:style>
+          <a:lnRef idx="1">
+            <a:schemeClr val="accent1"/>
+          </a:lnRef>
+          <a:fillRef idx="3">
+            <a:schemeClr val="accent1"/>
+          </a:fillRef>
+          <a:effectRef idx="2">
+            <a:schemeClr val="accent1"/>
+          </a:effectRef>
+          <a:fontRef idx="minor">
+            <a:schemeClr val="lt1"/>
+          </a:fontRef>
+        </p:style>
+        <p:txBody>
+          <a:bodyPr rtlCol="0" anchor="ctr" lIns="54864" rIns="54864" tIns="18288" bIns="18288"/>
+          <a:lstStyle/>
+          <a:p>
+            <a:pPr algn="ctr"/>
+          </a:p>
+        </p:txBody>
+      </p:sp>
+      <p:sp>
+        <p:nvSpPr>
+          <p:cNvPr id="35" name="Oval 34"/>
+          <p:cNvSpPr/>
+          <p:nvPr/>
+        </p:nvSpPr>
+        <p:spPr>
+          <a:xfrm>
+            <a:off x="6874459" y="5228539"/>
+            <a:ext cx="58521" cy="58521"/>
+          </a:xfrm>
+          <a:prstGeom prst="ellipse">
+            <a:avLst/>
+          </a:prstGeom>
+          <a:solidFill>
+            <a:srgbClr val="F2A900"/>
+          </a:solidFill>
+          <a:ln>
+            <a:noFill/>
+          </a:ln>
+          <a:effectLst/>
+        </p:spPr>
+        <p:style>
+          <a:lnRef idx="1">
+            <a:schemeClr val="accent1"/>
+          </a:lnRef>
+          <a:fillRef idx="3">
+            <a:schemeClr val="accent1"/>
+          </a:fillRef>
+          <a:effectRef idx="2">
+            <a:schemeClr val="accent1"/>
+          </a:effectRef>
+          <a:fontRef idx="minor">
+            <a:schemeClr val="lt1"/>
+          </a:fontRef>
+        </p:style>
+        <p:txBody>
+          <a:bodyPr rtlCol="0" anchor="ctr" lIns="54864" rIns="54864" tIns="18288" bIns="18288"/>
+          <a:lstStyle/>
+          <a:p>
+            <a:pPr algn="ctr"/>
+          </a:p>
+        </p:txBody>
+      </p:sp>
+      <p:sp>
+        <p:nvSpPr>
+          <p:cNvPr id="36" name="TextBox 35"/>
+          <p:cNvSpPr txBox="1"/>
+          <p:nvPr/>
+        </p:nvSpPr>
+        <p:spPr>
+          <a:xfrm>
+            <a:off x="7223760" y="5074920"/>
+            <a:ext cx="4297680" cy="365760"/>
+          </a:xfrm>
+          <a:prstGeom prst="rect">
+            <a:avLst/>
+          </a:prstGeom>
+          <a:noFill/>
+        </p:spPr>
+        <p:txBody>
+          <a:bodyPr wrap="square" lIns="0" rIns="0" tIns="0" bIns="0" anchor="t">
+            <a:spAutoFit/>
+          </a:bodyPr>
+          <a:lstStyle/>
+          <a:p>
+            <a:pPr algn="l"/>
+            <a:r>
+              <a:rPr sz="1400" b="0" i="0">
+                <a:solidFill>
+                  <a:srgbClr val="2F3FBF"/>
+                </a:solidFill>
+                <a:latin typeface="Arial Black"/>
+              </a:rPr>
+              <a:t>Стоимость</a:t>
+            </a:r>
+          </a:p>
+        </p:txBody>
+      </p:sp>
+      <p:sp>
+        <p:nvSpPr>
+          <p:cNvPr id="37" name="TextBox 36"/>
+          <p:cNvSpPr txBox="1"/>
+          <p:nvPr/>
+        </p:nvSpPr>
+        <p:spPr>
+          <a:xfrm>
+            <a:off x="7223760" y="5422392"/>
+            <a:ext cx="4297680" cy="457200"/>
+          </a:xfrm>
+          <a:prstGeom prst="rect">
+            <a:avLst/>
+          </a:prstGeom>
+          <a:noFill/>
+        </p:spPr>
+        <p:txBody>
+          <a:bodyPr wrap="square" lIns="0" rIns="0" tIns="0" bIns="0" anchor="t">
+            <a:spAutoFit/>
+          </a:bodyPr>
+          <a:lstStyle/>
+          <a:p>
+            <a:pPr algn="l"/>
+            <a:r>
+              <a:rPr sz="1100" b="0" i="0">
+                <a:solidFill>
+                  <a:srgbClr val="4A4F62"/>
+                </a:solidFill>
+                <a:latin typeface="Arial Black"/>
+              </a:rPr>
+              <a:t>в каждой карточке; «бесплатно» — только если подтверждено</a:t>
+            </a:r>
+          </a:p>
+        </p:txBody>
+      </p:sp>
+      <p:sp>
+        <p:nvSpPr>
+          <p:cNvPr id="38" name="TextBox 37"/>
+          <p:cNvSpPr txBox="1"/>
+          <p:nvPr/>
+        </p:nvSpPr>
+        <p:spPr>
+          <a:xfrm>
+            <a:off x="640080" y="6080760"/>
+            <a:ext cx="10881360" cy="365760"/>
+          </a:xfrm>
+          <a:prstGeom prst="rect">
+            <a:avLst/>
+          </a:prstGeom>
+          <a:noFill/>
+        </p:spPr>
+        <p:txBody>
+          <a:bodyPr wrap="square" lIns="0" rIns="0" tIns="0" bIns="0" anchor="t">
+            <a:spAutoFit/>
+          </a:bodyPr>
+          <a:lstStyle/>
+          <a:p>
+            <a:pPr algn="l"/>
+            <a:r>
+              <a:rPr sz="1100" b="0" i="0">
+                <a:solidFill>
+                  <a:srgbClr val="7A8094"/>
+                </a:solidFill>
+                <a:latin typeface="Arial Black"/>
+              </a:rPr>
+              <a:t>Все пятеро доверяют только данным со ссылкой на источник и датой проверки — это уже было в продукте. «Шансы поступления» и шаблонные эссе нам прямо не советовали делать.</a:t>
+            </a:r>
+          </a:p>
+        </p:txBody>
+      </p:sp>
+    </p:spTree>
+  </p:cSld>
+  <p:clrMapOvr>
+    <a:masterClrMapping/>
+  </p:clrMapOvr>
+</p:sld>
+</file>
+
+<file path=ppt/slides/slide5.xml><?xml version="1.0" encoding="utf-8"?>
+<p:sld xmlns:a="http://schemas.openxmlformats.org/drawingml/2006/main" xmlns:p="http://schemas.openxmlformats.org/presentationml/2006/main" xmlns:r="http://schemas.openxmlformats.org/officeDocument/2006/relationships">
+  <p:cSld>
+    <p:bg>
+      <p:bgPr>
+        <a:solidFill>
+          <a:srgbClr val="FFFFFF"/>
+        </a:solidFill>
+        <a:effectLst/>
+      </p:bgPr>
+    </p:bg>
+    <p:spTree>
+      <p:nvGrpSpPr>
+        <p:cNvPr id="1" name=""/>
+        <p:cNvGrpSpPr/>
+        <p:nvPr/>
+      </p:nvGrpSpPr>
+      <p:grpSpPr/>
+      <p:sp>
+        <p:nvSpPr>
+          <p:cNvPr id="2" name="Oval 1"/>
+          <p:cNvSpPr/>
+          <p:nvPr/>
+        </p:nvSpPr>
+        <p:spPr>
+          <a:xfrm>
+            <a:off x="10408615" y="384048"/>
+            <a:ext cx="384048" cy="384048"/>
+          </a:xfrm>
+          <a:prstGeom prst="ellipse">
+            <a:avLst/>
+          </a:prstGeom>
+          <a:noFill/>
+          <a:ln w="25400">
+            <a:solidFill>
+              <a:srgbClr val="2F3FBF"/>
+            </a:solidFill>
+          </a:ln>
+          <a:effectLst/>
+        </p:spPr>
+        <p:style>
+          <a:lnRef idx="1">
+            <a:schemeClr val="accent1"/>
+          </a:lnRef>
+          <a:fillRef idx="3">
+            <a:schemeClr val="accent1"/>
+          </a:fillRef>
+          <a:effectRef idx="2">
+            <a:schemeClr val="accent1"/>
+          </a:effectRef>
+          <a:fontRef idx="minor">
+            <a:schemeClr val="lt1"/>
+          </a:fontRef>
+        </p:style>
+        <p:txBody>
+          <a:bodyPr rtlCol="0" anchor="ctr" lIns="54864" rIns="54864" tIns="18288" bIns="18288"/>
+          <a:lstStyle/>
+          <a:p>
+            <a:pPr algn="ctr"/>
+          </a:p>
+        </p:txBody>
+      </p:sp>
+      <p:sp>
+        <p:nvSpPr>
+          <p:cNvPr id="3" name="Oval 2"/>
+          <p:cNvSpPr/>
+          <p:nvPr/>
+        </p:nvSpPr>
+        <p:spPr>
+          <a:xfrm>
+            <a:off x="10489265" y="464698"/>
+            <a:ext cx="222747" cy="222747"/>
+          </a:xfrm>
+          <a:prstGeom prst="ellipse">
+            <a:avLst/>
+          </a:prstGeom>
+          <a:noFill/>
+          <a:ln w="25400">
+            <a:solidFill>
+              <a:srgbClr val="2F3FBF"/>
+            </a:solidFill>
+          </a:ln>
+          <a:effectLst/>
+        </p:spPr>
+        <p:style>
+          <a:lnRef idx="1">
+            <a:schemeClr val="accent1"/>
+          </a:lnRef>
+          <a:fillRef idx="3">
+            <a:schemeClr val="accent1"/>
+          </a:fillRef>
+          <a:effectRef idx="2">
+            <a:schemeClr val="accent1"/>
+          </a:effectRef>
+          <a:fontRef idx="minor">
+            <a:schemeClr val="lt1"/>
+          </a:fontRef>
+        </p:style>
+        <p:txBody>
+          <a:bodyPr rtlCol="0" anchor="ctr" lIns="54864" rIns="54864" tIns="18288" bIns="18288"/>
+          <a:lstStyle/>
+          <a:p>
+            <a:pPr algn="ctr"/>
+          </a:p>
+        </p:txBody>
+      </p:sp>
+      <p:sp>
+        <p:nvSpPr>
+          <p:cNvPr id="4" name="Oval 3"/>
+          <p:cNvSpPr/>
+          <p:nvPr/>
+        </p:nvSpPr>
+        <p:spPr>
+          <a:xfrm>
+            <a:off x="10562234" y="537667"/>
+            <a:ext cx="76809" cy="76809"/>
+          </a:xfrm>
+          <a:prstGeom prst="ellipse">
+            <a:avLst/>
+          </a:prstGeom>
+          <a:solidFill>
+            <a:srgbClr val="F2A900"/>
+          </a:solidFill>
+          <a:ln>
+            <a:noFill/>
+          </a:ln>
+          <a:effectLst/>
+        </p:spPr>
+        <p:style>
+          <a:lnRef idx="1">
+            <a:schemeClr val="accent1"/>
+          </a:lnRef>
+          <a:fillRef idx="3">
+            <a:schemeClr val="accent1"/>
+          </a:fillRef>
+          <a:effectRef idx="2">
+            <a:schemeClr val="accent1"/>
+          </a:effectRef>
+          <a:fontRef idx="minor">
+            <a:schemeClr val="lt1"/>
+          </a:fontRef>
+        </p:style>
+        <p:txBody>
+          <a:bodyPr rtlCol="0" anchor="ctr" lIns="54864" rIns="54864" tIns="18288" bIns="18288"/>
+          <a:lstStyle/>
+          <a:p>
+            <a:pPr algn="ctr"/>
+          </a:p>
+        </p:txBody>
+      </p:sp>
+      <p:sp>
+        <p:nvSpPr>
+          <p:cNvPr id="5" name="TextBox 4"/>
+          <p:cNvSpPr txBox="1"/>
+          <p:nvPr/>
+        </p:nvSpPr>
+        <p:spPr>
+          <a:xfrm>
+            <a:off x="10884103" y="402336"/>
+            <a:ext cx="1371600" cy="365760"/>
+          </a:xfrm>
+          <a:prstGeom prst="rect">
+            <a:avLst/>
+          </a:prstGeom>
+          <a:noFill/>
+        </p:spPr>
+        <p:txBody>
+          <a:bodyPr wrap="square" lIns="0" rIns="0" tIns="0" bIns="0" anchor="ctr">
+            <a:spAutoFit/>
+          </a:bodyPr>
+          <a:lstStyle/>
+          <a:p>
+            <a:pPr algn="l"/>
+            <a:r>
+              <a:rPr sz="1400" b="0" i="0">
+                <a:solidFill>
+                  <a:srgbClr val="2F3FBF"/>
+                </a:solidFill>
+                <a:latin typeface="Arial Black"/>
+              </a:rPr>
+              <a:t>Maqsat</a:t>
+            </a:r>
+          </a:p>
+        </p:txBody>
+      </p:sp>
+      <p:sp>
+        <p:nvSpPr>
+          <p:cNvPr id="6" name="TextBox 5"/>
+          <p:cNvSpPr txBox="1"/>
+          <p:nvPr/>
+        </p:nvSpPr>
+        <p:spPr>
+          <a:xfrm>
+            <a:off x="640080" y="868680"/>
+            <a:ext cx="10881360" cy="777240"/>
+          </a:xfrm>
+          <a:prstGeom prst="rect">
+            <a:avLst/>
+          </a:prstGeom>
+          <a:noFill/>
+        </p:spPr>
+        <p:txBody>
+          <a:bodyPr wrap="square" lIns="0" rIns="0" tIns="0" bIns="0" anchor="t">
+            <a:spAutoFit/>
+          </a:bodyPr>
+          <a:lstStyle/>
+          <a:p>
+            <a:pPr algn="l"/>
+            <a:r>
+              <a:rPr sz="4400" b="0" i="0">
+                <a:solidFill>
+                  <a:srgbClr val="2F3FBF"/>
+                </a:solidFill>
+                <a:latin typeface="Arial Black"/>
+              </a:rPr>
               <a:t>РЕШЕНИЕ</a:t>
             </a:r>
           </a:p>
@@ -9523,7 +12178,7 @@
 </p:sld>
 </file>
 
-<file path=ppt/slides/slide5.xml><?xml version="1.0" encoding="utf-8"?>
+<file path=ppt/slides/slide6.xml><?xml version="1.0" encoding="utf-8"?>
 <p:sld xmlns:a="http://schemas.openxmlformats.org/drawingml/2006/main" xmlns:p="http://schemas.openxmlformats.org/presentationml/2006/main" xmlns:r="http://schemas.openxmlformats.org/officeDocument/2006/relationships">
   <p:cSld>
     <p:bg>
@@ -10485,1204 +13140,6 @@
                 <a:latin typeface="Arial Black"/>
               </a:rPr>
               <a:t>Примеры — реальный результат приложения для демо-профиля: 10 класс, Алматы, английский B1.</a:t>
-            </a:r>
-          </a:p>
-        </p:txBody>
-      </p:sp>
-    </p:spTree>
-  </p:cSld>
-  <p:clrMapOvr>
-    <a:masterClrMapping/>
-  </p:clrMapOvr>
-</p:sld>
-</file>
-
-<file path=ppt/slides/slide6.xml><?xml version="1.0" encoding="utf-8"?>
-<p:sld xmlns:a="http://schemas.openxmlformats.org/drawingml/2006/main" xmlns:p="http://schemas.openxmlformats.org/presentationml/2006/main" xmlns:r="http://schemas.openxmlformats.org/officeDocument/2006/relationships">
-  <p:cSld>
-    <p:bg>
-      <p:bgPr>
-        <a:solidFill>
-          <a:srgbClr val="FFFFFF"/>
-        </a:solidFill>
-        <a:effectLst/>
-      </p:bgPr>
-    </p:bg>
-    <p:spTree>
-      <p:nvGrpSpPr>
-        <p:cNvPr id="1" name=""/>
-        <p:cNvGrpSpPr/>
-        <p:nvPr/>
-      </p:nvGrpSpPr>
-      <p:grpSpPr/>
-      <p:sp>
-        <p:nvSpPr>
-          <p:cNvPr id="2" name="Oval 1"/>
-          <p:cNvSpPr/>
-          <p:nvPr/>
-        </p:nvSpPr>
-        <p:spPr>
-          <a:xfrm>
-            <a:off x="274319" y="182880"/>
-            <a:ext cx="7863840" cy="7863840"/>
-          </a:xfrm>
-          <a:prstGeom prst="ellipse">
-            <a:avLst/>
-          </a:prstGeom>
-          <a:solidFill>
-            <a:srgbClr val="ECEEFC"/>
-          </a:solidFill>
-          <a:ln>
-            <a:noFill/>
-          </a:ln>
-          <a:effectLst/>
-        </p:spPr>
-        <p:style>
-          <a:lnRef idx="1">
-            <a:schemeClr val="accent1"/>
-          </a:lnRef>
-          <a:fillRef idx="3">
-            <a:schemeClr val="accent1"/>
-          </a:fillRef>
-          <a:effectRef idx="2">
-            <a:schemeClr val="accent1"/>
-          </a:effectRef>
-          <a:fontRef idx="minor">
-            <a:schemeClr val="lt1"/>
-          </a:fontRef>
-        </p:style>
-        <p:txBody>
-          <a:bodyPr rtlCol="0" anchor="ctr" lIns="54864" rIns="54864" tIns="18288" bIns="18288"/>
-          <a:lstStyle/>
-          <a:p>
-            <a:pPr algn="ctr"/>
-          </a:p>
-        </p:txBody>
-      </p:sp>
-      <p:sp>
-        <p:nvSpPr>
-          <p:cNvPr id="3" name="Oval 2"/>
-          <p:cNvSpPr/>
-          <p:nvPr/>
-        </p:nvSpPr>
-        <p:spPr>
-          <a:xfrm>
-            <a:off x="10408615" y="384048"/>
-            <a:ext cx="384048" cy="384048"/>
-          </a:xfrm>
-          <a:prstGeom prst="ellipse">
-            <a:avLst/>
-          </a:prstGeom>
-          <a:noFill/>
-          <a:ln w="25400">
-            <a:solidFill>
-              <a:srgbClr val="2F3FBF"/>
-            </a:solidFill>
-          </a:ln>
-          <a:effectLst/>
-        </p:spPr>
-        <p:style>
-          <a:lnRef idx="1">
-            <a:schemeClr val="accent1"/>
-          </a:lnRef>
-          <a:fillRef idx="3">
-            <a:schemeClr val="accent1"/>
-          </a:fillRef>
-          <a:effectRef idx="2">
-            <a:schemeClr val="accent1"/>
-          </a:effectRef>
-          <a:fontRef idx="minor">
-            <a:schemeClr val="lt1"/>
-          </a:fontRef>
-        </p:style>
-        <p:txBody>
-          <a:bodyPr rtlCol="0" anchor="ctr" lIns="54864" rIns="54864" tIns="18288" bIns="18288"/>
-          <a:lstStyle/>
-          <a:p>
-            <a:pPr algn="ctr"/>
-          </a:p>
-        </p:txBody>
-      </p:sp>
-      <p:sp>
-        <p:nvSpPr>
-          <p:cNvPr id="4" name="Oval 3"/>
-          <p:cNvSpPr/>
-          <p:nvPr/>
-        </p:nvSpPr>
-        <p:spPr>
-          <a:xfrm>
-            <a:off x="10489265" y="464698"/>
-            <a:ext cx="222747" cy="222747"/>
-          </a:xfrm>
-          <a:prstGeom prst="ellipse">
-            <a:avLst/>
-          </a:prstGeom>
-          <a:noFill/>
-          <a:ln w="25400">
-            <a:solidFill>
-              <a:srgbClr val="2F3FBF"/>
-            </a:solidFill>
-          </a:ln>
-          <a:effectLst/>
-        </p:spPr>
-        <p:style>
-          <a:lnRef idx="1">
-            <a:schemeClr val="accent1"/>
-          </a:lnRef>
-          <a:fillRef idx="3">
-            <a:schemeClr val="accent1"/>
-          </a:fillRef>
-          <a:effectRef idx="2">
-            <a:schemeClr val="accent1"/>
-          </a:effectRef>
-          <a:fontRef idx="minor">
-            <a:schemeClr val="lt1"/>
-          </a:fontRef>
-        </p:style>
-        <p:txBody>
-          <a:bodyPr rtlCol="0" anchor="ctr" lIns="54864" rIns="54864" tIns="18288" bIns="18288"/>
-          <a:lstStyle/>
-          <a:p>
-            <a:pPr algn="ctr"/>
-          </a:p>
-        </p:txBody>
-      </p:sp>
-      <p:sp>
-        <p:nvSpPr>
-          <p:cNvPr id="5" name="Oval 4"/>
-          <p:cNvSpPr/>
-          <p:nvPr/>
-        </p:nvSpPr>
-        <p:spPr>
-          <a:xfrm>
-            <a:off x="10562234" y="537667"/>
-            <a:ext cx="76809" cy="76809"/>
-          </a:xfrm>
-          <a:prstGeom prst="ellipse">
-            <a:avLst/>
-          </a:prstGeom>
-          <a:solidFill>
-            <a:srgbClr val="F2A900"/>
-          </a:solidFill>
-          <a:ln>
-            <a:noFill/>
-          </a:ln>
-          <a:effectLst/>
-        </p:spPr>
-        <p:style>
-          <a:lnRef idx="1">
-            <a:schemeClr val="accent1"/>
-          </a:lnRef>
-          <a:fillRef idx="3">
-            <a:schemeClr val="accent1"/>
-          </a:fillRef>
-          <a:effectRef idx="2">
-            <a:schemeClr val="accent1"/>
-          </a:effectRef>
-          <a:fontRef idx="minor">
-            <a:schemeClr val="lt1"/>
-          </a:fontRef>
-        </p:style>
-        <p:txBody>
-          <a:bodyPr rtlCol="0" anchor="ctr" lIns="54864" rIns="54864" tIns="18288" bIns="18288"/>
-          <a:lstStyle/>
-          <a:p>
-            <a:pPr algn="ctr"/>
-          </a:p>
-        </p:txBody>
-      </p:sp>
-      <p:sp>
-        <p:nvSpPr>
-          <p:cNvPr id="6" name="TextBox 5"/>
-          <p:cNvSpPr txBox="1"/>
-          <p:nvPr/>
-        </p:nvSpPr>
-        <p:spPr>
-          <a:xfrm>
-            <a:off x="10884103" y="402336"/>
-            <a:ext cx="1371600" cy="365760"/>
-          </a:xfrm>
-          <a:prstGeom prst="rect">
-            <a:avLst/>
-          </a:prstGeom>
-          <a:noFill/>
-        </p:spPr>
-        <p:txBody>
-          <a:bodyPr wrap="square" lIns="0" rIns="0" tIns="0" bIns="0" anchor="ctr">
-            <a:spAutoFit/>
-          </a:bodyPr>
-          <a:lstStyle/>
-          <a:p>
-            <a:pPr algn="l"/>
-            <a:r>
-              <a:rPr sz="1400" b="0" i="0">
-                <a:solidFill>
-                  <a:srgbClr val="2F3FBF"/>
-                </a:solidFill>
-                <a:latin typeface="Arial Black"/>
-              </a:rPr>
-              <a:t>Maqsat</a:t>
-            </a:r>
-          </a:p>
-        </p:txBody>
-      </p:sp>
-      <p:sp>
-        <p:nvSpPr>
-          <p:cNvPr id="7" name="TextBox 6"/>
-          <p:cNvSpPr txBox="1"/>
-          <p:nvPr/>
-        </p:nvSpPr>
-        <p:spPr>
-          <a:xfrm>
-            <a:off x="640080" y="868680"/>
-            <a:ext cx="10881360" cy="777240"/>
-          </a:xfrm>
-          <a:prstGeom prst="rect">
-            <a:avLst/>
-          </a:prstGeom>
-          <a:noFill/>
-        </p:spPr>
-        <p:txBody>
-          <a:bodyPr wrap="square" lIns="0" rIns="0" tIns="0" bIns="0" anchor="t">
-            <a:spAutoFit/>
-          </a:bodyPr>
-          <a:lstStyle/>
-          <a:p>
-            <a:pPr algn="l"/>
-            <a:r>
-              <a:rPr sz="4400" b="0" i="0">
-                <a:solidFill>
-                  <a:srgbClr val="2F3FBF"/>
-                </a:solidFill>
-                <a:latin typeface="Arial Black"/>
-              </a:rPr>
-              <a:t>ДЕМО</a:t>
-            </a:r>
-          </a:p>
-        </p:txBody>
-      </p:sp>
-      <p:sp>
-        <p:nvSpPr>
-          <p:cNvPr id="8" name="TextBox 7"/>
-          <p:cNvSpPr txBox="1"/>
-          <p:nvPr/>
-        </p:nvSpPr>
-        <p:spPr>
-          <a:xfrm>
-            <a:off x="640080" y="1618488"/>
-            <a:ext cx="10881360" cy="822960"/>
-          </a:xfrm>
-          <a:prstGeom prst="rect">
-            <a:avLst/>
-          </a:prstGeom>
-          <a:noFill/>
-        </p:spPr>
-        <p:txBody>
-          <a:bodyPr wrap="square" lIns="0" rIns="0" tIns="0" bIns="0" anchor="t">
-            <a:spAutoFit/>
-          </a:bodyPr>
-          <a:lstStyle/>
-          <a:p>
-            <a:pPr algn="l"/>
-            <a:r>
-              <a:rPr sz="2200" b="0" i="0">
-                <a:solidFill>
-                  <a:srgbClr val="111424"/>
-                </a:solidFill>
-                <a:latin typeface="Arial Black"/>
-              </a:rPr>
-              <a:t>ВОЗМОЖНОСТИ ДЛЯ ТЕБЯ</a:t>
-            </a:r>
-          </a:p>
-        </p:txBody>
-      </p:sp>
-      <p:pic>
-        <p:nvPicPr>
-          <p:cNvPr id="9" name="Picture 8" descr="matches.png"/>
-          <p:cNvPicPr>
-            <a:picLocks noChangeAspect="1"/>
-          </p:cNvPicPr>
-          <p:nvPr/>
-        </p:nvPicPr>
-        <p:blipFill>
-          <a:blip r:embed="rId2"/>
-          <a:srcRect b="10000"/>
-          <a:stretch>
-            <a:fillRect/>
-          </a:stretch>
-        </p:blipFill>
-        <p:spPr>
-          <a:xfrm>
-            <a:off x="640080" y="2331720"/>
-            <a:ext cx="6675120" cy="4171950"/>
-          </a:xfrm>
-          <a:prstGeom prst="rect">
-            <a:avLst/>
-          </a:prstGeom>
-          <a:ln w="12700">
-            <a:solidFill>
-              <a:srgbClr val="DADEEC"/>
-            </a:solidFill>
-          </a:ln>
-        </p:spPr>
-      </p:pic>
-      <p:sp>
-        <p:nvSpPr>
-          <p:cNvPr id="10" name="Oval 9"/>
-          <p:cNvSpPr/>
-          <p:nvPr/>
-        </p:nvSpPr>
-        <p:spPr>
-          <a:xfrm>
-            <a:off x="7799831" y="2313432"/>
-            <a:ext cx="310896" cy="310896"/>
-          </a:xfrm>
-          <a:prstGeom prst="ellipse">
-            <a:avLst/>
-          </a:prstGeom>
-          <a:noFill/>
-          <a:ln w="25400">
-            <a:solidFill>
-              <a:srgbClr val="2F3FBF"/>
-            </a:solidFill>
-          </a:ln>
-          <a:effectLst/>
-        </p:spPr>
-        <p:style>
-          <a:lnRef idx="1">
-            <a:schemeClr val="accent1"/>
-          </a:lnRef>
-          <a:fillRef idx="3">
-            <a:schemeClr val="accent1"/>
-          </a:fillRef>
-          <a:effectRef idx="2">
-            <a:schemeClr val="accent1"/>
-          </a:effectRef>
-          <a:fontRef idx="minor">
-            <a:schemeClr val="lt1"/>
-          </a:fontRef>
-        </p:style>
-        <p:txBody>
-          <a:bodyPr rtlCol="0" anchor="ctr" lIns="54864" rIns="54864" tIns="18288" bIns="18288"/>
-          <a:lstStyle/>
-          <a:p>
-            <a:pPr algn="ctr"/>
-          </a:p>
-        </p:txBody>
-      </p:sp>
-      <p:sp>
-        <p:nvSpPr>
-          <p:cNvPr id="11" name="Oval 10"/>
-          <p:cNvSpPr/>
-          <p:nvPr/>
-        </p:nvSpPr>
-        <p:spPr>
-          <a:xfrm>
-            <a:off x="7865120" y="2378720"/>
-            <a:ext cx="180319" cy="180319"/>
-          </a:xfrm>
-          <a:prstGeom prst="ellipse">
-            <a:avLst/>
-          </a:prstGeom>
-          <a:noFill/>
-          <a:ln w="25400">
-            <a:solidFill>
-              <a:srgbClr val="2F3FBF"/>
-            </a:solidFill>
-          </a:ln>
-          <a:effectLst/>
-        </p:spPr>
-        <p:style>
-          <a:lnRef idx="1">
-            <a:schemeClr val="accent1"/>
-          </a:lnRef>
-          <a:fillRef idx="3">
-            <a:schemeClr val="accent1"/>
-          </a:fillRef>
-          <a:effectRef idx="2">
-            <a:schemeClr val="accent1"/>
-          </a:effectRef>
-          <a:fontRef idx="minor">
-            <a:schemeClr val="lt1"/>
-          </a:fontRef>
-        </p:style>
-        <p:txBody>
-          <a:bodyPr rtlCol="0" anchor="ctr" lIns="54864" rIns="54864" tIns="18288" bIns="18288"/>
-          <a:lstStyle/>
-          <a:p>
-            <a:pPr algn="ctr"/>
-          </a:p>
-        </p:txBody>
-      </p:sp>
-      <p:sp>
-        <p:nvSpPr>
-          <p:cNvPr id="12" name="Oval 11"/>
-          <p:cNvSpPr/>
-          <p:nvPr/>
-        </p:nvSpPr>
-        <p:spPr>
-          <a:xfrm>
-            <a:off x="7924190" y="2437790"/>
-            <a:ext cx="62179" cy="62179"/>
-          </a:xfrm>
-          <a:prstGeom prst="ellipse">
-            <a:avLst/>
-          </a:prstGeom>
-          <a:solidFill>
-            <a:srgbClr val="F2A900"/>
-          </a:solidFill>
-          <a:ln>
-            <a:noFill/>
-          </a:ln>
-          <a:effectLst/>
-        </p:spPr>
-        <p:style>
-          <a:lnRef idx="1">
-            <a:schemeClr val="accent1"/>
-          </a:lnRef>
-          <a:fillRef idx="3">
-            <a:schemeClr val="accent1"/>
-          </a:fillRef>
-          <a:effectRef idx="2">
-            <a:schemeClr val="accent1"/>
-          </a:effectRef>
-          <a:fontRef idx="minor">
-            <a:schemeClr val="lt1"/>
-          </a:fontRef>
-        </p:style>
-        <p:txBody>
-          <a:bodyPr rtlCol="0" anchor="ctr" lIns="54864" rIns="54864" tIns="18288" bIns="18288"/>
-          <a:lstStyle/>
-          <a:p>
-            <a:pPr algn="ctr"/>
-          </a:p>
-        </p:txBody>
-      </p:sp>
-      <p:sp>
-        <p:nvSpPr>
-          <p:cNvPr id="13" name="TextBox 12"/>
-          <p:cNvSpPr txBox="1"/>
-          <p:nvPr/>
-        </p:nvSpPr>
-        <p:spPr>
-          <a:xfrm>
-            <a:off x="8275320" y="2286000"/>
-            <a:ext cx="3566160" cy="365760"/>
-          </a:xfrm>
-          <a:prstGeom prst="rect">
-            <a:avLst/>
-          </a:prstGeom>
-          <a:noFill/>
-        </p:spPr>
-        <p:txBody>
-          <a:bodyPr wrap="square" lIns="0" rIns="0" tIns="0" bIns="0" anchor="t">
-            <a:spAutoFit/>
-          </a:bodyPr>
-          <a:lstStyle/>
-          <a:p>
-            <a:pPr algn="l"/>
-            <a:r>
-              <a:rPr sz="1600" b="0" i="0">
-                <a:solidFill>
-                  <a:srgbClr val="2F3FBF"/>
-                </a:solidFill>
-                <a:latin typeface="Arial Black"/>
-              </a:rPr>
-              <a:t>Статус и пробелы</a:t>
-            </a:r>
-          </a:p>
-        </p:txBody>
-      </p:sp>
-      <p:sp>
-        <p:nvSpPr>
-          <p:cNvPr id="14" name="TextBox 13"/>
-          <p:cNvSpPr txBox="1"/>
-          <p:nvPr/>
-        </p:nvSpPr>
-        <p:spPr>
-          <a:xfrm>
-            <a:off x="8275320" y="2651760"/>
-            <a:ext cx="3474720" cy="502920"/>
-          </a:xfrm>
-          <a:prstGeom prst="rect">
-            <a:avLst/>
-          </a:prstGeom>
-          <a:noFill/>
-        </p:spPr>
-        <p:txBody>
-          <a:bodyPr wrap="square" lIns="0" rIns="0" tIns="0" bIns="0" anchor="t">
-            <a:spAutoFit/>
-          </a:bodyPr>
-          <a:lstStyle/>
-          <a:p>
-            <a:pPr algn="l"/>
-            <a:r>
-              <a:rPr sz="1100" b="0" i="0">
-                <a:solidFill>
-                  <a:srgbClr val="4A4F62"/>
-                </a:solidFill>
-                <a:latin typeface="Arial Black"/>
-              </a:rPr>
-              <a:t>подходишь / почти / позже — с объяснением по каждому условию</a:t>
-            </a:r>
-          </a:p>
-        </p:txBody>
-      </p:sp>
-      <p:sp>
-        <p:nvSpPr>
-          <p:cNvPr id="15" name="Oval 14"/>
-          <p:cNvSpPr/>
-          <p:nvPr/>
-        </p:nvSpPr>
-        <p:spPr>
-          <a:xfrm>
-            <a:off x="7799831" y="3227832"/>
-            <a:ext cx="310896" cy="310896"/>
-          </a:xfrm>
-          <a:prstGeom prst="ellipse">
-            <a:avLst/>
-          </a:prstGeom>
-          <a:noFill/>
-          <a:ln w="25400">
-            <a:solidFill>
-              <a:srgbClr val="2F3FBF"/>
-            </a:solidFill>
-          </a:ln>
-          <a:effectLst/>
-        </p:spPr>
-        <p:style>
-          <a:lnRef idx="1">
-            <a:schemeClr val="accent1"/>
-          </a:lnRef>
-          <a:fillRef idx="3">
-            <a:schemeClr val="accent1"/>
-          </a:fillRef>
-          <a:effectRef idx="2">
-            <a:schemeClr val="accent1"/>
-          </a:effectRef>
-          <a:fontRef idx="minor">
-            <a:schemeClr val="lt1"/>
-          </a:fontRef>
-        </p:style>
-        <p:txBody>
-          <a:bodyPr rtlCol="0" anchor="ctr" lIns="54864" rIns="54864" tIns="18288" bIns="18288"/>
-          <a:lstStyle/>
-          <a:p>
-            <a:pPr algn="ctr"/>
-          </a:p>
-        </p:txBody>
-      </p:sp>
-      <p:sp>
-        <p:nvSpPr>
-          <p:cNvPr id="16" name="Oval 15"/>
-          <p:cNvSpPr/>
-          <p:nvPr/>
-        </p:nvSpPr>
-        <p:spPr>
-          <a:xfrm>
-            <a:off x="7865120" y="3293120"/>
-            <a:ext cx="180319" cy="180319"/>
-          </a:xfrm>
-          <a:prstGeom prst="ellipse">
-            <a:avLst/>
-          </a:prstGeom>
-          <a:noFill/>
-          <a:ln w="25400">
-            <a:solidFill>
-              <a:srgbClr val="2F3FBF"/>
-            </a:solidFill>
-          </a:ln>
-          <a:effectLst/>
-        </p:spPr>
-        <p:style>
-          <a:lnRef idx="1">
-            <a:schemeClr val="accent1"/>
-          </a:lnRef>
-          <a:fillRef idx="3">
-            <a:schemeClr val="accent1"/>
-          </a:fillRef>
-          <a:effectRef idx="2">
-            <a:schemeClr val="accent1"/>
-          </a:effectRef>
-          <a:fontRef idx="minor">
-            <a:schemeClr val="lt1"/>
-          </a:fontRef>
-        </p:style>
-        <p:txBody>
-          <a:bodyPr rtlCol="0" anchor="ctr" lIns="54864" rIns="54864" tIns="18288" bIns="18288"/>
-          <a:lstStyle/>
-          <a:p>
-            <a:pPr algn="ctr"/>
-          </a:p>
-        </p:txBody>
-      </p:sp>
-      <p:sp>
-        <p:nvSpPr>
-          <p:cNvPr id="17" name="Oval 16"/>
-          <p:cNvSpPr/>
-          <p:nvPr/>
-        </p:nvSpPr>
-        <p:spPr>
-          <a:xfrm>
-            <a:off x="7924190" y="3352190"/>
-            <a:ext cx="62179" cy="62179"/>
-          </a:xfrm>
-          <a:prstGeom prst="ellipse">
-            <a:avLst/>
-          </a:prstGeom>
-          <a:solidFill>
-            <a:srgbClr val="F2A900"/>
-          </a:solidFill>
-          <a:ln>
-            <a:noFill/>
-          </a:ln>
-          <a:effectLst/>
-        </p:spPr>
-        <p:style>
-          <a:lnRef idx="1">
-            <a:schemeClr val="accent1"/>
-          </a:lnRef>
-          <a:fillRef idx="3">
-            <a:schemeClr val="accent1"/>
-          </a:fillRef>
-          <a:effectRef idx="2">
-            <a:schemeClr val="accent1"/>
-          </a:effectRef>
-          <a:fontRef idx="minor">
-            <a:schemeClr val="lt1"/>
-          </a:fontRef>
-        </p:style>
-        <p:txBody>
-          <a:bodyPr rtlCol="0" anchor="ctr" lIns="54864" rIns="54864" tIns="18288" bIns="18288"/>
-          <a:lstStyle/>
-          <a:p>
-            <a:pPr algn="ctr"/>
-          </a:p>
-        </p:txBody>
-      </p:sp>
-      <p:sp>
-        <p:nvSpPr>
-          <p:cNvPr id="18" name="TextBox 17"/>
-          <p:cNvSpPr txBox="1"/>
-          <p:nvPr/>
-        </p:nvSpPr>
-        <p:spPr>
-          <a:xfrm>
-            <a:off x="8275320" y="3200400"/>
-            <a:ext cx="3566160" cy="365760"/>
-          </a:xfrm>
-          <a:prstGeom prst="rect">
-            <a:avLst/>
-          </a:prstGeom>
-          <a:noFill/>
-        </p:spPr>
-        <p:txBody>
-          <a:bodyPr wrap="square" lIns="0" rIns="0" tIns="0" bIns="0" anchor="t">
-            <a:spAutoFit/>
-          </a:bodyPr>
-          <a:lstStyle/>
-          <a:p>
-            <a:pPr algn="l"/>
-            <a:r>
-              <a:rPr sz="1600" b="0" i="0">
-                <a:solidFill>
-                  <a:srgbClr val="2F3FBF"/>
-                </a:solidFill>
-                <a:latin typeface="Arial Black"/>
-              </a:rPr>
-              <a:t>Дедлайн и отсчёт</a:t>
-            </a:r>
-          </a:p>
-        </p:txBody>
-      </p:sp>
-      <p:sp>
-        <p:nvSpPr>
-          <p:cNvPr id="19" name="TextBox 18"/>
-          <p:cNvSpPr txBox="1"/>
-          <p:nvPr/>
-        </p:nvSpPr>
-        <p:spPr>
-          <a:xfrm>
-            <a:off x="8275320" y="3566160"/>
-            <a:ext cx="3474720" cy="502920"/>
-          </a:xfrm>
-          <a:prstGeom prst="rect">
-            <a:avLst/>
-          </a:prstGeom>
-          <a:noFill/>
-        </p:spPr>
-        <p:txBody>
-          <a:bodyPr wrap="square" lIns="0" rIns="0" tIns="0" bIns="0" anchor="t">
-            <a:spAutoFit/>
-          </a:bodyPr>
-          <a:lstStyle/>
-          <a:p>
-            <a:pPr algn="l"/>
-            <a:r>
-              <a:rPr sz="1100" b="0" i="0">
-                <a:solidFill>
-                  <a:srgbClr val="4A4F62"/>
-                </a:solidFill>
-                <a:latin typeface="Arial Black"/>
-              </a:rPr>
-              <a:t>«через 12 дней»; красным — если меньше 3 недель</a:t>
-            </a:r>
-          </a:p>
-        </p:txBody>
-      </p:sp>
-      <p:sp>
-        <p:nvSpPr>
-          <p:cNvPr id="20" name="Oval 19"/>
-          <p:cNvSpPr/>
-          <p:nvPr/>
-        </p:nvSpPr>
-        <p:spPr>
-          <a:xfrm>
-            <a:off x="7799831" y="4142232"/>
-            <a:ext cx="310896" cy="310896"/>
-          </a:xfrm>
-          <a:prstGeom prst="ellipse">
-            <a:avLst/>
-          </a:prstGeom>
-          <a:noFill/>
-          <a:ln w="25400">
-            <a:solidFill>
-              <a:srgbClr val="2F3FBF"/>
-            </a:solidFill>
-          </a:ln>
-          <a:effectLst/>
-        </p:spPr>
-        <p:style>
-          <a:lnRef idx="1">
-            <a:schemeClr val="accent1"/>
-          </a:lnRef>
-          <a:fillRef idx="3">
-            <a:schemeClr val="accent1"/>
-          </a:fillRef>
-          <a:effectRef idx="2">
-            <a:schemeClr val="accent1"/>
-          </a:effectRef>
-          <a:fontRef idx="minor">
-            <a:schemeClr val="lt1"/>
-          </a:fontRef>
-        </p:style>
-        <p:txBody>
-          <a:bodyPr rtlCol="0" anchor="ctr" lIns="54864" rIns="54864" tIns="18288" bIns="18288"/>
-          <a:lstStyle/>
-          <a:p>
-            <a:pPr algn="ctr"/>
-          </a:p>
-        </p:txBody>
-      </p:sp>
-      <p:sp>
-        <p:nvSpPr>
-          <p:cNvPr id="21" name="Oval 20"/>
-          <p:cNvSpPr/>
-          <p:nvPr/>
-        </p:nvSpPr>
-        <p:spPr>
-          <a:xfrm>
-            <a:off x="7865120" y="4207520"/>
-            <a:ext cx="180319" cy="180319"/>
-          </a:xfrm>
-          <a:prstGeom prst="ellipse">
-            <a:avLst/>
-          </a:prstGeom>
-          <a:noFill/>
-          <a:ln w="25400">
-            <a:solidFill>
-              <a:srgbClr val="2F3FBF"/>
-            </a:solidFill>
-          </a:ln>
-          <a:effectLst/>
-        </p:spPr>
-        <p:style>
-          <a:lnRef idx="1">
-            <a:schemeClr val="accent1"/>
-          </a:lnRef>
-          <a:fillRef idx="3">
-            <a:schemeClr val="accent1"/>
-          </a:fillRef>
-          <a:effectRef idx="2">
-            <a:schemeClr val="accent1"/>
-          </a:effectRef>
-          <a:fontRef idx="minor">
-            <a:schemeClr val="lt1"/>
-          </a:fontRef>
-        </p:style>
-        <p:txBody>
-          <a:bodyPr rtlCol="0" anchor="ctr" lIns="54864" rIns="54864" tIns="18288" bIns="18288"/>
-          <a:lstStyle/>
-          <a:p>
-            <a:pPr algn="ctr"/>
-          </a:p>
-        </p:txBody>
-      </p:sp>
-      <p:sp>
-        <p:nvSpPr>
-          <p:cNvPr id="22" name="Oval 21"/>
-          <p:cNvSpPr/>
-          <p:nvPr/>
-        </p:nvSpPr>
-        <p:spPr>
-          <a:xfrm>
-            <a:off x="7924190" y="4266590"/>
-            <a:ext cx="62179" cy="62179"/>
-          </a:xfrm>
-          <a:prstGeom prst="ellipse">
-            <a:avLst/>
-          </a:prstGeom>
-          <a:solidFill>
-            <a:srgbClr val="F2A900"/>
-          </a:solidFill>
-          <a:ln>
-            <a:noFill/>
-          </a:ln>
-          <a:effectLst/>
-        </p:spPr>
-        <p:style>
-          <a:lnRef idx="1">
-            <a:schemeClr val="accent1"/>
-          </a:lnRef>
-          <a:fillRef idx="3">
-            <a:schemeClr val="accent1"/>
-          </a:fillRef>
-          <a:effectRef idx="2">
-            <a:schemeClr val="accent1"/>
-          </a:effectRef>
-          <a:fontRef idx="minor">
-            <a:schemeClr val="lt1"/>
-          </a:fontRef>
-        </p:style>
-        <p:txBody>
-          <a:bodyPr rtlCol="0" anchor="ctr" lIns="54864" rIns="54864" tIns="18288" bIns="18288"/>
-          <a:lstStyle/>
-          <a:p>
-            <a:pPr algn="ctr"/>
-          </a:p>
-        </p:txBody>
-      </p:sp>
-      <p:sp>
-        <p:nvSpPr>
-          <p:cNvPr id="23" name="TextBox 22"/>
-          <p:cNvSpPr txBox="1"/>
-          <p:nvPr/>
-        </p:nvSpPr>
-        <p:spPr>
-          <a:xfrm>
-            <a:off x="8275320" y="4114800"/>
-            <a:ext cx="3566160" cy="365760"/>
-          </a:xfrm>
-          <a:prstGeom prst="rect">
-            <a:avLst/>
-          </a:prstGeom>
-          <a:noFill/>
-        </p:spPr>
-        <p:txBody>
-          <a:bodyPr wrap="square" lIns="0" rIns="0" tIns="0" bIns="0" anchor="t">
-            <a:spAutoFit/>
-          </a:bodyPr>
-          <a:lstStyle/>
-          <a:p>
-            <a:pPr algn="l"/>
-            <a:r>
-              <a:rPr sz="1600" b="0" i="0">
-                <a:solidFill>
-                  <a:srgbClr val="2F3FBF"/>
-                </a:solidFill>
-                <a:latin typeface="Arial Black"/>
-              </a:rPr>
-              <a:t>Честная дата</a:t>
-            </a:r>
-          </a:p>
-        </p:txBody>
-      </p:sp>
-      <p:sp>
-        <p:nvSpPr>
-          <p:cNvPr id="24" name="TextBox 23"/>
-          <p:cNvSpPr txBox="1"/>
-          <p:nvPr/>
-        </p:nvSpPr>
-        <p:spPr>
-          <a:xfrm>
-            <a:off x="8275320" y="4480560"/>
-            <a:ext cx="3474720" cy="502920"/>
-          </a:xfrm>
-          <a:prstGeom prst="rect">
-            <a:avLst/>
-          </a:prstGeom>
-          <a:noFill/>
-        </p:spPr>
-        <p:txBody>
-          <a:bodyPr wrap="square" lIns="0" rIns="0" tIns="0" bIns="0" anchor="t">
-            <a:spAutoFit/>
-          </a:bodyPr>
-          <a:lstStyle/>
-          <a:p>
-            <a:pPr algn="l"/>
-            <a:r>
-              <a:rPr sz="1100" b="0" i="0">
-                <a:solidFill>
-                  <a:srgbClr val="4A4F62"/>
-                </a:solidFill>
-                <a:latin typeface="Arial Black"/>
-              </a:rPr>
-              <a:t>«ориентировочно» и на чём основана оценка</a:t>
-            </a:r>
-          </a:p>
-        </p:txBody>
-      </p:sp>
-      <p:sp>
-        <p:nvSpPr>
-          <p:cNvPr id="25" name="Oval 24"/>
-          <p:cNvSpPr/>
-          <p:nvPr/>
-        </p:nvSpPr>
-        <p:spPr>
-          <a:xfrm>
-            <a:off x="7799831" y="5056632"/>
-            <a:ext cx="310896" cy="310896"/>
-          </a:xfrm>
-          <a:prstGeom prst="ellipse">
-            <a:avLst/>
-          </a:prstGeom>
-          <a:noFill/>
-          <a:ln w="25400">
-            <a:solidFill>
-              <a:srgbClr val="2F3FBF"/>
-            </a:solidFill>
-          </a:ln>
-          <a:effectLst/>
-        </p:spPr>
-        <p:style>
-          <a:lnRef idx="1">
-            <a:schemeClr val="accent1"/>
-          </a:lnRef>
-          <a:fillRef idx="3">
-            <a:schemeClr val="accent1"/>
-          </a:fillRef>
-          <a:effectRef idx="2">
-            <a:schemeClr val="accent1"/>
-          </a:effectRef>
-          <a:fontRef idx="minor">
-            <a:schemeClr val="lt1"/>
-          </a:fontRef>
-        </p:style>
-        <p:txBody>
-          <a:bodyPr rtlCol="0" anchor="ctr" lIns="54864" rIns="54864" tIns="18288" bIns="18288"/>
-          <a:lstStyle/>
-          <a:p>
-            <a:pPr algn="ctr"/>
-          </a:p>
-        </p:txBody>
-      </p:sp>
-      <p:sp>
-        <p:nvSpPr>
-          <p:cNvPr id="26" name="Oval 25"/>
-          <p:cNvSpPr/>
-          <p:nvPr/>
-        </p:nvSpPr>
-        <p:spPr>
-          <a:xfrm>
-            <a:off x="7865120" y="5121920"/>
-            <a:ext cx="180319" cy="180319"/>
-          </a:xfrm>
-          <a:prstGeom prst="ellipse">
-            <a:avLst/>
-          </a:prstGeom>
-          <a:noFill/>
-          <a:ln w="25400">
-            <a:solidFill>
-              <a:srgbClr val="2F3FBF"/>
-            </a:solidFill>
-          </a:ln>
-          <a:effectLst/>
-        </p:spPr>
-        <p:style>
-          <a:lnRef idx="1">
-            <a:schemeClr val="accent1"/>
-          </a:lnRef>
-          <a:fillRef idx="3">
-            <a:schemeClr val="accent1"/>
-          </a:fillRef>
-          <a:effectRef idx="2">
-            <a:schemeClr val="accent1"/>
-          </a:effectRef>
-          <a:fontRef idx="minor">
-            <a:schemeClr val="lt1"/>
-          </a:fontRef>
-        </p:style>
-        <p:txBody>
-          <a:bodyPr rtlCol="0" anchor="ctr" lIns="54864" rIns="54864" tIns="18288" bIns="18288"/>
-          <a:lstStyle/>
-          <a:p>
-            <a:pPr algn="ctr"/>
-          </a:p>
-        </p:txBody>
-      </p:sp>
-      <p:sp>
-        <p:nvSpPr>
-          <p:cNvPr id="27" name="Oval 26"/>
-          <p:cNvSpPr/>
-          <p:nvPr/>
-        </p:nvSpPr>
-        <p:spPr>
-          <a:xfrm>
-            <a:off x="7924190" y="5180990"/>
-            <a:ext cx="62179" cy="62179"/>
-          </a:xfrm>
-          <a:prstGeom prst="ellipse">
-            <a:avLst/>
-          </a:prstGeom>
-          <a:solidFill>
-            <a:srgbClr val="F2A900"/>
-          </a:solidFill>
-          <a:ln>
-            <a:noFill/>
-          </a:ln>
-          <a:effectLst/>
-        </p:spPr>
-        <p:style>
-          <a:lnRef idx="1">
-            <a:schemeClr val="accent1"/>
-          </a:lnRef>
-          <a:fillRef idx="3">
-            <a:schemeClr val="accent1"/>
-          </a:fillRef>
-          <a:effectRef idx="2">
-            <a:schemeClr val="accent1"/>
-          </a:effectRef>
-          <a:fontRef idx="minor">
-            <a:schemeClr val="lt1"/>
-          </a:fontRef>
-        </p:style>
-        <p:txBody>
-          <a:bodyPr rtlCol="0" anchor="ctr" lIns="54864" rIns="54864" tIns="18288" bIns="18288"/>
-          <a:lstStyle/>
-          <a:p>
-            <a:pPr algn="ctr"/>
-          </a:p>
-        </p:txBody>
-      </p:sp>
-      <p:sp>
-        <p:nvSpPr>
-          <p:cNvPr id="28" name="TextBox 27"/>
-          <p:cNvSpPr txBox="1"/>
-          <p:nvPr/>
-        </p:nvSpPr>
-        <p:spPr>
-          <a:xfrm>
-            <a:off x="8275320" y="5029200"/>
-            <a:ext cx="3566160" cy="365760"/>
-          </a:xfrm>
-          <a:prstGeom prst="rect">
-            <a:avLst/>
-          </a:prstGeom>
-          <a:noFill/>
-        </p:spPr>
-        <p:txBody>
-          <a:bodyPr wrap="square" lIns="0" rIns="0" tIns="0" bIns="0" anchor="t">
-            <a:spAutoFit/>
-          </a:bodyPr>
-          <a:lstStyle/>
-          <a:p>
-            <a:pPr algn="l"/>
-            <a:r>
-              <a:rPr sz="1600" b="0" i="0">
-                <a:solidFill>
-                  <a:srgbClr val="2F3FBF"/>
-                </a:solidFill>
-                <a:latin typeface="Arial Black"/>
-              </a:rPr>
-              <a:t>Источник</a:t>
-            </a:r>
-          </a:p>
-        </p:txBody>
-      </p:sp>
-      <p:sp>
-        <p:nvSpPr>
-          <p:cNvPr id="29" name="TextBox 28"/>
-          <p:cNvSpPr txBox="1"/>
-          <p:nvPr/>
-        </p:nvSpPr>
-        <p:spPr>
-          <a:xfrm>
-            <a:off x="8275320" y="5394960"/>
-            <a:ext cx="3474720" cy="502920"/>
-          </a:xfrm>
-          <a:prstGeom prst="rect">
-            <a:avLst/>
-          </a:prstGeom>
-          <a:noFill/>
-        </p:spPr>
-        <p:txBody>
-          <a:bodyPr wrap="square" lIns="0" rIns="0" tIns="0" bIns="0" anchor="t">
-            <a:spAutoFit/>
-          </a:bodyPr>
-          <a:lstStyle/>
-          <a:p>
-            <a:pPr algn="l"/>
-            <a:r>
-              <a:rPr sz="1100" b="0" i="0">
-                <a:solidFill>
-                  <a:srgbClr val="4A4F62"/>
-                </a:solidFill>
-                <a:latin typeface="Arial Black"/>
-              </a:rPr>
-              <a:t>ссылка на официальный сайт и дата проверки</a:t>
-            </a:r>
-          </a:p>
-        </p:txBody>
-      </p:sp>
-      <p:sp>
-        <p:nvSpPr>
-          <p:cNvPr id="30" name="Rectangle 29"/>
-          <p:cNvSpPr/>
-          <p:nvPr/>
-        </p:nvSpPr>
-        <p:spPr>
-          <a:xfrm>
-            <a:off x="8275320" y="5989320"/>
-            <a:ext cx="3108960" cy="411480"/>
-          </a:xfrm>
-          <a:prstGeom prst="rect">
-            <a:avLst/>
-          </a:prstGeom>
-          <a:solidFill>
-            <a:srgbClr val="2F3FBF"/>
-          </a:solidFill>
-          <a:ln>
-            <a:noFill/>
-          </a:ln>
-          <a:effectLst/>
-        </p:spPr>
-        <p:style>
-          <a:lnRef idx="1">
-            <a:schemeClr val="accent1"/>
-          </a:lnRef>
-          <a:fillRef idx="3">
-            <a:schemeClr val="accent1"/>
-          </a:fillRef>
-          <a:effectRef idx="2">
-            <a:schemeClr val="accent1"/>
-          </a:effectRef>
-          <a:fontRef idx="minor">
-            <a:schemeClr val="lt1"/>
-          </a:fontRef>
-        </p:style>
-        <p:txBody>
-          <a:bodyPr rtlCol="0" anchor="ctr" lIns="54864" rIns="54864" tIns="18288" bIns="18288" wrap="square"/>
-          <a:lstStyle/>
-          <a:p>
-            <a:pPr algn="ctr"/>
-            <a:r>
-              <a:rPr sz="1200">
-                <a:solidFill>
-                  <a:srgbClr val="FFFFFF"/>
-                </a:solidFill>
-                <a:latin typeface="Arial Black"/>
-              </a:rPr>
-              <a:t>Живое демо: #demo</a:t>
             </a:r>
           </a:p>
         </p:txBody>
@@ -11721,7 +13178,7 @@
         </p:nvSpPr>
         <p:spPr>
           <a:xfrm>
-            <a:off x="4572000" y="182880"/>
+            <a:off x="274319" y="182880"/>
             <a:ext cx="7863840" cy="7863840"/>
           </a:xfrm>
           <a:prstGeom prst="ellipse">
@@ -11765,7 +13222,7 @@
         </p:nvSpPr>
         <p:spPr>
           <a:xfrm>
-            <a:off x="548640" y="384048"/>
+            <a:off x="10408615" y="384048"/>
             <a:ext cx="384048" cy="384048"/>
           </a:xfrm>
           <a:prstGeom prst="ellipse">
@@ -11809,7 +13266,7 @@
         </p:nvSpPr>
         <p:spPr>
           <a:xfrm>
-            <a:off x="629290" y="464698"/>
+            <a:off x="10489265" y="464698"/>
             <a:ext cx="222747" cy="222747"/>
           </a:xfrm>
           <a:prstGeom prst="ellipse">
@@ -11853,7 +13310,7 @@
         </p:nvSpPr>
         <p:spPr>
           <a:xfrm>
-            <a:off x="702259" y="537667"/>
+            <a:off x="10562234" y="537667"/>
             <a:ext cx="76809" cy="76809"/>
           </a:xfrm>
           <a:prstGeom prst="ellipse">
@@ -11897,7 +13354,7 @@
         </p:nvSpPr>
         <p:spPr>
           <a:xfrm>
-            <a:off x="1024128" y="402336"/>
+            <a:off x="10884103" y="402336"/>
             <a:ext cx="1371600" cy="365760"/>
           </a:xfrm>
           <a:prstGeom prst="rect">
@@ -11933,7 +13390,7 @@
         <p:spPr>
           <a:xfrm>
             <a:off x="640080" y="868680"/>
-            <a:ext cx="4572000" cy="777240"/>
+            <a:ext cx="10881360" cy="777240"/>
           </a:xfrm>
           <a:prstGeom prst="rect">
             <a:avLst/>
@@ -11954,7 +13411,7 @@
                 </a:solidFill>
                 <a:latin typeface="Arial Black"/>
               </a:rPr>
-              <a:t>ПЛАН</a:t>
+              <a:t>ДЕМО</a:t>
             </a:r>
           </a:p>
         </p:txBody>
@@ -11968,7 +13425,7 @@
         <p:spPr>
           <a:xfrm>
             <a:off x="640080" y="1618488"/>
-            <a:ext cx="4572000" cy="822960"/>
+            <a:ext cx="10881360" cy="822960"/>
           </a:xfrm>
           <a:prstGeom prst="rect">
             <a:avLst/>
@@ -11989,14 +13446,14 @@
                 </a:solidFill>
                 <a:latin typeface="Arial Black"/>
               </a:rPr>
-              <a:t>НАЗАД ОТ ДЕДЛАЙНА</a:t>
+              <a:t>ВОЗМОЖНОСТИ ДЛЯ ТЕБЯ</a:t>
             </a:r>
           </a:p>
         </p:txBody>
       </p:sp>
       <p:pic>
         <p:nvPicPr>
-          <p:cNvPr id="9" name="Picture 8" descr="plan.png"/>
+          <p:cNvPr id="9" name="Picture 8" descr="matches.png"/>
           <p:cNvPicPr>
             <a:picLocks noChangeAspect="1"/>
           </p:cNvPicPr>
@@ -12011,8 +13468,8 @@
         </p:blipFill>
         <p:spPr>
           <a:xfrm>
-            <a:off x="4846320" y="1234440"/>
-            <a:ext cx="6720840" cy="4200525"/>
+            <a:off x="640080" y="2331720"/>
+            <a:ext cx="6675120" cy="4171950"/>
           </a:xfrm>
           <a:prstGeom prst="rect">
             <a:avLst/>
@@ -12032,7 +13489,7 @@
         </p:nvSpPr>
         <p:spPr>
           <a:xfrm>
-            <a:off x="640080" y="2542032"/>
+            <a:off x="7799831" y="2313432"/>
             <a:ext cx="310896" cy="310896"/>
           </a:xfrm>
           <a:prstGeom prst="ellipse">
@@ -12076,7 +13533,7 @@
         </p:nvSpPr>
         <p:spPr>
           <a:xfrm>
-            <a:off x="705368" y="2607320"/>
+            <a:off x="7865120" y="2378720"/>
             <a:ext cx="180319" cy="180319"/>
           </a:xfrm>
           <a:prstGeom prst="ellipse">
@@ -12120,7 +13577,7 @@
         </p:nvSpPr>
         <p:spPr>
           <a:xfrm>
-            <a:off x="764438" y="2666390"/>
+            <a:off x="7924190" y="2437790"/>
             <a:ext cx="62179" cy="62179"/>
           </a:xfrm>
           <a:prstGeom prst="ellipse">
@@ -12164,7 +13621,7 @@
         </p:nvSpPr>
         <p:spPr>
           <a:xfrm>
-            <a:off x="1143000" y="2514600"/>
+            <a:off x="8275320" y="2286000"/>
             <a:ext cx="3566160" cy="365760"/>
           </a:xfrm>
           <a:prstGeom prst="rect">
@@ -12180,13 +13637,13 @@
           <a:p>
             <a:pPr algn="l"/>
             <a:r>
-              <a:rPr sz="1500" b="0" i="0">
+              <a:rPr sz="1600" b="0" i="0">
                 <a:solidFill>
                   <a:srgbClr val="2F3FBF"/>
                 </a:solidFill>
                 <a:latin typeface="Arial Black"/>
               </a:rPr>
-              <a:t>Сделай сегодня</a:t>
+              <a:t>Статус и пробелы</a:t>
             </a:r>
           </a:p>
         </p:txBody>
@@ -12199,8 +13656,8 @@
         </p:nvSpPr>
         <p:spPr>
           <a:xfrm>
-            <a:off x="1143000" y="2862072"/>
-            <a:ext cx="3566160" cy="502920"/>
+            <a:off x="8275320" y="2651760"/>
+            <a:ext cx="3474720" cy="502920"/>
           </a:xfrm>
           <a:prstGeom prst="rect">
             <a:avLst/>
@@ -12221,7 +13678,7 @@
                 </a:solidFill>
                 <a:latin typeface="Arial Black"/>
               </a:rPr>
-              <a:t>один следующий шаг, а не список на полгода</a:t>
+              <a:t>подходишь / почти / позже — с объяснением по каждому условию</a:t>
             </a:r>
           </a:p>
         </p:txBody>
@@ -12234,7 +13691,7 @@
         </p:nvSpPr>
         <p:spPr>
           <a:xfrm>
-            <a:off x="640080" y="3474720"/>
+            <a:off x="7799831" y="3227832"/>
             <a:ext cx="310896" cy="310896"/>
           </a:xfrm>
           <a:prstGeom prst="ellipse">
@@ -12278,7 +13735,7 @@
         </p:nvSpPr>
         <p:spPr>
           <a:xfrm>
-            <a:off x="705368" y="3540008"/>
+            <a:off x="7865120" y="3293120"/>
             <a:ext cx="180319" cy="180319"/>
           </a:xfrm>
           <a:prstGeom prst="ellipse">
@@ -12322,7 +13779,7 @@
         </p:nvSpPr>
         <p:spPr>
           <a:xfrm>
-            <a:off x="764438" y="3599078"/>
+            <a:off x="7924190" y="3352190"/>
             <a:ext cx="62179" cy="62179"/>
           </a:xfrm>
           <a:prstGeom prst="ellipse">
@@ -12366,7 +13823,7 @@
         </p:nvSpPr>
         <p:spPr>
           <a:xfrm>
-            <a:off x="1143000" y="3447288"/>
+            <a:off x="8275320" y="3200400"/>
             <a:ext cx="3566160" cy="365760"/>
           </a:xfrm>
           <a:prstGeom prst="rect">
@@ -12382,13 +13839,13 @@
           <a:p>
             <a:pPr algn="l"/>
             <a:r>
-              <a:rPr sz="1500" b="0" i="0">
+              <a:rPr sz="1600" b="0" i="0">
                 <a:solidFill>
                   <a:srgbClr val="2F3FBF"/>
                 </a:solidFill>
                 <a:latin typeface="Arial Black"/>
               </a:rPr>
-              <a:t>Конфликт дедлайнов</a:t>
+              <a:t>Дедлайн и отсчёт</a:t>
             </a:r>
           </a:p>
         </p:txBody>
@@ -12401,8 +13858,8 @@
         </p:nvSpPr>
         <p:spPr>
           <a:xfrm>
-            <a:off x="1143000" y="3794760"/>
-            <a:ext cx="3566160" cy="502920"/>
+            <a:off x="8275320" y="3566160"/>
+            <a:ext cx="3474720" cy="502920"/>
           </a:xfrm>
           <a:prstGeom prst="rect">
             <a:avLst/>
@@ -12423,7 +13880,7 @@
                 </a:solidFill>
                 <a:latin typeface="Arial Black"/>
               </a:rPr>
-              <a:t>UWC 5 января и Yale 6 января — видно заранее</a:t>
+              <a:t>«через 12 дней»; красным — если меньше 3 недель</a:t>
             </a:r>
           </a:p>
         </p:txBody>
@@ -12436,7 +13893,7 @@
         </p:nvSpPr>
         <p:spPr>
           <a:xfrm>
-            <a:off x="640080" y="4407408"/>
+            <a:off x="7799831" y="4142232"/>
             <a:ext cx="310896" cy="310896"/>
           </a:xfrm>
           <a:prstGeom prst="ellipse">
@@ -12480,7 +13937,7 @@
         </p:nvSpPr>
         <p:spPr>
           <a:xfrm>
-            <a:off x="705368" y="4472696"/>
+            <a:off x="7865120" y="4207520"/>
             <a:ext cx="180319" cy="180319"/>
           </a:xfrm>
           <a:prstGeom prst="ellipse">
@@ -12524,7 +13981,7 @@
         </p:nvSpPr>
         <p:spPr>
           <a:xfrm>
-            <a:off x="764438" y="4531766"/>
+            <a:off x="7924190" y="4266590"/>
             <a:ext cx="62179" cy="62179"/>
           </a:xfrm>
           <a:prstGeom prst="ellipse">
@@ -12568,7 +14025,7 @@
         </p:nvSpPr>
         <p:spPr>
           <a:xfrm>
-            <a:off x="1143000" y="4379976"/>
+            <a:off x="8275320" y="4114800"/>
             <a:ext cx="3566160" cy="365760"/>
           </a:xfrm>
           <a:prstGeom prst="rect">
@@ -12584,13 +14041,13 @@
           <a:p>
             <a:pPr algn="l"/>
             <a:r>
-              <a:rPr sz="1500" b="0" i="0">
+              <a:rPr sz="1600" b="0" i="0">
                 <a:solidFill>
                   <a:srgbClr val="2F3FBF"/>
                 </a:solidFill>
                 <a:latin typeface="Arial Black"/>
               </a:rPr>
-              <a:t>Сжатый график</a:t>
+              <a:t>Честная дата</a:t>
             </a:r>
           </a:p>
         </p:txBody>
@@ -12603,8 +14060,8 @@
         </p:nvSpPr>
         <p:spPr>
           <a:xfrm>
-            <a:off x="1143000" y="4727448"/>
-            <a:ext cx="3566160" cy="502920"/>
+            <a:off x="8275320" y="4480560"/>
+            <a:ext cx="3474720" cy="502920"/>
           </a:xfrm>
           <a:prstGeom prst="rect">
             <a:avLst/>
@@ -12625,7 +14082,7 @@
                 </a:solidFill>
                 <a:latin typeface="Arial Black"/>
               </a:rPr>
-              <a:t>опоздал с началом — шаги сжимаются, есть более поздний раунд</a:t>
+              <a:t>«ориентировочно» и на чём основана оценка</a:t>
             </a:r>
           </a:p>
         </p:txBody>
@@ -12638,7 +14095,7 @@
         </p:nvSpPr>
         <p:spPr>
           <a:xfrm>
-            <a:off x="640080" y="5340096"/>
+            <a:off x="7799831" y="5056632"/>
             <a:ext cx="310896" cy="310896"/>
           </a:xfrm>
           <a:prstGeom prst="ellipse">
@@ -12682,7 +14139,7 @@
         </p:nvSpPr>
         <p:spPr>
           <a:xfrm>
-            <a:off x="705368" y="5405384"/>
+            <a:off x="7865120" y="5121920"/>
             <a:ext cx="180319" cy="180319"/>
           </a:xfrm>
           <a:prstGeom prst="ellipse">
@@ -12726,7 +14183,7 @@
         </p:nvSpPr>
         <p:spPr>
           <a:xfrm>
-            <a:off x="764438" y="5464454"/>
+            <a:off x="7924190" y="5180990"/>
             <a:ext cx="62179" cy="62179"/>
           </a:xfrm>
           <a:prstGeom prst="ellipse">
@@ -12770,7 +14227,7 @@
         </p:nvSpPr>
         <p:spPr>
           <a:xfrm>
-            <a:off x="1143000" y="5312664"/>
+            <a:off x="8275320" y="5029200"/>
             <a:ext cx="3566160" cy="365760"/>
           </a:xfrm>
           <a:prstGeom prst="rect">
@@ -12786,13 +14243,13 @@
           <a:p>
             <a:pPr algn="l"/>
             <a:r>
-              <a:rPr sz="1500" b="0" i="0">
+              <a:rPr sz="1600" b="0" i="0">
                 <a:solidFill>
                   <a:srgbClr val="2F3FBF"/>
                 </a:solidFill>
                 <a:latin typeface="Arial Black"/>
               </a:rPr>
-              <a:t>Календарь и печать</a:t>
+              <a:t>Источник</a:t>
             </a:r>
           </a:p>
         </p:txBody>
@@ -12805,8 +14262,8 @@
         </p:nvSpPr>
         <p:spPr>
           <a:xfrm>
-            <a:off x="1143000" y="5660136"/>
-            <a:ext cx="3566160" cy="502920"/>
+            <a:off x="8275320" y="5394960"/>
+            <a:ext cx="3474720" cy="502920"/>
           </a:xfrm>
           <a:prstGeom prst="rect">
             <a:avLst/>
@@ -12827,7 +14284,60 @@
                 </a:solidFill>
                 <a:latin typeface="Arial Black"/>
               </a:rPr>
-              <a:t>.ics с напоминаниями; версия для родителей</a:t>
+              <a:t>ссылка на официальный сайт и дата проверки</a:t>
+            </a:r>
+          </a:p>
+        </p:txBody>
+      </p:sp>
+      <p:sp>
+        <p:nvSpPr>
+          <p:cNvPr id="30" name="Rectangle 29"/>
+          <p:cNvSpPr/>
+          <p:nvPr/>
+        </p:nvSpPr>
+        <p:spPr>
+          <a:xfrm>
+            <a:off x="8275320" y="5989320"/>
+            <a:ext cx="3108960" cy="411480"/>
+          </a:xfrm>
+          <a:prstGeom prst="rect">
+            <a:avLst/>
+          </a:prstGeom>
+          <a:solidFill>
+            <a:srgbClr val="2F3FBF"/>
+          </a:solidFill>
+          <a:ln>
+            <a:noFill/>
+          </a:ln>
+          <a:effectLst/>
+        </p:spPr>
+        <p:style>
+          <a:lnRef idx="1">
+            <a:schemeClr val="accent1"/>
+          </a:lnRef>
+          <a:fillRef idx="3">
+            <a:schemeClr val="accent1"/>
+          </a:fillRef>
+          <a:effectRef idx="2">
+            <a:schemeClr val="accent1"/>
+          </a:effectRef>
+          <a:fontRef idx="minor">
+            <a:schemeClr val="lt1"/>
+          </a:fontRef>
+        </p:style>
+        <p:txBody>
+          <a:bodyPr rtlCol="0" anchor="ctr" lIns="54864" rIns="54864" tIns="18288" bIns="18288" wrap="square"/>
+          <a:lstStyle/>
+          <a:p>
+            <a:pPr algn="ctr"/>
+            <a:r>
+              <a:rPr sz="1200">
+                <a:solidFill>
+                  <a:srgbClr val="FFFFFF"/>
+                </a:solidFill>
+                <a:latin typeface="Arial Black"/>
+              </a:rPr>
+              <a:t>Живое демо: #demo</a:t>
             </a:r>
           </a:p>
         </p:txBody>
@@ -12841,6 +14351,1151 @@
 </file>
 
 <file path=ppt/slides/slide8.xml><?xml version="1.0" encoding="utf-8"?>
+<p:sld xmlns:a="http://schemas.openxmlformats.org/drawingml/2006/main" xmlns:p="http://schemas.openxmlformats.org/presentationml/2006/main" xmlns:r="http://schemas.openxmlformats.org/officeDocument/2006/relationships">
+  <p:cSld>
+    <p:bg>
+      <p:bgPr>
+        <a:solidFill>
+          <a:srgbClr val="FFFFFF"/>
+        </a:solidFill>
+        <a:effectLst/>
+      </p:bgPr>
+    </p:bg>
+    <p:spTree>
+      <p:nvGrpSpPr>
+        <p:cNvPr id="1" name=""/>
+        <p:cNvGrpSpPr/>
+        <p:nvPr/>
+      </p:nvGrpSpPr>
+      <p:grpSpPr/>
+      <p:sp>
+        <p:nvSpPr>
+          <p:cNvPr id="2" name="Oval 1"/>
+          <p:cNvSpPr/>
+          <p:nvPr/>
+        </p:nvSpPr>
+        <p:spPr>
+          <a:xfrm>
+            <a:off x="4572000" y="182880"/>
+            <a:ext cx="7863840" cy="7863840"/>
+          </a:xfrm>
+          <a:prstGeom prst="ellipse">
+            <a:avLst/>
+          </a:prstGeom>
+          <a:solidFill>
+            <a:srgbClr val="ECEEFC"/>
+          </a:solidFill>
+          <a:ln>
+            <a:noFill/>
+          </a:ln>
+          <a:effectLst/>
+        </p:spPr>
+        <p:style>
+          <a:lnRef idx="1">
+            <a:schemeClr val="accent1"/>
+          </a:lnRef>
+          <a:fillRef idx="3">
+            <a:schemeClr val="accent1"/>
+          </a:fillRef>
+          <a:effectRef idx="2">
+            <a:schemeClr val="accent1"/>
+          </a:effectRef>
+          <a:fontRef idx="minor">
+            <a:schemeClr val="lt1"/>
+          </a:fontRef>
+        </p:style>
+        <p:txBody>
+          <a:bodyPr rtlCol="0" anchor="ctr" lIns="54864" rIns="54864" tIns="18288" bIns="18288"/>
+          <a:lstStyle/>
+          <a:p>
+            <a:pPr algn="ctr"/>
+          </a:p>
+        </p:txBody>
+      </p:sp>
+      <p:sp>
+        <p:nvSpPr>
+          <p:cNvPr id="3" name="Oval 2"/>
+          <p:cNvSpPr/>
+          <p:nvPr/>
+        </p:nvSpPr>
+        <p:spPr>
+          <a:xfrm>
+            <a:off x="548640" y="384048"/>
+            <a:ext cx="384048" cy="384048"/>
+          </a:xfrm>
+          <a:prstGeom prst="ellipse">
+            <a:avLst/>
+          </a:prstGeom>
+          <a:noFill/>
+          <a:ln w="25400">
+            <a:solidFill>
+              <a:srgbClr val="2F3FBF"/>
+            </a:solidFill>
+          </a:ln>
+          <a:effectLst/>
+        </p:spPr>
+        <p:style>
+          <a:lnRef idx="1">
+            <a:schemeClr val="accent1"/>
+          </a:lnRef>
+          <a:fillRef idx="3">
+            <a:schemeClr val="accent1"/>
+          </a:fillRef>
+          <a:effectRef idx="2">
+            <a:schemeClr val="accent1"/>
+          </a:effectRef>
+          <a:fontRef idx="minor">
+            <a:schemeClr val="lt1"/>
+          </a:fontRef>
+        </p:style>
+        <p:txBody>
+          <a:bodyPr rtlCol="0" anchor="ctr" lIns="54864" rIns="54864" tIns="18288" bIns="18288"/>
+          <a:lstStyle/>
+          <a:p>
+            <a:pPr algn="ctr"/>
+          </a:p>
+        </p:txBody>
+      </p:sp>
+      <p:sp>
+        <p:nvSpPr>
+          <p:cNvPr id="4" name="Oval 3"/>
+          <p:cNvSpPr/>
+          <p:nvPr/>
+        </p:nvSpPr>
+        <p:spPr>
+          <a:xfrm>
+            <a:off x="629290" y="464698"/>
+            <a:ext cx="222747" cy="222747"/>
+          </a:xfrm>
+          <a:prstGeom prst="ellipse">
+            <a:avLst/>
+          </a:prstGeom>
+          <a:noFill/>
+          <a:ln w="25400">
+            <a:solidFill>
+              <a:srgbClr val="2F3FBF"/>
+            </a:solidFill>
+          </a:ln>
+          <a:effectLst/>
+        </p:spPr>
+        <p:style>
+          <a:lnRef idx="1">
+            <a:schemeClr val="accent1"/>
+          </a:lnRef>
+          <a:fillRef idx="3">
+            <a:schemeClr val="accent1"/>
+          </a:fillRef>
+          <a:effectRef idx="2">
+            <a:schemeClr val="accent1"/>
+          </a:effectRef>
+          <a:fontRef idx="minor">
+            <a:schemeClr val="lt1"/>
+          </a:fontRef>
+        </p:style>
+        <p:txBody>
+          <a:bodyPr rtlCol="0" anchor="ctr" lIns="54864" rIns="54864" tIns="18288" bIns="18288"/>
+          <a:lstStyle/>
+          <a:p>
+            <a:pPr algn="ctr"/>
+          </a:p>
+        </p:txBody>
+      </p:sp>
+      <p:sp>
+        <p:nvSpPr>
+          <p:cNvPr id="5" name="Oval 4"/>
+          <p:cNvSpPr/>
+          <p:nvPr/>
+        </p:nvSpPr>
+        <p:spPr>
+          <a:xfrm>
+            <a:off x="702259" y="537667"/>
+            <a:ext cx="76809" cy="76809"/>
+          </a:xfrm>
+          <a:prstGeom prst="ellipse">
+            <a:avLst/>
+          </a:prstGeom>
+          <a:solidFill>
+            <a:srgbClr val="F2A900"/>
+          </a:solidFill>
+          <a:ln>
+            <a:noFill/>
+          </a:ln>
+          <a:effectLst/>
+        </p:spPr>
+        <p:style>
+          <a:lnRef idx="1">
+            <a:schemeClr val="accent1"/>
+          </a:lnRef>
+          <a:fillRef idx="3">
+            <a:schemeClr val="accent1"/>
+          </a:fillRef>
+          <a:effectRef idx="2">
+            <a:schemeClr val="accent1"/>
+          </a:effectRef>
+          <a:fontRef idx="minor">
+            <a:schemeClr val="lt1"/>
+          </a:fontRef>
+        </p:style>
+        <p:txBody>
+          <a:bodyPr rtlCol="0" anchor="ctr" lIns="54864" rIns="54864" tIns="18288" bIns="18288"/>
+          <a:lstStyle/>
+          <a:p>
+            <a:pPr algn="ctr"/>
+          </a:p>
+        </p:txBody>
+      </p:sp>
+      <p:sp>
+        <p:nvSpPr>
+          <p:cNvPr id="6" name="TextBox 5"/>
+          <p:cNvSpPr txBox="1"/>
+          <p:nvPr/>
+        </p:nvSpPr>
+        <p:spPr>
+          <a:xfrm>
+            <a:off x="1024128" y="402336"/>
+            <a:ext cx="1371600" cy="365760"/>
+          </a:xfrm>
+          <a:prstGeom prst="rect">
+            <a:avLst/>
+          </a:prstGeom>
+          <a:noFill/>
+        </p:spPr>
+        <p:txBody>
+          <a:bodyPr wrap="square" lIns="0" rIns="0" tIns="0" bIns="0" anchor="ctr">
+            <a:spAutoFit/>
+          </a:bodyPr>
+          <a:lstStyle/>
+          <a:p>
+            <a:pPr algn="l"/>
+            <a:r>
+              <a:rPr sz="1400" b="0" i="0">
+                <a:solidFill>
+                  <a:srgbClr val="2F3FBF"/>
+                </a:solidFill>
+                <a:latin typeface="Arial Black"/>
+              </a:rPr>
+              <a:t>Maqsat</a:t>
+            </a:r>
+          </a:p>
+        </p:txBody>
+      </p:sp>
+      <p:sp>
+        <p:nvSpPr>
+          <p:cNvPr id="7" name="TextBox 6"/>
+          <p:cNvSpPr txBox="1"/>
+          <p:nvPr/>
+        </p:nvSpPr>
+        <p:spPr>
+          <a:xfrm>
+            <a:off x="640080" y="868680"/>
+            <a:ext cx="4572000" cy="777240"/>
+          </a:xfrm>
+          <a:prstGeom prst="rect">
+            <a:avLst/>
+          </a:prstGeom>
+          <a:noFill/>
+        </p:spPr>
+        <p:txBody>
+          <a:bodyPr wrap="square" lIns="0" rIns="0" tIns="0" bIns="0" anchor="t">
+            <a:spAutoFit/>
+          </a:bodyPr>
+          <a:lstStyle/>
+          <a:p>
+            <a:pPr algn="l"/>
+            <a:r>
+              <a:rPr sz="4400" b="0" i="0">
+                <a:solidFill>
+                  <a:srgbClr val="2F3FBF"/>
+                </a:solidFill>
+                <a:latin typeface="Arial Black"/>
+              </a:rPr>
+              <a:t>ПЛАН</a:t>
+            </a:r>
+          </a:p>
+        </p:txBody>
+      </p:sp>
+      <p:sp>
+        <p:nvSpPr>
+          <p:cNvPr id="8" name="TextBox 7"/>
+          <p:cNvSpPr txBox="1"/>
+          <p:nvPr/>
+        </p:nvSpPr>
+        <p:spPr>
+          <a:xfrm>
+            <a:off x="640080" y="1618488"/>
+            <a:ext cx="4572000" cy="822960"/>
+          </a:xfrm>
+          <a:prstGeom prst="rect">
+            <a:avLst/>
+          </a:prstGeom>
+          <a:noFill/>
+        </p:spPr>
+        <p:txBody>
+          <a:bodyPr wrap="square" lIns="0" rIns="0" tIns="0" bIns="0" anchor="t">
+            <a:spAutoFit/>
+          </a:bodyPr>
+          <a:lstStyle/>
+          <a:p>
+            <a:pPr algn="l"/>
+            <a:r>
+              <a:rPr sz="2200" b="0" i="0">
+                <a:solidFill>
+                  <a:srgbClr val="111424"/>
+                </a:solidFill>
+                <a:latin typeface="Arial Black"/>
+              </a:rPr>
+              <a:t>НАЗАД ОТ ДЕДЛАЙНА</a:t>
+            </a:r>
+          </a:p>
+        </p:txBody>
+      </p:sp>
+      <p:pic>
+        <p:nvPicPr>
+          <p:cNvPr id="9" name="Picture 8" descr="plan.png"/>
+          <p:cNvPicPr>
+            <a:picLocks noChangeAspect="1"/>
+          </p:cNvPicPr>
+          <p:nvPr/>
+        </p:nvPicPr>
+        <p:blipFill>
+          <a:blip r:embed="rId2"/>
+          <a:srcRect b="10000"/>
+          <a:stretch>
+            <a:fillRect/>
+          </a:stretch>
+        </p:blipFill>
+        <p:spPr>
+          <a:xfrm>
+            <a:off x="4846320" y="1234440"/>
+            <a:ext cx="6720840" cy="4200525"/>
+          </a:xfrm>
+          <a:prstGeom prst="rect">
+            <a:avLst/>
+          </a:prstGeom>
+          <a:ln w="12700">
+            <a:solidFill>
+              <a:srgbClr val="DADEEC"/>
+            </a:solidFill>
+          </a:ln>
+        </p:spPr>
+      </p:pic>
+      <p:sp>
+        <p:nvSpPr>
+          <p:cNvPr id="10" name="Oval 9"/>
+          <p:cNvSpPr/>
+          <p:nvPr/>
+        </p:nvSpPr>
+        <p:spPr>
+          <a:xfrm>
+            <a:off x="640080" y="2542032"/>
+            <a:ext cx="310896" cy="310896"/>
+          </a:xfrm>
+          <a:prstGeom prst="ellipse">
+            <a:avLst/>
+          </a:prstGeom>
+          <a:noFill/>
+          <a:ln w="25400">
+            <a:solidFill>
+              <a:srgbClr val="2F3FBF"/>
+            </a:solidFill>
+          </a:ln>
+          <a:effectLst/>
+        </p:spPr>
+        <p:style>
+          <a:lnRef idx="1">
+            <a:schemeClr val="accent1"/>
+          </a:lnRef>
+          <a:fillRef idx="3">
+            <a:schemeClr val="accent1"/>
+          </a:fillRef>
+          <a:effectRef idx="2">
+            <a:schemeClr val="accent1"/>
+          </a:effectRef>
+          <a:fontRef idx="minor">
+            <a:schemeClr val="lt1"/>
+          </a:fontRef>
+        </p:style>
+        <p:txBody>
+          <a:bodyPr rtlCol="0" anchor="ctr" lIns="54864" rIns="54864" tIns="18288" bIns="18288"/>
+          <a:lstStyle/>
+          <a:p>
+            <a:pPr algn="ctr"/>
+          </a:p>
+        </p:txBody>
+      </p:sp>
+      <p:sp>
+        <p:nvSpPr>
+          <p:cNvPr id="11" name="Oval 10"/>
+          <p:cNvSpPr/>
+          <p:nvPr/>
+        </p:nvSpPr>
+        <p:spPr>
+          <a:xfrm>
+            <a:off x="705368" y="2607320"/>
+            <a:ext cx="180319" cy="180319"/>
+          </a:xfrm>
+          <a:prstGeom prst="ellipse">
+            <a:avLst/>
+          </a:prstGeom>
+          <a:noFill/>
+          <a:ln w="25400">
+            <a:solidFill>
+              <a:srgbClr val="2F3FBF"/>
+            </a:solidFill>
+          </a:ln>
+          <a:effectLst/>
+        </p:spPr>
+        <p:style>
+          <a:lnRef idx="1">
+            <a:schemeClr val="accent1"/>
+          </a:lnRef>
+          <a:fillRef idx="3">
+            <a:schemeClr val="accent1"/>
+          </a:fillRef>
+          <a:effectRef idx="2">
+            <a:schemeClr val="accent1"/>
+          </a:effectRef>
+          <a:fontRef idx="minor">
+            <a:schemeClr val="lt1"/>
+          </a:fontRef>
+        </p:style>
+        <p:txBody>
+          <a:bodyPr rtlCol="0" anchor="ctr" lIns="54864" rIns="54864" tIns="18288" bIns="18288"/>
+          <a:lstStyle/>
+          <a:p>
+            <a:pPr algn="ctr"/>
+          </a:p>
+        </p:txBody>
+      </p:sp>
+      <p:sp>
+        <p:nvSpPr>
+          <p:cNvPr id="12" name="Oval 11"/>
+          <p:cNvSpPr/>
+          <p:nvPr/>
+        </p:nvSpPr>
+        <p:spPr>
+          <a:xfrm>
+            <a:off x="764438" y="2666390"/>
+            <a:ext cx="62179" cy="62179"/>
+          </a:xfrm>
+          <a:prstGeom prst="ellipse">
+            <a:avLst/>
+          </a:prstGeom>
+          <a:solidFill>
+            <a:srgbClr val="F2A900"/>
+          </a:solidFill>
+          <a:ln>
+            <a:noFill/>
+          </a:ln>
+          <a:effectLst/>
+        </p:spPr>
+        <p:style>
+          <a:lnRef idx="1">
+            <a:schemeClr val="accent1"/>
+          </a:lnRef>
+          <a:fillRef idx="3">
+            <a:schemeClr val="accent1"/>
+          </a:fillRef>
+          <a:effectRef idx="2">
+            <a:schemeClr val="accent1"/>
+          </a:effectRef>
+          <a:fontRef idx="minor">
+            <a:schemeClr val="lt1"/>
+          </a:fontRef>
+        </p:style>
+        <p:txBody>
+          <a:bodyPr rtlCol="0" anchor="ctr" lIns="54864" rIns="54864" tIns="18288" bIns="18288"/>
+          <a:lstStyle/>
+          <a:p>
+            <a:pPr algn="ctr"/>
+          </a:p>
+        </p:txBody>
+      </p:sp>
+      <p:sp>
+        <p:nvSpPr>
+          <p:cNvPr id="13" name="TextBox 12"/>
+          <p:cNvSpPr txBox="1"/>
+          <p:nvPr/>
+        </p:nvSpPr>
+        <p:spPr>
+          <a:xfrm>
+            <a:off x="1143000" y="2514600"/>
+            <a:ext cx="3566160" cy="365760"/>
+          </a:xfrm>
+          <a:prstGeom prst="rect">
+            <a:avLst/>
+          </a:prstGeom>
+          <a:noFill/>
+        </p:spPr>
+        <p:txBody>
+          <a:bodyPr wrap="square" lIns="0" rIns="0" tIns="0" bIns="0" anchor="t">
+            <a:spAutoFit/>
+          </a:bodyPr>
+          <a:lstStyle/>
+          <a:p>
+            <a:pPr algn="l"/>
+            <a:r>
+              <a:rPr sz="1500" b="0" i="0">
+                <a:solidFill>
+                  <a:srgbClr val="2F3FBF"/>
+                </a:solidFill>
+                <a:latin typeface="Arial Black"/>
+              </a:rPr>
+              <a:t>Сделай сегодня</a:t>
+            </a:r>
+          </a:p>
+        </p:txBody>
+      </p:sp>
+      <p:sp>
+        <p:nvSpPr>
+          <p:cNvPr id="14" name="TextBox 13"/>
+          <p:cNvSpPr txBox="1"/>
+          <p:nvPr/>
+        </p:nvSpPr>
+        <p:spPr>
+          <a:xfrm>
+            <a:off x="1143000" y="2862072"/>
+            <a:ext cx="3566160" cy="502920"/>
+          </a:xfrm>
+          <a:prstGeom prst="rect">
+            <a:avLst/>
+          </a:prstGeom>
+          <a:noFill/>
+        </p:spPr>
+        <p:txBody>
+          <a:bodyPr wrap="square" lIns="0" rIns="0" tIns="0" bIns="0" anchor="t">
+            <a:spAutoFit/>
+          </a:bodyPr>
+          <a:lstStyle/>
+          <a:p>
+            <a:pPr algn="l"/>
+            <a:r>
+              <a:rPr sz="1100" b="0" i="0">
+                <a:solidFill>
+                  <a:srgbClr val="4A4F62"/>
+                </a:solidFill>
+                <a:latin typeface="Arial Black"/>
+              </a:rPr>
+              <a:t>один следующий шаг, а не список на полгода</a:t>
+            </a:r>
+          </a:p>
+        </p:txBody>
+      </p:sp>
+      <p:sp>
+        <p:nvSpPr>
+          <p:cNvPr id="15" name="Oval 14"/>
+          <p:cNvSpPr/>
+          <p:nvPr/>
+        </p:nvSpPr>
+        <p:spPr>
+          <a:xfrm>
+            <a:off x="640080" y="3474720"/>
+            <a:ext cx="310896" cy="310896"/>
+          </a:xfrm>
+          <a:prstGeom prst="ellipse">
+            <a:avLst/>
+          </a:prstGeom>
+          <a:noFill/>
+          <a:ln w="25400">
+            <a:solidFill>
+              <a:srgbClr val="2F3FBF"/>
+            </a:solidFill>
+          </a:ln>
+          <a:effectLst/>
+        </p:spPr>
+        <p:style>
+          <a:lnRef idx="1">
+            <a:schemeClr val="accent1"/>
+          </a:lnRef>
+          <a:fillRef idx="3">
+            <a:schemeClr val="accent1"/>
+          </a:fillRef>
+          <a:effectRef idx="2">
+            <a:schemeClr val="accent1"/>
+          </a:effectRef>
+          <a:fontRef idx="minor">
+            <a:schemeClr val="lt1"/>
+          </a:fontRef>
+        </p:style>
+        <p:txBody>
+          <a:bodyPr rtlCol="0" anchor="ctr" lIns="54864" rIns="54864" tIns="18288" bIns="18288"/>
+          <a:lstStyle/>
+          <a:p>
+            <a:pPr algn="ctr"/>
+          </a:p>
+        </p:txBody>
+      </p:sp>
+      <p:sp>
+        <p:nvSpPr>
+          <p:cNvPr id="16" name="Oval 15"/>
+          <p:cNvSpPr/>
+          <p:nvPr/>
+        </p:nvSpPr>
+        <p:spPr>
+          <a:xfrm>
+            <a:off x="705368" y="3540008"/>
+            <a:ext cx="180319" cy="180319"/>
+          </a:xfrm>
+          <a:prstGeom prst="ellipse">
+            <a:avLst/>
+          </a:prstGeom>
+          <a:noFill/>
+          <a:ln w="25400">
+            <a:solidFill>
+              <a:srgbClr val="2F3FBF"/>
+            </a:solidFill>
+          </a:ln>
+          <a:effectLst/>
+        </p:spPr>
+        <p:style>
+          <a:lnRef idx="1">
+            <a:schemeClr val="accent1"/>
+          </a:lnRef>
+          <a:fillRef idx="3">
+            <a:schemeClr val="accent1"/>
+          </a:fillRef>
+          <a:effectRef idx="2">
+            <a:schemeClr val="accent1"/>
+          </a:effectRef>
+          <a:fontRef idx="minor">
+            <a:schemeClr val="lt1"/>
+          </a:fontRef>
+        </p:style>
+        <p:txBody>
+          <a:bodyPr rtlCol="0" anchor="ctr" lIns="54864" rIns="54864" tIns="18288" bIns="18288"/>
+          <a:lstStyle/>
+          <a:p>
+            <a:pPr algn="ctr"/>
+          </a:p>
+        </p:txBody>
+      </p:sp>
+      <p:sp>
+        <p:nvSpPr>
+          <p:cNvPr id="17" name="Oval 16"/>
+          <p:cNvSpPr/>
+          <p:nvPr/>
+        </p:nvSpPr>
+        <p:spPr>
+          <a:xfrm>
+            <a:off x="764438" y="3599078"/>
+            <a:ext cx="62179" cy="62179"/>
+          </a:xfrm>
+          <a:prstGeom prst="ellipse">
+            <a:avLst/>
+          </a:prstGeom>
+          <a:solidFill>
+            <a:srgbClr val="F2A900"/>
+          </a:solidFill>
+          <a:ln>
+            <a:noFill/>
+          </a:ln>
+          <a:effectLst/>
+        </p:spPr>
+        <p:style>
+          <a:lnRef idx="1">
+            <a:schemeClr val="accent1"/>
+          </a:lnRef>
+          <a:fillRef idx="3">
+            <a:schemeClr val="accent1"/>
+          </a:fillRef>
+          <a:effectRef idx="2">
+            <a:schemeClr val="accent1"/>
+          </a:effectRef>
+          <a:fontRef idx="minor">
+            <a:schemeClr val="lt1"/>
+          </a:fontRef>
+        </p:style>
+        <p:txBody>
+          <a:bodyPr rtlCol="0" anchor="ctr" lIns="54864" rIns="54864" tIns="18288" bIns="18288"/>
+          <a:lstStyle/>
+          <a:p>
+            <a:pPr algn="ctr"/>
+          </a:p>
+        </p:txBody>
+      </p:sp>
+      <p:sp>
+        <p:nvSpPr>
+          <p:cNvPr id="18" name="TextBox 17"/>
+          <p:cNvSpPr txBox="1"/>
+          <p:nvPr/>
+        </p:nvSpPr>
+        <p:spPr>
+          <a:xfrm>
+            <a:off x="1143000" y="3447288"/>
+            <a:ext cx="3566160" cy="365760"/>
+          </a:xfrm>
+          <a:prstGeom prst="rect">
+            <a:avLst/>
+          </a:prstGeom>
+          <a:noFill/>
+        </p:spPr>
+        <p:txBody>
+          <a:bodyPr wrap="square" lIns="0" rIns="0" tIns="0" bIns="0" anchor="t">
+            <a:spAutoFit/>
+          </a:bodyPr>
+          <a:lstStyle/>
+          <a:p>
+            <a:pPr algn="l"/>
+            <a:r>
+              <a:rPr sz="1500" b="0" i="0">
+                <a:solidFill>
+                  <a:srgbClr val="2F3FBF"/>
+                </a:solidFill>
+                <a:latin typeface="Arial Black"/>
+              </a:rPr>
+              <a:t>Конфликт дедлайнов</a:t>
+            </a:r>
+          </a:p>
+        </p:txBody>
+      </p:sp>
+      <p:sp>
+        <p:nvSpPr>
+          <p:cNvPr id="19" name="TextBox 18"/>
+          <p:cNvSpPr txBox="1"/>
+          <p:nvPr/>
+        </p:nvSpPr>
+        <p:spPr>
+          <a:xfrm>
+            <a:off x="1143000" y="3794760"/>
+            <a:ext cx="3566160" cy="502920"/>
+          </a:xfrm>
+          <a:prstGeom prst="rect">
+            <a:avLst/>
+          </a:prstGeom>
+          <a:noFill/>
+        </p:spPr>
+        <p:txBody>
+          <a:bodyPr wrap="square" lIns="0" rIns="0" tIns="0" bIns="0" anchor="t">
+            <a:spAutoFit/>
+          </a:bodyPr>
+          <a:lstStyle/>
+          <a:p>
+            <a:pPr algn="l"/>
+            <a:r>
+              <a:rPr sz="1100" b="0" i="0">
+                <a:solidFill>
+                  <a:srgbClr val="4A4F62"/>
+                </a:solidFill>
+                <a:latin typeface="Arial Black"/>
+              </a:rPr>
+              <a:t>UWC 5 января и Yale 6 января — видно заранее</a:t>
+            </a:r>
+          </a:p>
+        </p:txBody>
+      </p:sp>
+      <p:sp>
+        <p:nvSpPr>
+          <p:cNvPr id="20" name="Oval 19"/>
+          <p:cNvSpPr/>
+          <p:nvPr/>
+        </p:nvSpPr>
+        <p:spPr>
+          <a:xfrm>
+            <a:off x="640080" y="4407408"/>
+            <a:ext cx="310896" cy="310896"/>
+          </a:xfrm>
+          <a:prstGeom prst="ellipse">
+            <a:avLst/>
+          </a:prstGeom>
+          <a:noFill/>
+          <a:ln w="25400">
+            <a:solidFill>
+              <a:srgbClr val="2F3FBF"/>
+            </a:solidFill>
+          </a:ln>
+          <a:effectLst/>
+        </p:spPr>
+        <p:style>
+          <a:lnRef idx="1">
+            <a:schemeClr val="accent1"/>
+          </a:lnRef>
+          <a:fillRef idx="3">
+            <a:schemeClr val="accent1"/>
+          </a:fillRef>
+          <a:effectRef idx="2">
+            <a:schemeClr val="accent1"/>
+          </a:effectRef>
+          <a:fontRef idx="minor">
+            <a:schemeClr val="lt1"/>
+          </a:fontRef>
+        </p:style>
+        <p:txBody>
+          <a:bodyPr rtlCol="0" anchor="ctr" lIns="54864" rIns="54864" tIns="18288" bIns="18288"/>
+          <a:lstStyle/>
+          <a:p>
+            <a:pPr algn="ctr"/>
+          </a:p>
+        </p:txBody>
+      </p:sp>
+      <p:sp>
+        <p:nvSpPr>
+          <p:cNvPr id="21" name="Oval 20"/>
+          <p:cNvSpPr/>
+          <p:nvPr/>
+        </p:nvSpPr>
+        <p:spPr>
+          <a:xfrm>
+            <a:off x="705368" y="4472696"/>
+            <a:ext cx="180319" cy="180319"/>
+          </a:xfrm>
+          <a:prstGeom prst="ellipse">
+            <a:avLst/>
+          </a:prstGeom>
+          <a:noFill/>
+          <a:ln w="25400">
+            <a:solidFill>
+              <a:srgbClr val="2F3FBF"/>
+            </a:solidFill>
+          </a:ln>
+          <a:effectLst/>
+        </p:spPr>
+        <p:style>
+          <a:lnRef idx="1">
+            <a:schemeClr val="accent1"/>
+          </a:lnRef>
+          <a:fillRef idx="3">
+            <a:schemeClr val="accent1"/>
+          </a:fillRef>
+          <a:effectRef idx="2">
+            <a:schemeClr val="accent1"/>
+          </a:effectRef>
+          <a:fontRef idx="minor">
+            <a:schemeClr val="lt1"/>
+          </a:fontRef>
+        </p:style>
+        <p:txBody>
+          <a:bodyPr rtlCol="0" anchor="ctr" lIns="54864" rIns="54864" tIns="18288" bIns="18288"/>
+          <a:lstStyle/>
+          <a:p>
+            <a:pPr algn="ctr"/>
+          </a:p>
+        </p:txBody>
+      </p:sp>
+      <p:sp>
+        <p:nvSpPr>
+          <p:cNvPr id="22" name="Oval 21"/>
+          <p:cNvSpPr/>
+          <p:nvPr/>
+        </p:nvSpPr>
+        <p:spPr>
+          <a:xfrm>
+            <a:off x="764438" y="4531766"/>
+            <a:ext cx="62179" cy="62179"/>
+          </a:xfrm>
+          <a:prstGeom prst="ellipse">
+            <a:avLst/>
+          </a:prstGeom>
+          <a:solidFill>
+            <a:srgbClr val="F2A900"/>
+          </a:solidFill>
+          <a:ln>
+            <a:noFill/>
+          </a:ln>
+          <a:effectLst/>
+        </p:spPr>
+        <p:style>
+          <a:lnRef idx="1">
+            <a:schemeClr val="accent1"/>
+          </a:lnRef>
+          <a:fillRef idx="3">
+            <a:schemeClr val="accent1"/>
+          </a:fillRef>
+          <a:effectRef idx="2">
+            <a:schemeClr val="accent1"/>
+          </a:effectRef>
+          <a:fontRef idx="minor">
+            <a:schemeClr val="lt1"/>
+          </a:fontRef>
+        </p:style>
+        <p:txBody>
+          <a:bodyPr rtlCol="0" anchor="ctr" lIns="54864" rIns="54864" tIns="18288" bIns="18288"/>
+          <a:lstStyle/>
+          <a:p>
+            <a:pPr algn="ctr"/>
+          </a:p>
+        </p:txBody>
+      </p:sp>
+      <p:sp>
+        <p:nvSpPr>
+          <p:cNvPr id="23" name="TextBox 22"/>
+          <p:cNvSpPr txBox="1"/>
+          <p:nvPr/>
+        </p:nvSpPr>
+        <p:spPr>
+          <a:xfrm>
+            <a:off x="1143000" y="4379976"/>
+            <a:ext cx="3566160" cy="365760"/>
+          </a:xfrm>
+          <a:prstGeom prst="rect">
+            <a:avLst/>
+          </a:prstGeom>
+          <a:noFill/>
+        </p:spPr>
+        <p:txBody>
+          <a:bodyPr wrap="square" lIns="0" rIns="0" tIns="0" bIns="0" anchor="t">
+            <a:spAutoFit/>
+          </a:bodyPr>
+          <a:lstStyle/>
+          <a:p>
+            <a:pPr algn="l"/>
+            <a:r>
+              <a:rPr sz="1500" b="0" i="0">
+                <a:solidFill>
+                  <a:srgbClr val="2F3FBF"/>
+                </a:solidFill>
+                <a:latin typeface="Arial Black"/>
+              </a:rPr>
+              <a:t>Сжатый график</a:t>
+            </a:r>
+          </a:p>
+        </p:txBody>
+      </p:sp>
+      <p:sp>
+        <p:nvSpPr>
+          <p:cNvPr id="24" name="TextBox 23"/>
+          <p:cNvSpPr txBox="1"/>
+          <p:nvPr/>
+        </p:nvSpPr>
+        <p:spPr>
+          <a:xfrm>
+            <a:off x="1143000" y="4727448"/>
+            <a:ext cx="3566160" cy="502920"/>
+          </a:xfrm>
+          <a:prstGeom prst="rect">
+            <a:avLst/>
+          </a:prstGeom>
+          <a:noFill/>
+        </p:spPr>
+        <p:txBody>
+          <a:bodyPr wrap="square" lIns="0" rIns="0" tIns="0" bIns="0" anchor="t">
+            <a:spAutoFit/>
+          </a:bodyPr>
+          <a:lstStyle/>
+          <a:p>
+            <a:pPr algn="l"/>
+            <a:r>
+              <a:rPr sz="1100" b="0" i="0">
+                <a:solidFill>
+                  <a:srgbClr val="4A4F62"/>
+                </a:solidFill>
+                <a:latin typeface="Arial Black"/>
+              </a:rPr>
+              <a:t>опоздал с началом — шаги сжимаются, есть более поздний раунд</a:t>
+            </a:r>
+          </a:p>
+        </p:txBody>
+      </p:sp>
+      <p:sp>
+        <p:nvSpPr>
+          <p:cNvPr id="25" name="Oval 24"/>
+          <p:cNvSpPr/>
+          <p:nvPr/>
+        </p:nvSpPr>
+        <p:spPr>
+          <a:xfrm>
+            <a:off x="640080" y="5340096"/>
+            <a:ext cx="310896" cy="310896"/>
+          </a:xfrm>
+          <a:prstGeom prst="ellipse">
+            <a:avLst/>
+          </a:prstGeom>
+          <a:noFill/>
+          <a:ln w="25400">
+            <a:solidFill>
+              <a:srgbClr val="2F3FBF"/>
+            </a:solidFill>
+          </a:ln>
+          <a:effectLst/>
+        </p:spPr>
+        <p:style>
+          <a:lnRef idx="1">
+            <a:schemeClr val="accent1"/>
+          </a:lnRef>
+          <a:fillRef idx="3">
+            <a:schemeClr val="accent1"/>
+          </a:fillRef>
+          <a:effectRef idx="2">
+            <a:schemeClr val="accent1"/>
+          </a:effectRef>
+          <a:fontRef idx="minor">
+            <a:schemeClr val="lt1"/>
+          </a:fontRef>
+        </p:style>
+        <p:txBody>
+          <a:bodyPr rtlCol="0" anchor="ctr" lIns="54864" rIns="54864" tIns="18288" bIns="18288"/>
+          <a:lstStyle/>
+          <a:p>
+            <a:pPr algn="ctr"/>
+          </a:p>
+        </p:txBody>
+      </p:sp>
+      <p:sp>
+        <p:nvSpPr>
+          <p:cNvPr id="26" name="Oval 25"/>
+          <p:cNvSpPr/>
+          <p:nvPr/>
+        </p:nvSpPr>
+        <p:spPr>
+          <a:xfrm>
+            <a:off x="705368" y="5405384"/>
+            <a:ext cx="180319" cy="180319"/>
+          </a:xfrm>
+          <a:prstGeom prst="ellipse">
+            <a:avLst/>
+          </a:prstGeom>
+          <a:noFill/>
+          <a:ln w="25400">
+            <a:solidFill>
+              <a:srgbClr val="2F3FBF"/>
+            </a:solidFill>
+          </a:ln>
+          <a:effectLst/>
+        </p:spPr>
+        <p:style>
+          <a:lnRef idx="1">
+            <a:schemeClr val="accent1"/>
+          </a:lnRef>
+          <a:fillRef idx="3">
+            <a:schemeClr val="accent1"/>
+          </a:fillRef>
+          <a:effectRef idx="2">
+            <a:schemeClr val="accent1"/>
+          </a:effectRef>
+          <a:fontRef idx="minor">
+            <a:schemeClr val="lt1"/>
+          </a:fontRef>
+        </p:style>
+        <p:txBody>
+          <a:bodyPr rtlCol="0" anchor="ctr" lIns="54864" rIns="54864" tIns="18288" bIns="18288"/>
+          <a:lstStyle/>
+          <a:p>
+            <a:pPr algn="ctr"/>
+          </a:p>
+        </p:txBody>
+      </p:sp>
+      <p:sp>
+        <p:nvSpPr>
+          <p:cNvPr id="27" name="Oval 26"/>
+          <p:cNvSpPr/>
+          <p:nvPr/>
+        </p:nvSpPr>
+        <p:spPr>
+          <a:xfrm>
+            <a:off x="764438" y="5464454"/>
+            <a:ext cx="62179" cy="62179"/>
+          </a:xfrm>
+          <a:prstGeom prst="ellipse">
+            <a:avLst/>
+          </a:prstGeom>
+          <a:solidFill>
+            <a:srgbClr val="F2A900"/>
+          </a:solidFill>
+          <a:ln>
+            <a:noFill/>
+          </a:ln>
+          <a:effectLst/>
+        </p:spPr>
+        <p:style>
+          <a:lnRef idx="1">
+            <a:schemeClr val="accent1"/>
+          </a:lnRef>
+          <a:fillRef idx="3">
+            <a:schemeClr val="accent1"/>
+          </a:fillRef>
+          <a:effectRef idx="2">
+            <a:schemeClr val="accent1"/>
+          </a:effectRef>
+          <a:fontRef idx="minor">
+            <a:schemeClr val="lt1"/>
+          </a:fontRef>
+        </p:style>
+        <p:txBody>
+          <a:bodyPr rtlCol="0" anchor="ctr" lIns="54864" rIns="54864" tIns="18288" bIns="18288"/>
+          <a:lstStyle/>
+          <a:p>
+            <a:pPr algn="ctr"/>
+          </a:p>
+        </p:txBody>
+      </p:sp>
+      <p:sp>
+        <p:nvSpPr>
+          <p:cNvPr id="28" name="TextBox 27"/>
+          <p:cNvSpPr txBox="1"/>
+          <p:nvPr/>
+        </p:nvSpPr>
+        <p:spPr>
+          <a:xfrm>
+            <a:off x="1143000" y="5312664"/>
+            <a:ext cx="3566160" cy="365760"/>
+          </a:xfrm>
+          <a:prstGeom prst="rect">
+            <a:avLst/>
+          </a:prstGeom>
+          <a:noFill/>
+        </p:spPr>
+        <p:txBody>
+          <a:bodyPr wrap="square" lIns="0" rIns="0" tIns="0" bIns="0" anchor="t">
+            <a:spAutoFit/>
+          </a:bodyPr>
+          <a:lstStyle/>
+          <a:p>
+            <a:pPr algn="l"/>
+            <a:r>
+              <a:rPr sz="1500" b="0" i="0">
+                <a:solidFill>
+                  <a:srgbClr val="2F3FBF"/>
+                </a:solidFill>
+                <a:latin typeface="Arial Black"/>
+              </a:rPr>
+              <a:t>Календарь и печать</a:t>
+            </a:r>
+          </a:p>
+        </p:txBody>
+      </p:sp>
+      <p:sp>
+        <p:nvSpPr>
+          <p:cNvPr id="29" name="TextBox 28"/>
+          <p:cNvSpPr txBox="1"/>
+          <p:nvPr/>
+        </p:nvSpPr>
+        <p:spPr>
+          <a:xfrm>
+            <a:off x="1143000" y="5660136"/>
+            <a:ext cx="3566160" cy="502920"/>
+          </a:xfrm>
+          <a:prstGeom prst="rect">
+            <a:avLst/>
+          </a:prstGeom>
+          <a:noFill/>
+        </p:spPr>
+        <p:txBody>
+          <a:bodyPr wrap="square" lIns="0" rIns="0" tIns="0" bIns="0" anchor="t">
+            <a:spAutoFit/>
+          </a:bodyPr>
+          <a:lstStyle/>
+          <a:p>
+            <a:pPr algn="l"/>
+            <a:r>
+              <a:rPr sz="1100" b="0" i="0">
+                <a:solidFill>
+                  <a:srgbClr val="4A4F62"/>
+                </a:solidFill>
+                <a:latin typeface="Arial Black"/>
+              </a:rPr>
+              <a:t>.ics с напоминаниями; версия для родителей</a:t>
+            </a:r>
+          </a:p>
+        </p:txBody>
+      </p:sp>
+    </p:spTree>
+  </p:cSld>
+  <p:clrMapOvr>
+    <a:masterClrMapping/>
+  </p:clrMapOvr>
+</p:sld>
+</file>
+
+<file path=ppt/slides/slide9.xml><?xml version="1.0" encoding="utf-8"?>
 <p:sld xmlns:a="http://schemas.openxmlformats.org/drawingml/2006/main" xmlns:p="http://schemas.openxmlformats.org/presentationml/2006/main" xmlns:r="http://schemas.openxmlformats.org/officeDocument/2006/relationships">
   <p:cSld>
     <p:bg>
@@ -13504,821 +16159,6 @@
                 <a:latin typeface="Arial Black"/>
               </a:rPr>
               <a:t>Срок не опубликован? Не угадываем — пользователь указывает дату сам, когда её объявят</a:t>
-            </a:r>
-          </a:p>
-        </p:txBody>
-      </p:sp>
-    </p:spTree>
-  </p:cSld>
-  <p:clrMapOvr>
-    <a:masterClrMapping/>
-  </p:clrMapOvr>
-</p:sld>
-</file>
-
-<file path=ppt/slides/slide9.xml><?xml version="1.0" encoding="utf-8"?>
-<p:sld xmlns:a="http://schemas.openxmlformats.org/drawingml/2006/main" xmlns:p="http://schemas.openxmlformats.org/presentationml/2006/main" xmlns:r="http://schemas.openxmlformats.org/officeDocument/2006/relationships">
-  <p:cSld>
-    <p:bg>
-      <p:bgPr>
-        <a:solidFill>
-          <a:srgbClr val="FFFFFF"/>
-        </a:solidFill>
-        <a:effectLst/>
-      </p:bgPr>
-    </p:bg>
-    <p:spTree>
-      <p:nvGrpSpPr>
-        <p:cNvPr id="1" name=""/>
-        <p:cNvGrpSpPr/>
-        <p:nvPr/>
-      </p:nvGrpSpPr>
-      <p:grpSpPr/>
-      <p:sp>
-        <p:nvSpPr>
-          <p:cNvPr id="2" name="Oval 1"/>
-          <p:cNvSpPr/>
-          <p:nvPr/>
-        </p:nvSpPr>
-        <p:spPr>
-          <a:xfrm>
-            <a:off x="10408615" y="384048"/>
-            <a:ext cx="384048" cy="384048"/>
-          </a:xfrm>
-          <a:prstGeom prst="ellipse">
-            <a:avLst/>
-          </a:prstGeom>
-          <a:noFill/>
-          <a:ln w="25400">
-            <a:solidFill>
-              <a:srgbClr val="2F3FBF"/>
-            </a:solidFill>
-          </a:ln>
-          <a:effectLst/>
-        </p:spPr>
-        <p:style>
-          <a:lnRef idx="1">
-            <a:schemeClr val="accent1"/>
-          </a:lnRef>
-          <a:fillRef idx="3">
-            <a:schemeClr val="accent1"/>
-          </a:fillRef>
-          <a:effectRef idx="2">
-            <a:schemeClr val="accent1"/>
-          </a:effectRef>
-          <a:fontRef idx="minor">
-            <a:schemeClr val="lt1"/>
-          </a:fontRef>
-        </p:style>
-        <p:txBody>
-          <a:bodyPr rtlCol="0" anchor="ctr" lIns="54864" rIns="54864" tIns="18288" bIns="18288"/>
-          <a:lstStyle/>
-          <a:p>
-            <a:pPr algn="ctr"/>
-          </a:p>
-        </p:txBody>
-      </p:sp>
-      <p:sp>
-        <p:nvSpPr>
-          <p:cNvPr id="3" name="Oval 2"/>
-          <p:cNvSpPr/>
-          <p:nvPr/>
-        </p:nvSpPr>
-        <p:spPr>
-          <a:xfrm>
-            <a:off x="10489265" y="464698"/>
-            <a:ext cx="222747" cy="222747"/>
-          </a:xfrm>
-          <a:prstGeom prst="ellipse">
-            <a:avLst/>
-          </a:prstGeom>
-          <a:noFill/>
-          <a:ln w="25400">
-            <a:solidFill>
-              <a:srgbClr val="2F3FBF"/>
-            </a:solidFill>
-          </a:ln>
-          <a:effectLst/>
-        </p:spPr>
-        <p:style>
-          <a:lnRef idx="1">
-            <a:schemeClr val="accent1"/>
-          </a:lnRef>
-          <a:fillRef idx="3">
-            <a:schemeClr val="accent1"/>
-          </a:fillRef>
-          <a:effectRef idx="2">
-            <a:schemeClr val="accent1"/>
-          </a:effectRef>
-          <a:fontRef idx="minor">
-            <a:schemeClr val="lt1"/>
-          </a:fontRef>
-        </p:style>
-        <p:txBody>
-          <a:bodyPr rtlCol="0" anchor="ctr" lIns="54864" rIns="54864" tIns="18288" bIns="18288"/>
-          <a:lstStyle/>
-          <a:p>
-            <a:pPr algn="ctr"/>
-          </a:p>
-        </p:txBody>
-      </p:sp>
-      <p:sp>
-        <p:nvSpPr>
-          <p:cNvPr id="4" name="Oval 3"/>
-          <p:cNvSpPr/>
-          <p:nvPr/>
-        </p:nvSpPr>
-        <p:spPr>
-          <a:xfrm>
-            <a:off x="10562234" y="537667"/>
-            <a:ext cx="76809" cy="76809"/>
-          </a:xfrm>
-          <a:prstGeom prst="ellipse">
-            <a:avLst/>
-          </a:prstGeom>
-          <a:solidFill>
-            <a:srgbClr val="F2A900"/>
-          </a:solidFill>
-          <a:ln>
-            <a:noFill/>
-          </a:ln>
-          <a:effectLst/>
-        </p:spPr>
-        <p:style>
-          <a:lnRef idx="1">
-            <a:schemeClr val="accent1"/>
-          </a:lnRef>
-          <a:fillRef idx="3">
-            <a:schemeClr val="accent1"/>
-          </a:fillRef>
-          <a:effectRef idx="2">
-            <a:schemeClr val="accent1"/>
-          </a:effectRef>
-          <a:fontRef idx="minor">
-            <a:schemeClr val="lt1"/>
-          </a:fontRef>
-        </p:style>
-        <p:txBody>
-          <a:bodyPr rtlCol="0" anchor="ctr" lIns="54864" rIns="54864" tIns="18288" bIns="18288"/>
-          <a:lstStyle/>
-          <a:p>
-            <a:pPr algn="ctr"/>
-          </a:p>
-        </p:txBody>
-      </p:sp>
-      <p:sp>
-        <p:nvSpPr>
-          <p:cNvPr id="5" name="TextBox 4"/>
-          <p:cNvSpPr txBox="1"/>
-          <p:nvPr/>
-        </p:nvSpPr>
-        <p:spPr>
-          <a:xfrm>
-            <a:off x="10884103" y="402336"/>
-            <a:ext cx="1371600" cy="365760"/>
-          </a:xfrm>
-          <a:prstGeom prst="rect">
-            <a:avLst/>
-          </a:prstGeom>
-          <a:noFill/>
-        </p:spPr>
-        <p:txBody>
-          <a:bodyPr wrap="square" lIns="0" rIns="0" tIns="0" bIns="0" anchor="ctr">
-            <a:spAutoFit/>
-          </a:bodyPr>
-          <a:lstStyle/>
-          <a:p>
-            <a:pPr algn="l"/>
-            <a:r>
-              <a:rPr sz="1400" b="0" i="0">
-                <a:solidFill>
-                  <a:srgbClr val="2F3FBF"/>
-                </a:solidFill>
-                <a:latin typeface="Arial Black"/>
-              </a:rPr>
-              <a:t>Maqsat</a:t>
-            </a:r>
-          </a:p>
-        </p:txBody>
-      </p:sp>
-      <p:sp>
-        <p:nvSpPr>
-          <p:cNvPr id="6" name="TextBox 5"/>
-          <p:cNvSpPr txBox="1"/>
-          <p:nvPr/>
-        </p:nvSpPr>
-        <p:spPr>
-          <a:xfrm>
-            <a:off x="640080" y="868680"/>
-            <a:ext cx="10881360" cy="777240"/>
-          </a:xfrm>
-          <a:prstGeom prst="rect">
-            <a:avLst/>
-          </a:prstGeom>
-          <a:noFill/>
-        </p:spPr>
-        <p:txBody>
-          <a:bodyPr wrap="square" lIns="0" rIns="0" tIns="0" bIns="0" anchor="t">
-            <a:spAutoFit/>
-          </a:bodyPr>
-          <a:lstStyle/>
-          <a:p>
-            <a:pPr algn="l"/>
-            <a:r>
-              <a:rPr sz="4400" b="0" i="0">
-                <a:solidFill>
-                  <a:srgbClr val="2F3FBF"/>
-                </a:solidFill>
-                <a:latin typeface="Arial Black"/>
-              </a:rPr>
-              <a:t>КОНКУРЕНТЫ</a:t>
-            </a:r>
-          </a:p>
-        </p:txBody>
-      </p:sp>
-      <p:sp>
-        <p:nvSpPr>
-          <p:cNvPr id="7" name="TextBox 6"/>
-          <p:cNvSpPr txBox="1"/>
-          <p:nvPr/>
-        </p:nvSpPr>
-        <p:spPr>
-          <a:xfrm>
-            <a:off x="640080" y="1618488"/>
-            <a:ext cx="10881360" cy="822960"/>
-          </a:xfrm>
-          <a:prstGeom prst="rect">
-            <a:avLst/>
-          </a:prstGeom>
-          <a:noFill/>
-        </p:spPr>
-        <p:txBody>
-          <a:bodyPr wrap="square" lIns="0" rIns="0" tIns="0" bIns="0" anchor="t">
-            <a:spAutoFit/>
-          </a:bodyPr>
-          <a:lstStyle/>
-          <a:p>
-            <a:pPr algn="l"/>
-            <a:r>
-              <a:rPr sz="2200" b="0" i="0">
-                <a:solidFill>
-                  <a:srgbClr val="111424"/>
-                </a:solidFill>
-                <a:latin typeface="Arial Black"/>
-              </a:rPr>
-              <a:t>ЧЕМ МЫ ОТЛИЧАЕМСЯ</a:t>
-            </a:r>
-          </a:p>
-        </p:txBody>
-      </p:sp>
-      <p:sp>
-        <p:nvSpPr>
-          <p:cNvPr id="8" name="TextBox 7"/>
-          <p:cNvSpPr txBox="1"/>
-          <p:nvPr/>
-        </p:nvSpPr>
-        <p:spPr>
-          <a:xfrm>
-            <a:off x="4892040" y="2194560"/>
-            <a:ext cx="6583680" cy="274320"/>
-          </a:xfrm>
-          <a:prstGeom prst="rect">
-            <a:avLst/>
-          </a:prstGeom>
-          <a:noFill/>
-        </p:spPr>
-        <p:txBody>
-          <a:bodyPr wrap="square" lIns="0" rIns="0" tIns="0" bIns="0" anchor="t">
-            <a:spAutoFit/>
-          </a:bodyPr>
-          <a:lstStyle/>
-          <a:p>
-            <a:pPr algn="l"/>
-            <a:r>
-              <a:rPr sz="1000" b="0" i="0">
-                <a:solidFill>
-                  <a:srgbClr val="7A8094"/>
-                </a:solidFill>
-                <a:latin typeface="Arial Black"/>
-              </a:rPr>
-              <a:t>ЧТО ЕСТЬ СЕЙЧАС</a:t>
-            </a:r>
-          </a:p>
-        </p:txBody>
-      </p:sp>
-      <p:sp>
-        <p:nvSpPr>
-          <p:cNvPr id="9" name="Rectangle 8"/>
-          <p:cNvSpPr/>
-          <p:nvPr/>
-        </p:nvSpPr>
-        <p:spPr>
-          <a:xfrm>
-            <a:off x="640080" y="2514600"/>
-            <a:ext cx="10881360" cy="621792"/>
-          </a:xfrm>
-          <a:prstGeom prst="rect">
-            <a:avLst/>
-          </a:prstGeom>
-          <a:solidFill>
-            <a:srgbClr val="F6F7FB"/>
-          </a:solidFill>
-          <a:ln w="12700">
-            <a:solidFill>
-              <a:srgbClr val="DADEEC"/>
-            </a:solidFill>
-          </a:ln>
-          <a:effectLst/>
-        </p:spPr>
-        <p:style>
-          <a:lnRef idx="1">
-            <a:schemeClr val="accent1"/>
-          </a:lnRef>
-          <a:fillRef idx="3">
-            <a:schemeClr val="accent1"/>
-          </a:fillRef>
-          <a:effectRef idx="2">
-            <a:schemeClr val="accent1"/>
-          </a:effectRef>
-          <a:fontRef idx="minor">
-            <a:schemeClr val="lt1"/>
-          </a:fontRef>
-        </p:style>
-        <p:txBody>
-          <a:bodyPr rtlCol="0" anchor="ctr" lIns="54864" rIns="54864" tIns="18288" bIns="18288"/>
-          <a:lstStyle/>
-          <a:p>
-            <a:pPr algn="ctr"/>
-          </a:p>
-        </p:txBody>
-      </p:sp>
-      <p:sp>
-        <p:nvSpPr>
-          <p:cNvPr id="10" name="TextBox 9"/>
-          <p:cNvSpPr txBox="1"/>
-          <p:nvPr/>
-        </p:nvSpPr>
-        <p:spPr>
-          <a:xfrm>
-            <a:off x="868680" y="2587752"/>
-            <a:ext cx="3840480" cy="502920"/>
-          </a:xfrm>
-          <a:prstGeom prst="rect">
-            <a:avLst/>
-          </a:prstGeom>
-          <a:noFill/>
-        </p:spPr>
-        <p:txBody>
-          <a:bodyPr wrap="square" lIns="0" rIns="0" tIns="0" bIns="0" anchor="ctr">
-            <a:spAutoFit/>
-          </a:bodyPr>
-          <a:lstStyle/>
-          <a:p>
-            <a:pPr algn="l"/>
-            <a:r>
-              <a:rPr sz="1200" b="0" i="0">
-                <a:solidFill>
-                  <a:srgbClr val="111424"/>
-                </a:solidFill>
-                <a:latin typeface="Arial Black"/>
-              </a:rPr>
-              <a:t>Telegram-каналы с объявлениями</a:t>
-            </a:r>
-          </a:p>
-        </p:txBody>
-      </p:sp>
-      <p:sp>
-        <p:nvSpPr>
-          <p:cNvPr id="11" name="TextBox 10"/>
-          <p:cNvSpPr txBox="1"/>
-          <p:nvPr/>
-        </p:nvSpPr>
-        <p:spPr>
-          <a:xfrm>
-            <a:off x="4892040" y="2569464"/>
-            <a:ext cx="6492240" cy="530352"/>
-          </a:xfrm>
-          <a:prstGeom prst="rect">
-            <a:avLst/>
-          </a:prstGeom>
-          <a:noFill/>
-        </p:spPr>
-        <p:txBody>
-          <a:bodyPr wrap="square" lIns="0" rIns="0" tIns="0" bIns="0" anchor="ctr">
-            <a:spAutoFit/>
-          </a:bodyPr>
-          <a:lstStyle/>
-          <a:p>
-            <a:pPr algn="l"/>
-            <a:r>
-              <a:rPr sz="1100" b="0" i="0">
-                <a:solidFill>
-                  <a:srgbClr val="4A4F62"/>
-                </a:solidFill>
-                <a:latin typeface="Arial Black"/>
-              </a:rPr>
-              <a:t>Лента постов: быстро, но без проверки условий и без плана; старое уходит вниз.</a:t>
-            </a:r>
-          </a:p>
-        </p:txBody>
-      </p:sp>
-      <p:sp>
-        <p:nvSpPr>
-          <p:cNvPr id="12" name="Rectangle 11"/>
-          <p:cNvSpPr/>
-          <p:nvPr/>
-        </p:nvSpPr>
-        <p:spPr>
-          <a:xfrm>
-            <a:off x="640080" y="3227832"/>
-            <a:ext cx="10881360" cy="621792"/>
-          </a:xfrm>
-          <a:prstGeom prst="rect">
-            <a:avLst/>
-          </a:prstGeom>
-          <a:solidFill>
-            <a:srgbClr val="F6F7FB"/>
-          </a:solidFill>
-          <a:ln w="12700">
-            <a:solidFill>
-              <a:srgbClr val="DADEEC"/>
-            </a:solidFill>
-          </a:ln>
-          <a:effectLst/>
-        </p:spPr>
-        <p:style>
-          <a:lnRef idx="1">
-            <a:schemeClr val="accent1"/>
-          </a:lnRef>
-          <a:fillRef idx="3">
-            <a:schemeClr val="accent1"/>
-          </a:fillRef>
-          <a:effectRef idx="2">
-            <a:schemeClr val="accent1"/>
-          </a:effectRef>
-          <a:fontRef idx="minor">
-            <a:schemeClr val="lt1"/>
-          </a:fontRef>
-        </p:style>
-        <p:txBody>
-          <a:bodyPr rtlCol="0" anchor="ctr" lIns="54864" rIns="54864" tIns="18288" bIns="18288"/>
-          <a:lstStyle/>
-          <a:p>
-            <a:pPr algn="ctr"/>
-          </a:p>
-        </p:txBody>
-      </p:sp>
-      <p:sp>
-        <p:nvSpPr>
-          <p:cNvPr id="13" name="TextBox 12"/>
-          <p:cNvSpPr txBox="1"/>
-          <p:nvPr/>
-        </p:nvSpPr>
-        <p:spPr>
-          <a:xfrm>
-            <a:off x="868680" y="3300984"/>
-            <a:ext cx="3840480" cy="502920"/>
-          </a:xfrm>
-          <a:prstGeom prst="rect">
-            <a:avLst/>
-          </a:prstGeom>
-          <a:noFill/>
-        </p:spPr>
-        <p:txBody>
-          <a:bodyPr wrap="square" lIns="0" rIns="0" tIns="0" bIns="0" anchor="ctr">
-            <a:spAutoFit/>
-          </a:bodyPr>
-          <a:lstStyle/>
-          <a:p>
-            <a:pPr algn="l"/>
-            <a:r>
-              <a:rPr sz="1200" b="0" i="0">
-                <a:solidFill>
-                  <a:srgbClr val="111424"/>
-                </a:solidFill>
-                <a:latin typeface="Arial Black"/>
-              </a:rPr>
-              <a:t>Сайты-агрегаторы возможностей</a:t>
-            </a:r>
-          </a:p>
-        </p:txBody>
-      </p:sp>
-      <p:sp>
-        <p:nvSpPr>
-          <p:cNvPr id="14" name="TextBox 13"/>
-          <p:cNvSpPr txBox="1"/>
-          <p:nvPr/>
-        </p:nvSpPr>
-        <p:spPr>
-          <a:xfrm>
-            <a:off x="4892040" y="3282696"/>
-            <a:ext cx="6492240" cy="530352"/>
-          </a:xfrm>
-          <a:prstGeom prst="rect">
-            <a:avLst/>
-          </a:prstGeom>
-          <a:noFill/>
-        </p:spPr>
-        <p:txBody>
-          <a:bodyPr wrap="square" lIns="0" rIns="0" tIns="0" bIns="0" anchor="ctr">
-            <a:spAutoFit/>
-          </a:bodyPr>
-          <a:lstStyle/>
-          <a:p>
-            <a:pPr algn="l"/>
-            <a:r>
-              <a:rPr sz="1100" b="0" i="0">
-                <a:solidFill>
-                  <a:srgbClr val="4A4F62"/>
-                </a:solidFill>
-                <a:latin typeface="Arial Black"/>
-              </a:rPr>
-              <a:t>Большие каталоги на английском; фильтры по стране и типу, но не по твоему профилю.</a:t>
-            </a:r>
-          </a:p>
-        </p:txBody>
-      </p:sp>
-      <p:sp>
-        <p:nvSpPr>
-          <p:cNvPr id="15" name="Rectangle 14"/>
-          <p:cNvSpPr/>
-          <p:nvPr/>
-        </p:nvSpPr>
-        <p:spPr>
-          <a:xfrm>
-            <a:off x="640080" y="3941064"/>
-            <a:ext cx="10881360" cy="621792"/>
-          </a:xfrm>
-          <a:prstGeom prst="rect">
-            <a:avLst/>
-          </a:prstGeom>
-          <a:solidFill>
-            <a:srgbClr val="F6F7FB"/>
-          </a:solidFill>
-          <a:ln w="12700">
-            <a:solidFill>
-              <a:srgbClr val="DADEEC"/>
-            </a:solidFill>
-          </a:ln>
-          <a:effectLst/>
-        </p:spPr>
-        <p:style>
-          <a:lnRef idx="1">
-            <a:schemeClr val="accent1"/>
-          </a:lnRef>
-          <a:fillRef idx="3">
-            <a:schemeClr val="accent1"/>
-          </a:fillRef>
-          <a:effectRef idx="2">
-            <a:schemeClr val="accent1"/>
-          </a:effectRef>
-          <a:fontRef idx="minor">
-            <a:schemeClr val="lt1"/>
-          </a:fontRef>
-        </p:style>
-        <p:txBody>
-          <a:bodyPr rtlCol="0" anchor="ctr" lIns="54864" rIns="54864" tIns="18288" bIns="18288"/>
-          <a:lstStyle/>
-          <a:p>
-            <a:pPr algn="ctr"/>
-          </a:p>
-        </p:txBody>
-      </p:sp>
-      <p:sp>
-        <p:nvSpPr>
-          <p:cNvPr id="16" name="TextBox 15"/>
-          <p:cNvSpPr txBox="1"/>
-          <p:nvPr/>
-        </p:nvSpPr>
-        <p:spPr>
-          <a:xfrm>
-            <a:off x="868680" y="4014216"/>
-            <a:ext cx="3840480" cy="502920"/>
-          </a:xfrm>
-          <a:prstGeom prst="rect">
-            <a:avLst/>
-          </a:prstGeom>
-          <a:noFill/>
-        </p:spPr>
-        <p:txBody>
-          <a:bodyPr wrap="square" lIns="0" rIns="0" tIns="0" bIns="0" anchor="ctr">
-            <a:spAutoFit/>
-          </a:bodyPr>
-          <a:lstStyle/>
-          <a:p>
-            <a:pPr algn="l"/>
-            <a:r>
-              <a:rPr sz="1200" b="0" i="0">
-                <a:solidFill>
-                  <a:srgbClr val="111424"/>
-                </a:solidFill>
-                <a:latin typeface="Arial Black"/>
-              </a:rPr>
-              <a:t>Официальные сайты программ</a:t>
-            </a:r>
-          </a:p>
-        </p:txBody>
-      </p:sp>
-      <p:sp>
-        <p:nvSpPr>
-          <p:cNvPr id="17" name="TextBox 16"/>
-          <p:cNvSpPr txBox="1"/>
-          <p:nvPr/>
-        </p:nvSpPr>
-        <p:spPr>
-          <a:xfrm>
-            <a:off x="4892040" y="3995928"/>
-            <a:ext cx="6492240" cy="530352"/>
-          </a:xfrm>
-          <a:prstGeom prst="rect">
-            <a:avLst/>
-          </a:prstGeom>
-          <a:noFill/>
-        </p:spPr>
-        <p:txBody>
-          <a:bodyPr wrap="square" lIns="0" rIns="0" tIns="0" bIns="0" anchor="ctr">
-            <a:spAutoFit/>
-          </a:bodyPr>
-          <a:lstStyle/>
-          <a:p>
-            <a:pPr algn="l"/>
-            <a:r>
-              <a:rPr sz="1100" b="0" i="0">
-                <a:solidFill>
-                  <a:srgbClr val="4A4F62"/>
-                </a:solidFill>
-                <a:latin typeface="Arial Black"/>
-              </a:rPr>
-              <a:t>Точные условия, но у каждой программы свой сайт, свой язык и свой календарь.</a:t>
-            </a:r>
-          </a:p>
-        </p:txBody>
-      </p:sp>
-      <p:sp>
-        <p:nvSpPr>
-          <p:cNvPr id="18" name="Rectangle 17"/>
-          <p:cNvSpPr/>
-          <p:nvPr/>
-        </p:nvSpPr>
-        <p:spPr>
-          <a:xfrm>
-            <a:off x="640080" y="4654296"/>
-            <a:ext cx="10881360" cy="621792"/>
-          </a:xfrm>
-          <a:prstGeom prst="rect">
-            <a:avLst/>
-          </a:prstGeom>
-          <a:solidFill>
-            <a:srgbClr val="F6F7FB"/>
-          </a:solidFill>
-          <a:ln w="12700">
-            <a:solidFill>
-              <a:srgbClr val="DADEEC"/>
-            </a:solidFill>
-          </a:ln>
-          <a:effectLst/>
-        </p:spPr>
-        <p:style>
-          <a:lnRef idx="1">
-            <a:schemeClr val="accent1"/>
-          </a:lnRef>
-          <a:fillRef idx="3">
-            <a:schemeClr val="accent1"/>
-          </a:fillRef>
-          <a:effectRef idx="2">
-            <a:schemeClr val="accent1"/>
-          </a:effectRef>
-          <a:fontRef idx="minor">
-            <a:schemeClr val="lt1"/>
-          </a:fontRef>
-        </p:style>
-        <p:txBody>
-          <a:bodyPr rtlCol="0" anchor="ctr" lIns="54864" rIns="54864" tIns="18288" bIns="18288"/>
-          <a:lstStyle/>
-          <a:p>
-            <a:pPr algn="ctr"/>
-          </a:p>
-        </p:txBody>
-      </p:sp>
-      <p:sp>
-        <p:nvSpPr>
-          <p:cNvPr id="19" name="TextBox 18"/>
-          <p:cNvSpPr txBox="1"/>
-          <p:nvPr/>
-        </p:nvSpPr>
-        <p:spPr>
-          <a:xfrm>
-            <a:off x="868680" y="4727448"/>
-            <a:ext cx="3840480" cy="502920"/>
-          </a:xfrm>
-          <a:prstGeom prst="rect">
-            <a:avLst/>
-          </a:prstGeom>
-          <a:noFill/>
-        </p:spPr>
-        <p:txBody>
-          <a:bodyPr wrap="square" lIns="0" rIns="0" tIns="0" bIns="0" anchor="ctr">
-            <a:spAutoFit/>
-          </a:bodyPr>
-          <a:lstStyle/>
-          <a:p>
-            <a:pPr algn="l"/>
-            <a:r>
-              <a:rPr sz="1200" b="0" i="0">
-                <a:solidFill>
-                  <a:srgbClr val="111424"/>
-                </a:solidFill>
-                <a:latin typeface="Arial Black"/>
-              </a:rPr>
-              <a:t>Школьный учитель / профориентатор</a:t>
-            </a:r>
-          </a:p>
-        </p:txBody>
-      </p:sp>
-      <p:sp>
-        <p:nvSpPr>
-          <p:cNvPr id="20" name="TextBox 19"/>
-          <p:cNvSpPr txBox="1"/>
-          <p:nvPr/>
-        </p:nvSpPr>
-        <p:spPr>
-          <a:xfrm>
-            <a:off x="4892040" y="4709159"/>
-            <a:ext cx="6492240" cy="530352"/>
-          </a:xfrm>
-          <a:prstGeom prst="rect">
-            <a:avLst/>
-          </a:prstGeom>
-          <a:noFill/>
-        </p:spPr>
-        <p:txBody>
-          <a:bodyPr wrap="square" lIns="0" rIns="0" tIns="0" bIns="0" anchor="ctr">
-            <a:spAutoFit/>
-          </a:bodyPr>
-          <a:lstStyle/>
-          <a:p>
-            <a:pPr algn="l"/>
-            <a:r>
-              <a:rPr sz="1100" b="0" i="0">
-                <a:solidFill>
-                  <a:srgbClr val="4A4F62"/>
-                </a:solidFill>
-                <a:latin typeface="Arial Black"/>
-              </a:rPr>
-              <a:t>Знает учеников, но не успевает следить за десятками программ и сроков.</a:t>
-            </a:r>
-          </a:p>
-        </p:txBody>
-      </p:sp>
-      <p:sp>
-        <p:nvSpPr>
-          <p:cNvPr id="21" name="Rectangle 20"/>
-          <p:cNvSpPr/>
-          <p:nvPr/>
-        </p:nvSpPr>
-        <p:spPr>
-          <a:xfrm>
-            <a:off x="640080" y="5486400"/>
-            <a:ext cx="10881360" cy="548640"/>
-          </a:xfrm>
-          <a:prstGeom prst="rect">
-            <a:avLst/>
-          </a:prstGeom>
-          <a:solidFill>
-            <a:srgbClr val="2F3FBF"/>
-          </a:solidFill>
-          <a:ln>
-            <a:noFill/>
-          </a:ln>
-          <a:effectLst/>
-        </p:spPr>
-        <p:style>
-          <a:lnRef idx="1">
-            <a:schemeClr val="accent1"/>
-          </a:lnRef>
-          <a:fillRef idx="3">
-            <a:schemeClr val="accent1"/>
-          </a:fillRef>
-          <a:effectRef idx="2">
-            <a:schemeClr val="accent1"/>
-          </a:effectRef>
-          <a:fontRef idx="minor">
-            <a:schemeClr val="lt1"/>
-          </a:fontRef>
-        </p:style>
-        <p:txBody>
-          <a:bodyPr rtlCol="0" anchor="ctr" lIns="54864" rIns="54864" tIns="18288" bIns="18288" wrap="square"/>
-          <a:lstStyle/>
-          <a:p>
-            <a:pPr algn="ctr"/>
-            <a:r>
-              <a:rPr sz="1200">
-                <a:solidFill>
-                  <a:srgbClr val="FFFFFF"/>
-                </a:solidFill>
-                <a:latin typeface="Arial Black"/>
-              </a:rPr>
-              <a:t>Maqsat: проверка условий под твой профиль + план назад от дедлайна + календарь + честные данные</a:t>
             </a:r>
           </a:p>
         </p:txBody>

--- a/docs/Maqsat_VentureHack2026_Final.pptx
+++ b/docs/Maqsat_VentureHack2026_Final.pptx
@@ -7785,7 +7785,7 @@
                 </a:solidFill>
                 <a:latin typeface="Arial Black"/>
               </a:rPr>
-              <a:t>GitHub: [ссылка]   ·   Демо: [ссылка]</a:t>
+              <a:t>GitHub: github.com/sas1k00/hackatonishe   ·   Демо: sas1k00.github.io/hackatonishe</a:t>
             </a:r>
           </a:p>
         </p:txBody>

--- a/docs/Maqsat_VentureHack2026_Final.pptx
+++ b/docs/Maqsat_VentureHack2026_Final.pptx
@@ -6245,7 +6245,24 @@
                 </a:solidFill>
                 <a:latin typeface="Arial Black"/>
               </a:rPr>
-              <a:t>37 автотестов: база, условия, план, календарь</a:t>
+              <a:t>42 автотеста — запускаются на GitHub при каждом изменении</a:t>
+            </a:r>
+          </a:p>
+          <a:p>
+            <a:pPr algn="l" marL="201168" indent="-201168">
+              <a:spcAft>
+                <a:spcPts val="800"/>
+              </a:spcAft>
+              <a:buChar char="•"/>
+            </a:pPr>
+            <a:r>
+              <a:rPr sz="1200" b="0" i="0">
+                <a:solidFill>
+                  <a:srgbClr val="4A4F62"/>
+                </a:solidFill>
+                <a:latin typeface="Arial Black"/>
+              </a:rPr>
+              <a:t>Раз в неделю робот проверяет все ссылки-источники</a:t>
             </a:r>
           </a:p>
         </p:txBody>
@@ -6384,6 +6401,23 @@
                 <a:latin typeface="Arial Black"/>
               </a:rPr>
               <a:t>Работает офлайн (PWA), ставится на телефон</a:t>
+            </a:r>
+          </a:p>
+          <a:p>
+            <a:pPr algn="l" marL="201168" indent="-201168">
+              <a:spcAft>
+                <a:spcPts val="800"/>
+              </a:spcAft>
+              <a:buChar char="•"/>
+            </a:pPr>
+            <a:r>
+              <a:rPr sz="1200" b="0" i="0">
+                <a:solidFill>
+                  <a:srgbClr val="4A4F62"/>
+                </a:solidFill>
+                <a:latin typeface="Arial Black"/>
+              </a:rPr>
+              <a:t>Русский и қазақша</a:t>
             </a:r>
           </a:p>
           <a:p>
@@ -7715,7 +7749,7 @@
                 </a:solidFill>
                 <a:latin typeface="Arial Black"/>
               </a:rPr>
-              <a:t>Казахский язык · база 100+ возможностей с проверкой модератором · еженедельная автопроверка источников · Telegram-напоминания · режим для профориентатора</a:t>
+              <a:t>Вычитка казахского и перевод описаний · база 100+ возможностей с проверкой модератором · сравнение содержимого страниц-источников · Telegram-напоминания · режим для профориентатора</a:t>
             </a:r>
           </a:p>
         </p:txBody>
@@ -11952,7 +11986,7 @@
                 </a:solidFill>
                 <a:latin typeface="Arial Black"/>
               </a:rPr>
-              <a:t>Когда записаться на IELTS, просить рекомендации, писать эссе. Конфликты дедлайнов — сразу видны.</a:t>
+              <a:t>Когда записаться на IELTS, просить рекомендации, писать эссе. И на годы вперёд: «доступно в 2028» → цель с планом с сегодняшнего дня.</a:t>
             </a:r>
           </a:p>
         </p:txBody>
@@ -12130,7 +12164,7 @@
                 </a:solidFill>
                 <a:latin typeface="Arial Black"/>
               </a:rPr>
-              <a:t>Работает на любом телефоне и без интернета — без установки и регистрации</a:t>
+              <a:t>На любом телефоне и без интернета · без регистрации · русский и қазақша</a:t>
             </a:r>
           </a:p>
         </p:txBody>
@@ -12935,7 +12969,7 @@
                 </a:solidFill>
                 <a:latin typeface="Arial Black"/>
               </a:rPr>
-              <a:t>Сейчас 10 класс. Профиль «переводится» на год вперёд: станет доступно в 2028.</a:t>
+              <a:t>Сейчас 10 класс → «доступно в 2028». Можно сразу сделать это целью: план начинается сегодня.</a:t>
             </a:r>
           </a:p>
         </p:txBody>

--- a/docs/Maqsat_VentureHack2026_Final.pptx
+++ b/docs/Maqsat_VentureHack2026_Final.pptx
@@ -723,7 +723,7 @@
           <a:lstStyle/>
           <a:p>
             <a:r>
-              <a:t>Интервью: школьный профориентатор, завуч, учитель английского, ученик, подававший на FLEX, родитель. Полные ответы — docs/research-plan.md. Подчеркните: изменения сделаны в ту же ночь.</a:t>
+              <a:t>Интервью: школьный профориентатор, завуч, учитель английского, ученик, подававший на FLEX, родитель. Юзабилити-тест: 6 учеников 10–12 класса прошли его на расстоянии через #test, результаты прислали сами (таблица в docs/research-plan.md). Выборка маленькая и без 9 класса — так и говорите. Подчеркните: изменения сделаны в ту же ночь.</a:t>
             </a:r>
           </a:p>
         </p:txBody>
@@ -9985,7 +9985,7 @@
                 </a:solidFill>
                 <a:latin typeface="Arial Black"/>
               </a:rPr>
-              <a:t>ИНТЕРВЬЮ</a:t>
+              <a:t>ИНТЕРВЬЮ И ТЕСТ</a:t>
             </a:r>
           </a:p>
         </p:txBody>
@@ -10020,7 +10020,7 @@
                 </a:solidFill>
                 <a:latin typeface="Arial Black"/>
               </a:rPr>
-              <a:t>5 ЧЕЛОВЕК — И ЧТО МЫ ИЗМЕНИЛИ ЗА НОЧЬ</a:t>
+              <a:t>5 ИНТЕРВЬЮ, 6 УЧЕНИКОВ — И ЧТО МЫ ИЗМЕНИЛИ ЗА НОЧЬ</a:t>
             </a:r>
           </a:p>
         </p:txBody>
@@ -11236,11 +11236,11 @@
             <a:r>
               <a:rPr sz="1100" b="0" i="0">
                 <a:solidFill>
-                  <a:srgbClr val="7A8094"/>
-                </a:solidFill>
-                <a:latin typeface="Arial Black"/>
-              </a:rPr>
-              <a:t>Все пятеро доверяют только данным со ссылкой на источник и датой проверки — это уже было в продукте. «Шансы поступления» и шаблонные эссе нам прямо не советовали делать.</a:t>
+                  <a:srgbClr val="2F3FBF"/>
+                </a:solidFill>
+                <a:latin typeface="Arial Black"/>
+              </a:rPr>
+              <a:t>Юзабилити-тест: 6 учеников (10–12 класс) сами нашли возможность и добавили её в план — медиана 1:31 (от 0:57 до 2:55). 6 из 6 воспользовались бы. 3 из 6 не поняли «средний балл» — исправили.</a:t>
             </a:r>
           </a:p>
         </p:txBody>

--- a/docs/Maqsat_VentureHack2026_Final.pptx
+++ b/docs/Maqsat_VentureHack2026_Final.pptx
@@ -17,6 +17,7 @@
     <p:sldId id="265" r:id="rId17"/>
     <p:sldId id="266" r:id="rId18"/>
     <p:sldId id="267" r:id="rId19"/>
+    <p:sldId id="268" r:id="rId20"/>
   </p:sldIdLst>
   <p:sldSz cx="12191695" cy="6858000" type="screen4x3"/>
   <p:notesSz cx="6858000" cy="9144000"/>
@@ -514,6 +515,76 @@
           <a:p>
             <a:r>
               <a:t>Maqsat — по-казахски «цель». Мы помогаем пройти путь от «я где-то слышал о программе» до «заявка отправлена вовремя».</a:t>
+            </a:r>
+          </a:p>
+        </p:txBody>
+      </p:sp>
+      <p:sp>
+        <p:nvSpPr>
+          <p:cNvPr id="4" name="Slide Number Placeholder 3"/>
+          <p:cNvSpPr>
+            <a:spLocks noGrp="1"/>
+          </p:cNvSpPr>
+          <p:nvPr>
+            <p:ph type="sldNum" idx="5" sz="quarter"/>
+          </p:nvPr>
+        </p:nvSpPr>
+        <p:spPr/>
+      </p:sp>
+    </p:spTree>
+  </p:cSld>
+  <p:clrMapOvr>
+    <a:masterClrMapping/>
+  </p:clrMapOvr>
+</p:notes>
+</file>
+
+<file path=ppt/notesSlides/notesSlide10.xml><?xml version="1.0" encoding="utf-8"?>
+<p:notes xmlns:a="http://schemas.openxmlformats.org/drawingml/2006/main" xmlns:p="http://schemas.openxmlformats.org/presentationml/2006/main" xmlns:r="http://schemas.openxmlformats.org/officeDocument/2006/relationships">
+  <p:cSld>
+    <p:spTree>
+      <p:nvGrpSpPr>
+        <p:cNvPr id="1" name=""/>
+        <p:cNvGrpSpPr/>
+        <p:nvPr/>
+      </p:nvGrpSpPr>
+      <p:grpSpPr>
+        <a:xfrm>
+          <a:off x="0" y="0"/>
+          <a:ext cx="0" cy="0"/>
+          <a:chOff x="0" y="0"/>
+          <a:chExt cx="0" cy="0"/>
+        </a:xfrm>
+      </p:grpSpPr>
+      <p:sp>
+        <p:nvSpPr>
+          <p:cNvPr id="2" name="Slide Image Placeholder 1"/>
+          <p:cNvSpPr>
+            <a:spLocks noGrp="1"/>
+          </p:cNvSpPr>
+          <p:nvPr>
+            <p:ph type="sldImg" idx="2"/>
+          </p:nvPr>
+        </p:nvSpPr>
+        <p:spPr/>
+      </p:sp>
+      <p:sp>
+        <p:nvSpPr>
+          <p:cNvPr id="3" name="Notes Placeholder 2"/>
+          <p:cNvSpPr>
+            <a:spLocks noGrp="1"/>
+          </p:cNvSpPr>
+          <p:nvPr>
+            <p:ph type="body" idx="3" sz="quarter"/>
+          </p:nvPr>
+        </p:nvSpPr>
+        <p:spPr/>
+        <p:txBody>
+          <a:bodyPr/>
+          <a:lstStyle/>
+          <a:p>
+            <a:r>
+              <a:t>Главное: ученик никогда не платит и данные не продаются — иначе пропадает доверие. Основная ставка — школы: профориентатору нужно видеть весь класс, а не одного ученика. Цен не называем: их ещё не проверяли. Если спросят «сколько» — «проверим интервью со школами; сначала нужно подтвердить, что за это готовы платить».</a:t>
             </a:r>
           </a:p>
         </p:txBody>
@@ -6502,6 +6573,1191 @@
 <file path=ppt/slides/slide12.xml><?xml version="1.0" encoding="utf-8"?>
 <p:sld xmlns:a="http://schemas.openxmlformats.org/drawingml/2006/main" xmlns:p="http://schemas.openxmlformats.org/presentationml/2006/main" xmlns:r="http://schemas.openxmlformats.org/officeDocument/2006/relationships">
   <p:cSld>
+    <p:bg>
+      <p:bgPr>
+        <a:solidFill>
+          <a:srgbClr val="FFFFFF"/>
+        </a:solidFill>
+        <a:effectLst/>
+      </p:bgPr>
+    </p:bg>
+    <p:spTree>
+      <p:nvGrpSpPr>
+        <p:cNvPr id="1" name=""/>
+        <p:cNvGrpSpPr/>
+        <p:nvPr/>
+      </p:nvGrpSpPr>
+      <p:grpSpPr/>
+      <p:sp>
+        <p:nvSpPr>
+          <p:cNvPr id="2" name="Oval 1"/>
+          <p:cNvSpPr/>
+          <p:nvPr/>
+        </p:nvSpPr>
+        <p:spPr>
+          <a:xfrm>
+            <a:off x="10408615" y="384048"/>
+            <a:ext cx="384048" cy="384048"/>
+          </a:xfrm>
+          <a:prstGeom prst="ellipse">
+            <a:avLst/>
+          </a:prstGeom>
+          <a:noFill/>
+          <a:ln w="25400">
+            <a:solidFill>
+              <a:srgbClr val="2F3FBF"/>
+            </a:solidFill>
+          </a:ln>
+          <a:effectLst/>
+        </p:spPr>
+        <p:style>
+          <a:lnRef idx="1">
+            <a:schemeClr val="accent1"/>
+          </a:lnRef>
+          <a:fillRef idx="3">
+            <a:schemeClr val="accent1"/>
+          </a:fillRef>
+          <a:effectRef idx="2">
+            <a:schemeClr val="accent1"/>
+          </a:effectRef>
+          <a:fontRef idx="minor">
+            <a:schemeClr val="lt1"/>
+          </a:fontRef>
+        </p:style>
+        <p:txBody>
+          <a:bodyPr rtlCol="0" anchor="ctr" lIns="54864" rIns="54864" tIns="18288" bIns="18288"/>
+          <a:lstStyle/>
+          <a:p>
+            <a:pPr algn="ctr"/>
+          </a:p>
+        </p:txBody>
+      </p:sp>
+      <p:sp>
+        <p:nvSpPr>
+          <p:cNvPr id="3" name="Oval 2"/>
+          <p:cNvSpPr/>
+          <p:nvPr/>
+        </p:nvSpPr>
+        <p:spPr>
+          <a:xfrm>
+            <a:off x="10489265" y="464698"/>
+            <a:ext cx="222747" cy="222747"/>
+          </a:xfrm>
+          <a:prstGeom prst="ellipse">
+            <a:avLst/>
+          </a:prstGeom>
+          <a:noFill/>
+          <a:ln w="25400">
+            <a:solidFill>
+              <a:srgbClr val="2F3FBF"/>
+            </a:solidFill>
+          </a:ln>
+          <a:effectLst/>
+        </p:spPr>
+        <p:style>
+          <a:lnRef idx="1">
+            <a:schemeClr val="accent1"/>
+          </a:lnRef>
+          <a:fillRef idx="3">
+            <a:schemeClr val="accent1"/>
+          </a:fillRef>
+          <a:effectRef idx="2">
+            <a:schemeClr val="accent1"/>
+          </a:effectRef>
+          <a:fontRef idx="minor">
+            <a:schemeClr val="lt1"/>
+          </a:fontRef>
+        </p:style>
+        <p:txBody>
+          <a:bodyPr rtlCol="0" anchor="ctr" lIns="54864" rIns="54864" tIns="18288" bIns="18288"/>
+          <a:lstStyle/>
+          <a:p>
+            <a:pPr algn="ctr"/>
+          </a:p>
+        </p:txBody>
+      </p:sp>
+      <p:sp>
+        <p:nvSpPr>
+          <p:cNvPr id="4" name="Oval 3"/>
+          <p:cNvSpPr/>
+          <p:nvPr/>
+        </p:nvSpPr>
+        <p:spPr>
+          <a:xfrm>
+            <a:off x="10562234" y="537667"/>
+            <a:ext cx="76809" cy="76809"/>
+          </a:xfrm>
+          <a:prstGeom prst="ellipse">
+            <a:avLst/>
+          </a:prstGeom>
+          <a:solidFill>
+            <a:srgbClr val="F2A900"/>
+          </a:solidFill>
+          <a:ln>
+            <a:noFill/>
+          </a:ln>
+          <a:effectLst/>
+        </p:spPr>
+        <p:style>
+          <a:lnRef idx="1">
+            <a:schemeClr val="accent1"/>
+          </a:lnRef>
+          <a:fillRef idx="3">
+            <a:schemeClr val="accent1"/>
+          </a:fillRef>
+          <a:effectRef idx="2">
+            <a:schemeClr val="accent1"/>
+          </a:effectRef>
+          <a:fontRef idx="minor">
+            <a:schemeClr val="lt1"/>
+          </a:fontRef>
+        </p:style>
+        <p:txBody>
+          <a:bodyPr rtlCol="0" anchor="ctr" lIns="54864" rIns="54864" tIns="18288" bIns="18288"/>
+          <a:lstStyle/>
+          <a:p>
+            <a:pPr algn="ctr"/>
+          </a:p>
+        </p:txBody>
+      </p:sp>
+      <p:sp>
+        <p:nvSpPr>
+          <p:cNvPr id="5" name="TextBox 4"/>
+          <p:cNvSpPr txBox="1"/>
+          <p:nvPr/>
+        </p:nvSpPr>
+        <p:spPr>
+          <a:xfrm>
+            <a:off x="10884103" y="402336"/>
+            <a:ext cx="1371600" cy="365760"/>
+          </a:xfrm>
+          <a:prstGeom prst="rect">
+            <a:avLst/>
+          </a:prstGeom>
+          <a:noFill/>
+        </p:spPr>
+        <p:txBody>
+          <a:bodyPr wrap="square" lIns="0" rIns="0" tIns="0" bIns="0" anchor="ctr">
+            <a:spAutoFit/>
+          </a:bodyPr>
+          <a:lstStyle/>
+          <a:p>
+            <a:pPr algn="l"/>
+            <a:r>
+              <a:rPr sz="1400" b="0" i="0">
+                <a:solidFill>
+                  <a:srgbClr val="2F3FBF"/>
+                </a:solidFill>
+                <a:latin typeface="Arial Black"/>
+              </a:rPr>
+              <a:t>Maqsat</a:t>
+            </a:r>
+          </a:p>
+        </p:txBody>
+      </p:sp>
+      <p:sp>
+        <p:nvSpPr>
+          <p:cNvPr id="6" name="TextBox 5"/>
+          <p:cNvSpPr txBox="1"/>
+          <p:nvPr/>
+        </p:nvSpPr>
+        <p:spPr>
+          <a:xfrm>
+            <a:off x="640080" y="868680"/>
+            <a:ext cx="10881360" cy="777240"/>
+          </a:xfrm>
+          <a:prstGeom prst="rect">
+            <a:avLst/>
+          </a:prstGeom>
+          <a:noFill/>
+        </p:spPr>
+        <p:txBody>
+          <a:bodyPr wrap="square" lIns="0" rIns="0" tIns="0" bIns="0" anchor="t">
+            <a:spAutoFit/>
+          </a:bodyPr>
+          <a:lstStyle/>
+          <a:p>
+            <a:pPr algn="l"/>
+            <a:r>
+              <a:rPr sz="4400" b="0" i="0">
+                <a:solidFill>
+                  <a:srgbClr val="2F3FBF"/>
+                </a:solidFill>
+                <a:latin typeface="Arial Black"/>
+              </a:rPr>
+              <a:t>МОДЕЛЬ</a:t>
+            </a:r>
+          </a:p>
+        </p:txBody>
+      </p:sp>
+      <p:sp>
+        <p:nvSpPr>
+          <p:cNvPr id="7" name="TextBox 6"/>
+          <p:cNvSpPr txBox="1"/>
+          <p:nvPr/>
+        </p:nvSpPr>
+        <p:spPr>
+          <a:xfrm>
+            <a:off x="640080" y="1618488"/>
+            <a:ext cx="10881360" cy="822960"/>
+          </a:xfrm>
+          <a:prstGeom prst="rect">
+            <a:avLst/>
+          </a:prstGeom>
+          <a:noFill/>
+        </p:spPr>
+        <p:txBody>
+          <a:bodyPr wrap="square" lIns="0" rIns="0" tIns="0" bIns="0" anchor="t">
+            <a:spAutoFit/>
+          </a:bodyPr>
+          <a:lstStyle/>
+          <a:p>
+            <a:pPr algn="l"/>
+            <a:r>
+              <a:rPr sz="2200" b="0" i="0">
+                <a:solidFill>
+                  <a:srgbClr val="111424"/>
+                </a:solidFill>
+                <a:latin typeface="Arial Black"/>
+              </a:rPr>
+              <a:t>УЧЕНИКУ — БЕСПЛАТНО. ПЛАТЯТ ТЕ, КОМУ МЫ ЭКОНОМИМ ВРЕМЯ</a:t>
+            </a:r>
+          </a:p>
+        </p:txBody>
+      </p:sp>
+      <p:sp>
+        <p:nvSpPr>
+          <p:cNvPr id="8" name="Rectangle 7"/>
+          <p:cNvSpPr/>
+          <p:nvPr/>
+        </p:nvSpPr>
+        <p:spPr>
+          <a:xfrm>
+            <a:off x="640080" y="2240280"/>
+            <a:ext cx="3474720" cy="2788920"/>
+          </a:xfrm>
+          <a:prstGeom prst="rect">
+            <a:avLst/>
+          </a:prstGeom>
+          <a:solidFill>
+            <a:srgbClr val="F6F7FB"/>
+          </a:solidFill>
+          <a:ln>
+            <a:noFill/>
+          </a:ln>
+          <a:effectLst/>
+        </p:spPr>
+        <p:style>
+          <a:lnRef idx="1">
+            <a:schemeClr val="accent1"/>
+          </a:lnRef>
+          <a:fillRef idx="3">
+            <a:schemeClr val="accent1"/>
+          </a:fillRef>
+          <a:effectRef idx="2">
+            <a:schemeClr val="accent1"/>
+          </a:effectRef>
+          <a:fontRef idx="minor">
+            <a:schemeClr val="lt1"/>
+          </a:fontRef>
+        </p:style>
+        <p:txBody>
+          <a:bodyPr rtlCol="0" anchor="ctr" lIns="54864" rIns="54864" tIns="18288" bIns="18288"/>
+          <a:lstStyle/>
+          <a:p>
+            <a:pPr algn="ctr"/>
+          </a:p>
+        </p:txBody>
+      </p:sp>
+      <p:sp>
+        <p:nvSpPr>
+          <p:cNvPr id="9" name="Oval 8"/>
+          <p:cNvSpPr/>
+          <p:nvPr/>
+        </p:nvSpPr>
+        <p:spPr>
+          <a:xfrm>
+            <a:off x="914400" y="2468880"/>
+            <a:ext cx="457200" cy="457200"/>
+          </a:xfrm>
+          <a:prstGeom prst="ellipse">
+            <a:avLst/>
+          </a:prstGeom>
+          <a:noFill/>
+          <a:ln w="25400">
+            <a:solidFill>
+              <a:srgbClr val="2F3FBF"/>
+            </a:solidFill>
+          </a:ln>
+          <a:effectLst/>
+        </p:spPr>
+        <p:style>
+          <a:lnRef idx="1">
+            <a:schemeClr val="accent1"/>
+          </a:lnRef>
+          <a:fillRef idx="3">
+            <a:schemeClr val="accent1"/>
+          </a:fillRef>
+          <a:effectRef idx="2">
+            <a:schemeClr val="accent1"/>
+          </a:effectRef>
+          <a:fontRef idx="minor">
+            <a:schemeClr val="lt1"/>
+          </a:fontRef>
+        </p:style>
+        <p:txBody>
+          <a:bodyPr rtlCol="0" anchor="ctr" lIns="54864" rIns="54864" tIns="18288" bIns="18288"/>
+          <a:lstStyle/>
+          <a:p>
+            <a:pPr algn="ctr"/>
+          </a:p>
+        </p:txBody>
+      </p:sp>
+      <p:sp>
+        <p:nvSpPr>
+          <p:cNvPr id="10" name="Oval 9"/>
+          <p:cNvSpPr/>
+          <p:nvPr/>
+        </p:nvSpPr>
+        <p:spPr>
+          <a:xfrm>
+            <a:off x="1010412" y="2564892"/>
+            <a:ext cx="265176" cy="265176"/>
+          </a:xfrm>
+          <a:prstGeom prst="ellipse">
+            <a:avLst/>
+          </a:prstGeom>
+          <a:noFill/>
+          <a:ln w="25400">
+            <a:solidFill>
+              <a:srgbClr val="2F3FBF"/>
+            </a:solidFill>
+          </a:ln>
+          <a:effectLst/>
+        </p:spPr>
+        <p:style>
+          <a:lnRef idx="1">
+            <a:schemeClr val="accent1"/>
+          </a:lnRef>
+          <a:fillRef idx="3">
+            <a:schemeClr val="accent1"/>
+          </a:fillRef>
+          <a:effectRef idx="2">
+            <a:schemeClr val="accent1"/>
+          </a:effectRef>
+          <a:fontRef idx="minor">
+            <a:schemeClr val="lt1"/>
+          </a:fontRef>
+        </p:style>
+        <p:txBody>
+          <a:bodyPr rtlCol="0" anchor="ctr" lIns="54864" rIns="54864" tIns="18288" bIns="18288"/>
+          <a:lstStyle/>
+          <a:p>
+            <a:pPr algn="ctr"/>
+          </a:p>
+        </p:txBody>
+      </p:sp>
+      <p:sp>
+        <p:nvSpPr>
+          <p:cNvPr id="11" name="Oval 10"/>
+          <p:cNvSpPr/>
+          <p:nvPr/>
+        </p:nvSpPr>
+        <p:spPr>
+          <a:xfrm>
+            <a:off x="1097280" y="2651760"/>
+            <a:ext cx="91440" cy="91440"/>
+          </a:xfrm>
+          <a:prstGeom prst="ellipse">
+            <a:avLst/>
+          </a:prstGeom>
+          <a:solidFill>
+            <a:srgbClr val="F2A900"/>
+          </a:solidFill>
+          <a:ln>
+            <a:noFill/>
+          </a:ln>
+          <a:effectLst/>
+        </p:spPr>
+        <p:style>
+          <a:lnRef idx="1">
+            <a:schemeClr val="accent1"/>
+          </a:lnRef>
+          <a:fillRef idx="3">
+            <a:schemeClr val="accent1"/>
+          </a:fillRef>
+          <a:effectRef idx="2">
+            <a:schemeClr val="accent1"/>
+          </a:effectRef>
+          <a:fontRef idx="minor">
+            <a:schemeClr val="lt1"/>
+          </a:fontRef>
+        </p:style>
+        <p:txBody>
+          <a:bodyPr rtlCol="0" anchor="ctr" lIns="54864" rIns="54864" tIns="18288" bIns="18288"/>
+          <a:lstStyle/>
+          <a:p>
+            <a:pPr algn="ctr"/>
+          </a:p>
+        </p:txBody>
+      </p:sp>
+      <p:sp>
+        <p:nvSpPr>
+          <p:cNvPr id="12" name="TextBox 11"/>
+          <p:cNvSpPr txBox="1"/>
+          <p:nvPr/>
+        </p:nvSpPr>
+        <p:spPr>
+          <a:xfrm>
+            <a:off x="960119" y="3108960"/>
+            <a:ext cx="2926080" cy="320040"/>
+          </a:xfrm>
+          <a:prstGeom prst="rect">
+            <a:avLst/>
+          </a:prstGeom>
+          <a:noFill/>
+        </p:spPr>
+        <p:txBody>
+          <a:bodyPr wrap="square" lIns="0" rIns="0" tIns="0" bIns="0" anchor="t">
+            <a:spAutoFit/>
+          </a:bodyPr>
+          <a:lstStyle/>
+          <a:p>
+            <a:pPr algn="l"/>
+            <a:r>
+              <a:rPr sz="1100" b="0" i="0">
+                <a:solidFill>
+                  <a:srgbClr val="7A8094"/>
+                </a:solidFill>
+                <a:latin typeface="Arial Black"/>
+              </a:rPr>
+              <a:t>УЧЕНИК И РОДИТЕЛЬ</a:t>
+            </a:r>
+          </a:p>
+        </p:txBody>
+      </p:sp>
+      <p:sp>
+        <p:nvSpPr>
+          <p:cNvPr id="13" name="TextBox 12"/>
+          <p:cNvSpPr txBox="1"/>
+          <p:nvPr/>
+        </p:nvSpPr>
+        <p:spPr>
+          <a:xfrm>
+            <a:off x="960119" y="3429000"/>
+            <a:ext cx="2926080" cy="457200"/>
+          </a:xfrm>
+          <a:prstGeom prst="rect">
+            <a:avLst/>
+          </a:prstGeom>
+          <a:noFill/>
+        </p:spPr>
+        <p:txBody>
+          <a:bodyPr wrap="square" lIns="0" rIns="0" tIns="0" bIns="0" anchor="t">
+            <a:spAutoFit/>
+          </a:bodyPr>
+          <a:lstStyle/>
+          <a:p>
+            <a:pPr algn="l"/>
+            <a:r>
+              <a:rPr sz="1800" b="0" i="0">
+                <a:solidFill>
+                  <a:srgbClr val="2F3FBF"/>
+                </a:solidFill>
+                <a:latin typeface="Arial Black"/>
+              </a:rPr>
+              <a:t>Бесплатно</a:t>
+            </a:r>
+          </a:p>
+        </p:txBody>
+      </p:sp>
+      <p:sp>
+        <p:nvSpPr>
+          <p:cNvPr id="14" name="TextBox 13"/>
+          <p:cNvSpPr txBox="1"/>
+          <p:nvPr/>
+        </p:nvSpPr>
+        <p:spPr>
+          <a:xfrm>
+            <a:off x="960119" y="3931920"/>
+            <a:ext cx="2926080" cy="1097280"/>
+          </a:xfrm>
+          <a:prstGeom prst="rect">
+            <a:avLst/>
+          </a:prstGeom>
+          <a:noFill/>
+        </p:spPr>
+        <p:txBody>
+          <a:bodyPr wrap="square" lIns="0" rIns="0" tIns="0" bIns="0" anchor="t">
+            <a:spAutoFit/>
+          </a:bodyPr>
+          <a:lstStyle/>
+          <a:p>
+            <a:pPr algn="l"/>
+            <a:r>
+              <a:rPr sz="1100" b="0" i="0">
+                <a:solidFill>
+                  <a:srgbClr val="4A4F62"/>
+                </a:solidFill>
+                <a:latin typeface="Arial Black"/>
+              </a:rPr>
+              <a:t>Подбор, план, календарь — всегда бесплатно. Без рекламы и продажи данных: профиль и так не покидает телефон.</a:t>
+            </a:r>
+          </a:p>
+        </p:txBody>
+      </p:sp>
+      <p:sp>
+        <p:nvSpPr>
+          <p:cNvPr id="15" name="Rectangle 14"/>
+          <p:cNvSpPr/>
+          <p:nvPr/>
+        </p:nvSpPr>
+        <p:spPr>
+          <a:xfrm>
+            <a:off x="4343400" y="2240280"/>
+            <a:ext cx="3474720" cy="2788920"/>
+          </a:xfrm>
+          <a:prstGeom prst="rect">
+            <a:avLst/>
+          </a:prstGeom>
+          <a:solidFill>
+            <a:srgbClr val="2F3FBF"/>
+          </a:solidFill>
+          <a:ln>
+            <a:noFill/>
+          </a:ln>
+          <a:effectLst/>
+        </p:spPr>
+        <p:style>
+          <a:lnRef idx="1">
+            <a:schemeClr val="accent1"/>
+          </a:lnRef>
+          <a:fillRef idx="3">
+            <a:schemeClr val="accent1"/>
+          </a:fillRef>
+          <a:effectRef idx="2">
+            <a:schemeClr val="accent1"/>
+          </a:effectRef>
+          <a:fontRef idx="minor">
+            <a:schemeClr val="lt1"/>
+          </a:fontRef>
+        </p:style>
+        <p:txBody>
+          <a:bodyPr rtlCol="0" anchor="ctr" lIns="54864" rIns="54864" tIns="18288" bIns="18288"/>
+          <a:lstStyle/>
+          <a:p>
+            <a:pPr algn="ctr"/>
+          </a:p>
+        </p:txBody>
+      </p:sp>
+      <p:sp>
+        <p:nvSpPr>
+          <p:cNvPr id="16" name="Oval 15"/>
+          <p:cNvSpPr/>
+          <p:nvPr/>
+        </p:nvSpPr>
+        <p:spPr>
+          <a:xfrm>
+            <a:off x="4617720" y="2468880"/>
+            <a:ext cx="457200" cy="457200"/>
+          </a:xfrm>
+          <a:prstGeom prst="ellipse">
+            <a:avLst/>
+          </a:prstGeom>
+          <a:noFill/>
+          <a:ln w="25400">
+            <a:solidFill>
+              <a:srgbClr val="FFFFFF"/>
+            </a:solidFill>
+          </a:ln>
+          <a:effectLst/>
+        </p:spPr>
+        <p:style>
+          <a:lnRef idx="1">
+            <a:schemeClr val="accent1"/>
+          </a:lnRef>
+          <a:fillRef idx="3">
+            <a:schemeClr val="accent1"/>
+          </a:fillRef>
+          <a:effectRef idx="2">
+            <a:schemeClr val="accent1"/>
+          </a:effectRef>
+          <a:fontRef idx="minor">
+            <a:schemeClr val="lt1"/>
+          </a:fontRef>
+        </p:style>
+        <p:txBody>
+          <a:bodyPr rtlCol="0" anchor="ctr" lIns="54864" rIns="54864" tIns="18288" bIns="18288"/>
+          <a:lstStyle/>
+          <a:p>
+            <a:pPr algn="ctr"/>
+          </a:p>
+        </p:txBody>
+      </p:sp>
+      <p:sp>
+        <p:nvSpPr>
+          <p:cNvPr id="17" name="Oval 16"/>
+          <p:cNvSpPr/>
+          <p:nvPr/>
+        </p:nvSpPr>
+        <p:spPr>
+          <a:xfrm>
+            <a:off x="4713732" y="2564892"/>
+            <a:ext cx="265176" cy="265176"/>
+          </a:xfrm>
+          <a:prstGeom prst="ellipse">
+            <a:avLst/>
+          </a:prstGeom>
+          <a:noFill/>
+          <a:ln w="25400">
+            <a:solidFill>
+              <a:srgbClr val="FFFFFF"/>
+            </a:solidFill>
+          </a:ln>
+          <a:effectLst/>
+        </p:spPr>
+        <p:style>
+          <a:lnRef idx="1">
+            <a:schemeClr val="accent1"/>
+          </a:lnRef>
+          <a:fillRef idx="3">
+            <a:schemeClr val="accent1"/>
+          </a:fillRef>
+          <a:effectRef idx="2">
+            <a:schemeClr val="accent1"/>
+          </a:effectRef>
+          <a:fontRef idx="minor">
+            <a:schemeClr val="lt1"/>
+          </a:fontRef>
+        </p:style>
+        <p:txBody>
+          <a:bodyPr rtlCol="0" anchor="ctr" lIns="54864" rIns="54864" tIns="18288" bIns="18288"/>
+          <a:lstStyle/>
+          <a:p>
+            <a:pPr algn="ctr"/>
+          </a:p>
+        </p:txBody>
+      </p:sp>
+      <p:sp>
+        <p:nvSpPr>
+          <p:cNvPr id="18" name="Oval 17"/>
+          <p:cNvSpPr/>
+          <p:nvPr/>
+        </p:nvSpPr>
+        <p:spPr>
+          <a:xfrm>
+            <a:off x="4800600" y="2651760"/>
+            <a:ext cx="91440" cy="91440"/>
+          </a:xfrm>
+          <a:prstGeom prst="ellipse">
+            <a:avLst/>
+          </a:prstGeom>
+          <a:solidFill>
+            <a:srgbClr val="F2A900"/>
+          </a:solidFill>
+          <a:ln>
+            <a:noFill/>
+          </a:ln>
+          <a:effectLst/>
+        </p:spPr>
+        <p:style>
+          <a:lnRef idx="1">
+            <a:schemeClr val="accent1"/>
+          </a:lnRef>
+          <a:fillRef idx="3">
+            <a:schemeClr val="accent1"/>
+          </a:fillRef>
+          <a:effectRef idx="2">
+            <a:schemeClr val="accent1"/>
+          </a:effectRef>
+          <a:fontRef idx="minor">
+            <a:schemeClr val="lt1"/>
+          </a:fontRef>
+        </p:style>
+        <p:txBody>
+          <a:bodyPr rtlCol="0" anchor="ctr" lIns="54864" rIns="54864" tIns="18288" bIns="18288"/>
+          <a:lstStyle/>
+          <a:p>
+            <a:pPr algn="ctr"/>
+          </a:p>
+        </p:txBody>
+      </p:sp>
+      <p:sp>
+        <p:nvSpPr>
+          <p:cNvPr id="19" name="TextBox 18"/>
+          <p:cNvSpPr txBox="1"/>
+          <p:nvPr/>
+        </p:nvSpPr>
+        <p:spPr>
+          <a:xfrm>
+            <a:off x="4663440" y="3108960"/>
+            <a:ext cx="2926080" cy="320040"/>
+          </a:xfrm>
+          <a:prstGeom prst="rect">
+            <a:avLst/>
+          </a:prstGeom>
+          <a:noFill/>
+        </p:spPr>
+        <p:txBody>
+          <a:bodyPr wrap="square" lIns="0" rIns="0" tIns="0" bIns="0" anchor="t">
+            <a:spAutoFit/>
+          </a:bodyPr>
+          <a:lstStyle/>
+          <a:p>
+            <a:pPr algn="l"/>
+            <a:r>
+              <a:rPr sz="1100" b="0" i="0">
+                <a:solidFill>
+                  <a:srgbClr val="C3C9F4"/>
+                </a:solidFill>
+                <a:latin typeface="Arial Black"/>
+              </a:rPr>
+              <a:t>ШКОЛЫ И УЧЕБНЫЕ ЦЕНТРЫ</a:t>
+            </a:r>
+          </a:p>
+        </p:txBody>
+      </p:sp>
+      <p:sp>
+        <p:nvSpPr>
+          <p:cNvPr id="20" name="TextBox 19"/>
+          <p:cNvSpPr txBox="1"/>
+          <p:nvPr/>
+        </p:nvSpPr>
+        <p:spPr>
+          <a:xfrm>
+            <a:off x="4663440" y="3429000"/>
+            <a:ext cx="2926080" cy="457200"/>
+          </a:xfrm>
+          <a:prstGeom prst="rect">
+            <a:avLst/>
+          </a:prstGeom>
+          <a:noFill/>
+        </p:spPr>
+        <p:txBody>
+          <a:bodyPr wrap="square" lIns="0" rIns="0" tIns="0" bIns="0" anchor="t">
+            <a:spAutoFit/>
+          </a:bodyPr>
+          <a:lstStyle/>
+          <a:p>
+            <a:pPr algn="l"/>
+            <a:r>
+              <a:rPr sz="1800" b="0" i="0">
+                <a:solidFill>
+                  <a:srgbClr val="FFFFFF"/>
+                </a:solidFill>
+                <a:latin typeface="Arial Black"/>
+              </a:rPr>
+              <a:t>Подписка</a:t>
+            </a:r>
+          </a:p>
+        </p:txBody>
+      </p:sp>
+      <p:sp>
+        <p:nvSpPr>
+          <p:cNvPr id="21" name="TextBox 20"/>
+          <p:cNvSpPr txBox="1"/>
+          <p:nvPr/>
+        </p:nvSpPr>
+        <p:spPr>
+          <a:xfrm>
+            <a:off x="4663440" y="3931920"/>
+            <a:ext cx="2926080" cy="1097280"/>
+          </a:xfrm>
+          <a:prstGeom prst="rect">
+            <a:avLst/>
+          </a:prstGeom>
+          <a:noFill/>
+        </p:spPr>
+        <p:txBody>
+          <a:bodyPr wrap="square" lIns="0" rIns="0" tIns="0" bIns="0" anchor="t">
+            <a:spAutoFit/>
+          </a:bodyPr>
+          <a:lstStyle/>
+          <a:p>
+            <a:pPr algn="l"/>
+            <a:r>
+              <a:rPr sz="1100" b="0" i="0">
+                <a:solidFill>
+                  <a:srgbClr val="FFFFFF"/>
+                </a:solidFill>
+                <a:latin typeface="Arial Black"/>
+              </a:rPr>
+              <a:t>Режим профориентатора: весь класс на одном экране — кто на какую программу идёт, кому нужна рекомендация от школы, у кого горит срок.</a:t>
+            </a:r>
+          </a:p>
+        </p:txBody>
+      </p:sp>
+      <p:sp>
+        <p:nvSpPr>
+          <p:cNvPr id="22" name="Rectangle 21"/>
+          <p:cNvSpPr/>
+          <p:nvPr/>
+        </p:nvSpPr>
+        <p:spPr>
+          <a:xfrm>
+            <a:off x="8046719" y="2240280"/>
+            <a:ext cx="3474720" cy="2788920"/>
+          </a:xfrm>
+          <a:prstGeom prst="rect">
+            <a:avLst/>
+          </a:prstGeom>
+          <a:solidFill>
+            <a:srgbClr val="F6F7FB"/>
+          </a:solidFill>
+          <a:ln>
+            <a:noFill/>
+          </a:ln>
+          <a:effectLst/>
+        </p:spPr>
+        <p:style>
+          <a:lnRef idx="1">
+            <a:schemeClr val="accent1"/>
+          </a:lnRef>
+          <a:fillRef idx="3">
+            <a:schemeClr val="accent1"/>
+          </a:fillRef>
+          <a:effectRef idx="2">
+            <a:schemeClr val="accent1"/>
+          </a:effectRef>
+          <a:fontRef idx="minor">
+            <a:schemeClr val="lt1"/>
+          </a:fontRef>
+        </p:style>
+        <p:txBody>
+          <a:bodyPr rtlCol="0" anchor="ctr" lIns="54864" rIns="54864" tIns="18288" bIns="18288"/>
+          <a:lstStyle/>
+          <a:p>
+            <a:pPr algn="ctr"/>
+          </a:p>
+        </p:txBody>
+      </p:sp>
+      <p:sp>
+        <p:nvSpPr>
+          <p:cNvPr id="23" name="Oval 22"/>
+          <p:cNvSpPr/>
+          <p:nvPr/>
+        </p:nvSpPr>
+        <p:spPr>
+          <a:xfrm>
+            <a:off x="8321040" y="2468880"/>
+            <a:ext cx="457200" cy="457200"/>
+          </a:xfrm>
+          <a:prstGeom prst="ellipse">
+            <a:avLst/>
+          </a:prstGeom>
+          <a:noFill/>
+          <a:ln w="25400">
+            <a:solidFill>
+              <a:srgbClr val="2F3FBF"/>
+            </a:solidFill>
+          </a:ln>
+          <a:effectLst/>
+        </p:spPr>
+        <p:style>
+          <a:lnRef idx="1">
+            <a:schemeClr val="accent1"/>
+          </a:lnRef>
+          <a:fillRef idx="3">
+            <a:schemeClr val="accent1"/>
+          </a:fillRef>
+          <a:effectRef idx="2">
+            <a:schemeClr val="accent1"/>
+          </a:effectRef>
+          <a:fontRef idx="minor">
+            <a:schemeClr val="lt1"/>
+          </a:fontRef>
+        </p:style>
+        <p:txBody>
+          <a:bodyPr rtlCol="0" anchor="ctr" lIns="54864" rIns="54864" tIns="18288" bIns="18288"/>
+          <a:lstStyle/>
+          <a:p>
+            <a:pPr algn="ctr"/>
+          </a:p>
+        </p:txBody>
+      </p:sp>
+      <p:sp>
+        <p:nvSpPr>
+          <p:cNvPr id="24" name="Oval 23"/>
+          <p:cNvSpPr/>
+          <p:nvPr/>
+        </p:nvSpPr>
+        <p:spPr>
+          <a:xfrm>
+            <a:off x="8417052" y="2564892"/>
+            <a:ext cx="265176" cy="265176"/>
+          </a:xfrm>
+          <a:prstGeom prst="ellipse">
+            <a:avLst/>
+          </a:prstGeom>
+          <a:noFill/>
+          <a:ln w="25400">
+            <a:solidFill>
+              <a:srgbClr val="2F3FBF"/>
+            </a:solidFill>
+          </a:ln>
+          <a:effectLst/>
+        </p:spPr>
+        <p:style>
+          <a:lnRef idx="1">
+            <a:schemeClr val="accent1"/>
+          </a:lnRef>
+          <a:fillRef idx="3">
+            <a:schemeClr val="accent1"/>
+          </a:fillRef>
+          <a:effectRef idx="2">
+            <a:schemeClr val="accent1"/>
+          </a:effectRef>
+          <a:fontRef idx="minor">
+            <a:schemeClr val="lt1"/>
+          </a:fontRef>
+        </p:style>
+        <p:txBody>
+          <a:bodyPr rtlCol="0" anchor="ctr" lIns="54864" rIns="54864" tIns="18288" bIns="18288"/>
+          <a:lstStyle/>
+          <a:p>
+            <a:pPr algn="ctr"/>
+          </a:p>
+        </p:txBody>
+      </p:sp>
+      <p:sp>
+        <p:nvSpPr>
+          <p:cNvPr id="25" name="Oval 24"/>
+          <p:cNvSpPr/>
+          <p:nvPr/>
+        </p:nvSpPr>
+        <p:spPr>
+          <a:xfrm>
+            <a:off x="8503919" y="2651760"/>
+            <a:ext cx="91440" cy="91440"/>
+          </a:xfrm>
+          <a:prstGeom prst="ellipse">
+            <a:avLst/>
+          </a:prstGeom>
+          <a:solidFill>
+            <a:srgbClr val="F2A900"/>
+          </a:solidFill>
+          <a:ln>
+            <a:noFill/>
+          </a:ln>
+          <a:effectLst/>
+        </p:spPr>
+        <p:style>
+          <a:lnRef idx="1">
+            <a:schemeClr val="accent1"/>
+          </a:lnRef>
+          <a:fillRef idx="3">
+            <a:schemeClr val="accent1"/>
+          </a:fillRef>
+          <a:effectRef idx="2">
+            <a:schemeClr val="accent1"/>
+          </a:effectRef>
+          <a:fontRef idx="minor">
+            <a:schemeClr val="lt1"/>
+          </a:fontRef>
+        </p:style>
+        <p:txBody>
+          <a:bodyPr rtlCol="0" anchor="ctr" lIns="54864" rIns="54864" tIns="18288" bIns="18288"/>
+          <a:lstStyle/>
+          <a:p>
+            <a:pPr algn="ctr"/>
+          </a:p>
+        </p:txBody>
+      </p:sp>
+      <p:sp>
+        <p:nvSpPr>
+          <p:cNvPr id="26" name="TextBox 25"/>
+          <p:cNvSpPr txBox="1"/>
+          <p:nvPr/>
+        </p:nvSpPr>
+        <p:spPr>
+          <a:xfrm>
+            <a:off x="8366759" y="3108960"/>
+            <a:ext cx="2926080" cy="320040"/>
+          </a:xfrm>
+          <a:prstGeom prst="rect">
+            <a:avLst/>
+          </a:prstGeom>
+          <a:noFill/>
+        </p:spPr>
+        <p:txBody>
+          <a:bodyPr wrap="square" lIns="0" rIns="0" tIns="0" bIns="0" anchor="t">
+            <a:spAutoFit/>
+          </a:bodyPr>
+          <a:lstStyle/>
+          <a:p>
+            <a:pPr algn="l"/>
+            <a:r>
+              <a:rPr sz="1100" b="0" i="0">
+                <a:solidFill>
+                  <a:srgbClr val="7A8094"/>
+                </a:solidFill>
+                <a:latin typeface="Arial Black"/>
+              </a:rPr>
+              <a:t>ОРГАНИЗАТОРЫ ПРОГРАММ</a:t>
+            </a:r>
+          </a:p>
+        </p:txBody>
+      </p:sp>
+      <p:sp>
+        <p:nvSpPr>
+          <p:cNvPr id="27" name="TextBox 26"/>
+          <p:cNvSpPr txBox="1"/>
+          <p:nvPr/>
+        </p:nvSpPr>
+        <p:spPr>
+          <a:xfrm>
+            <a:off x="8366759" y="3429000"/>
+            <a:ext cx="2926080" cy="457200"/>
+          </a:xfrm>
+          <a:prstGeom prst="rect">
+            <a:avLst/>
+          </a:prstGeom>
+          <a:noFill/>
+        </p:spPr>
+        <p:txBody>
+          <a:bodyPr wrap="square" lIns="0" rIns="0" tIns="0" bIns="0" anchor="t">
+            <a:spAutoFit/>
+          </a:bodyPr>
+          <a:lstStyle/>
+          <a:p>
+            <a:pPr algn="l"/>
+            <a:r>
+              <a:rPr sz="1800" b="0" i="0">
+                <a:solidFill>
+                  <a:srgbClr val="2F3FBF"/>
+                </a:solidFill>
+                <a:latin typeface="Arial Black"/>
+              </a:rPr>
+              <a:t>Размещение</a:t>
+            </a:r>
+          </a:p>
+        </p:txBody>
+      </p:sp>
+      <p:sp>
+        <p:nvSpPr>
+          <p:cNvPr id="28" name="TextBox 27"/>
+          <p:cNvSpPr txBox="1"/>
+          <p:nvPr/>
+        </p:nvSpPr>
+        <p:spPr>
+          <a:xfrm>
+            <a:off x="8366759" y="3931920"/>
+            <a:ext cx="2926080" cy="1097280"/>
+          </a:xfrm>
+          <a:prstGeom prst="rect">
+            <a:avLst/>
+          </a:prstGeom>
+          <a:noFill/>
+        </p:spPr>
+        <p:txBody>
+          <a:bodyPr wrap="square" lIns="0" rIns="0" tIns="0" bIns="0" anchor="t">
+            <a:spAutoFit/>
+          </a:bodyPr>
+          <a:lstStyle/>
+          <a:p>
+            <a:pPr algn="l"/>
+            <a:r>
+              <a:rPr sz="1100" b="0" i="0">
+                <a:solidFill>
+                  <a:srgbClr val="4A4F62"/>
+                </a:solidFill>
+                <a:latin typeface="Arial Black"/>
+              </a:rPr>
+              <a:t>Проверенная карточка программы с обязательной ссылкой на источник. Оплата не влияет на статус «подходишь» и помечается словом «партнёр».</a:t>
+            </a:r>
+          </a:p>
+        </p:txBody>
+      </p:sp>
+      <p:sp>
+        <p:nvSpPr>
+          <p:cNvPr id="29" name="TextBox 28"/>
+          <p:cNvSpPr txBox="1"/>
+          <p:nvPr/>
+        </p:nvSpPr>
+        <p:spPr>
+          <a:xfrm>
+            <a:off x="640080" y="5257800"/>
+            <a:ext cx="10881360" cy="365760"/>
+          </a:xfrm>
+          <a:prstGeom prst="rect">
+            <a:avLst/>
+          </a:prstGeom>
+          <a:noFill/>
+        </p:spPr>
+        <p:txBody>
+          <a:bodyPr wrap="square" lIns="0" rIns="0" tIns="0" bIns="0" anchor="t">
+            <a:spAutoFit/>
+          </a:bodyPr>
+          <a:lstStyle/>
+          <a:p>
+            <a:pPr algn="l"/>
+            <a:r>
+              <a:rPr sz="1100" b="0" i="0">
+                <a:solidFill>
+                  <a:srgbClr val="2F3FBF"/>
+                </a:solidFill>
+                <a:latin typeface="Arial Black"/>
+              </a:rPr>
+              <a:t>Расходы сейчас: </a:t>
+            </a:r>
+            <a:r>
+              <a:rPr sz="1100" b="0" i="0">
+                <a:solidFill>
+                  <a:srgbClr val="111424"/>
+                </a:solidFill>
+                <a:latin typeface="Arial Black"/>
+              </a:rPr>
+              <a:t>хостинг — 0 ₸ (статический сайт на GitHub Pages). Главная статья при росте — люди, которые проверяют карточки по первоисточникам.</a:t>
+            </a:r>
+          </a:p>
+        </p:txBody>
+      </p:sp>
+      <p:sp>
+        <p:nvSpPr>
+          <p:cNvPr id="30" name="TextBox 29"/>
+          <p:cNvSpPr txBox="1"/>
+          <p:nvPr/>
+        </p:nvSpPr>
+        <p:spPr>
+          <a:xfrm>
+            <a:off x="640080" y="5806440"/>
+            <a:ext cx="10881360" cy="365760"/>
+          </a:xfrm>
+          <a:prstGeom prst="rect">
+            <a:avLst/>
+          </a:prstGeom>
+          <a:noFill/>
+        </p:spPr>
+        <p:txBody>
+          <a:bodyPr wrap="square" lIns="0" rIns="0" tIns="0" bIns="0" anchor="t">
+            <a:spAutoFit/>
+          </a:bodyPr>
+          <a:lstStyle/>
+          <a:p>
+            <a:pPr algn="l"/>
+            <a:r>
+              <a:rPr sz="1100" b="0" i="0">
+                <a:solidFill>
+                  <a:srgbClr val="7A8094"/>
+                </a:solidFill>
+                <a:latin typeface="Arial Black"/>
+              </a:rPr>
+              <a:t>Это гипотезы. Следующий шаг — интервью со школами и учебными центрами: готовы ли платить, сколько и за что именно.</a:t>
+            </a:r>
+          </a:p>
+        </p:txBody>
+      </p:sp>
+    </p:spTree>
+  </p:cSld>
+  <p:clrMapOvr>
+    <a:masterClrMapping/>
+  </p:clrMapOvr>
+</p:sld>
+</file>
+
+<file path=ppt/slides/slide13.xml><?xml version="1.0" encoding="utf-8"?>
+<p:sld xmlns:a="http://schemas.openxmlformats.org/drawingml/2006/main" xmlns:p="http://schemas.openxmlformats.org/presentationml/2006/main" xmlns:r="http://schemas.openxmlformats.org/officeDocument/2006/relationships">
+  <p:cSld>
     <p:spTree>
       <p:nvGrpSpPr>
         <p:cNvPr id="1" name=""/>
@@ -7503,7 +8759,7 @@
                 </a:solidFill>
                 <a:latin typeface="Arial Black"/>
               </a:rPr>
-              <a:t>до готового плана</a:t>
+              <a:t>до цели · в тесте 1:31</a:t>
             </a:r>
           </a:p>
         </p:txBody>
